--- a/Backend/output/Competition_Summary_FY26_Q3.pptx
+++ b/Backend/output/Competition_Summary_FY26_Q3.pptx
@@ -4668,9 +4668,9 @@
           </c:spPr>
           <c:cat>
             <c:strRef>
-              <c:f>Sheet1!$A$2:$A$8</c:f>
+              <c:f>Sheet1!$A$2:$A$7</c:f>
               <c:strCache>
-                <c:ptCount val="7"/>
+                <c:ptCount val="6"/>
                 <c:pt idx="0">
                   <c:v>NBHI</c:v>
                 </c:pt>
@@ -4687,9 +4687,6 @@
                   <c:v>ABHI</c:v>
                 </c:pt>
                 <c:pt idx="5">
-                  <c:v>Narayana</c:v>
-                </c:pt>
-                <c:pt idx="6">
                   <c:v>Galaxy</c:v>
                 </c:pt>
               </c:strCache>
@@ -4697,10 +4694,10 @@
           </c:cat>
           <c:val>
             <c:numRef>
-              <c:f>Sheet1!$B$2:$B$8</c:f>
+              <c:f>Sheet1!$B$2:$B$7</c:f>
               <c:numCache>
                 <c:formatCode>General</c:formatCode>
-                <c:ptCount val="7"/>
+                <c:ptCount val="6"/>
                 <c:pt idx="0">
                   <c:v>0.7552</c:v>
                 </c:pt>
@@ -4717,9 +4714,6 @@
                   <c:v>0.3223</c:v>
                 </c:pt>
                 <c:pt idx="5">
-                  <c:v>0</c:v>
-                </c:pt>
-                <c:pt idx="6">
                   <c:v>0.2872</c:v>
                 </c:pt>
               </c:numCache>
@@ -4832,7 +4826,86 @@
               <c:strCache>
                 <c:ptCount val="1"/>
                 <c:pt idx="0">
-                  <c:v>Uttar Pradesh</c:v>
+                  <c:v>North</c:v>
+                </c:pt>
+              </c:strCache>
+            </c:strRef>
+          </c:tx>
+          <c:spPr>
+            <a:solidFill>
+              <a:srgbClr val="FFC000"/>
+            </a:solidFill>
+          </c:spPr>
+          <c:cat>
+            <c:strRef>
+              <c:f>Sheet1!$A$2:$A$8</c:f>
+              <c:strCache>
+                <c:ptCount val="7"/>
+                <c:pt idx="0">
+                  <c:v>NBHI</c:v>
+                </c:pt>
+                <c:pt idx="1">
+                  <c:v>STAR</c:v>
+                </c:pt>
+                <c:pt idx="2">
+                  <c:v>CARE</c:v>
+                </c:pt>
+                <c:pt idx="3">
+                  <c:v>CIGNA</c:v>
+                </c:pt>
+                <c:pt idx="4">
+                  <c:v>ABHI</c:v>
+                </c:pt>
+                <c:pt idx="5">
+                  <c:v>Narayana</c:v>
+                </c:pt>
+                <c:pt idx="6">
+                  <c:v>Galaxy</c:v>
+                </c:pt>
+              </c:strCache>
+            </c:strRef>
+          </c:cat>
+          <c:val>
+            <c:numRef>
+              <c:f>Sheet1!$B$2:$B$8</c:f>
+              <c:numCache>
+                <c:formatCode>General</c:formatCode>
+                <c:ptCount val="7"/>
+                <c:pt idx="0">
+                  <c:v>0.2824</c:v>
+                </c:pt>
+                <c:pt idx="1">
+                  <c:v>0.1673</c:v>
+                </c:pt>
+                <c:pt idx="2">
+                  <c:v>0.2059</c:v>
+                </c:pt>
+                <c:pt idx="3">
+                  <c:v>0.1641</c:v>
+                </c:pt>
+                <c:pt idx="4">
+                  <c:v>0.1678</c:v>
+                </c:pt>
+                <c:pt idx="5">
+                  <c:v>0</c:v>
+                </c:pt>
+                <c:pt idx="6">
+                  <c:v>0.009</c:v>
+                </c:pt>
+              </c:numCache>
+            </c:numRef>
+          </c:val>
+        </c:ser>
+        <c:ser>
+          <c:idx val="1"/>
+          <c:order val="1"/>
+          <c:tx>
+            <c:strRef>
+              <c:f>Sheet1!$C$1</c:f>
+              <c:strCache>
+                <c:ptCount val="1"/>
+                <c:pt idx="0">
+                  <c:v>West</c:v>
                 </c:pt>
               </c:strCache>
             </c:strRef>
@@ -4873,85 +4946,6 @@
           </c:cat>
           <c:val>
             <c:numRef>
-              <c:f>Sheet1!$B$2:$B$8</c:f>
-              <c:numCache>
-                <c:formatCode>General</c:formatCode>
-                <c:ptCount val="7"/>
-                <c:pt idx="0">
-                  <c:v>0.1206</c:v>
-                </c:pt>
-                <c:pt idx="1">
-                  <c:v>0.0611</c:v>
-                </c:pt>
-                <c:pt idx="2">
-                  <c:v>0.07</c:v>
-                </c:pt>
-                <c:pt idx="3">
-                  <c:v>0.0439</c:v>
-                </c:pt>
-                <c:pt idx="4">
-                  <c:v>0.0516</c:v>
-                </c:pt>
-                <c:pt idx="5">
-                  <c:v>0</c:v>
-                </c:pt>
-                <c:pt idx="6">
-                  <c:v>0.009</c:v>
-                </c:pt>
-              </c:numCache>
-            </c:numRef>
-          </c:val>
-        </c:ser>
-        <c:ser>
-          <c:idx val="1"/>
-          <c:order val="1"/>
-          <c:tx>
-            <c:strRef>
-              <c:f>Sheet1!$C$1</c:f>
-              <c:strCache>
-                <c:ptCount val="1"/>
-                <c:pt idx="0">
-                  <c:v>Maharashtra</c:v>
-                </c:pt>
-              </c:strCache>
-            </c:strRef>
-          </c:tx>
-          <c:spPr>
-            <a:solidFill>
-              <a:srgbClr val="ED7D31"/>
-            </a:solidFill>
-          </c:spPr>
-          <c:cat>
-            <c:strRef>
-              <c:f>Sheet1!$A$2:$A$8</c:f>
-              <c:strCache>
-                <c:ptCount val="7"/>
-                <c:pt idx="0">
-                  <c:v>NBHI</c:v>
-                </c:pt>
-                <c:pt idx="1">
-                  <c:v>STAR</c:v>
-                </c:pt>
-                <c:pt idx="2">
-                  <c:v>CARE</c:v>
-                </c:pt>
-                <c:pt idx="3">
-                  <c:v>CIGNA</c:v>
-                </c:pt>
-                <c:pt idx="4">
-                  <c:v>ABHI</c:v>
-                </c:pt>
-                <c:pt idx="5">
-                  <c:v>Narayana</c:v>
-                </c:pt>
-                <c:pt idx="6">
-                  <c:v>Galaxy</c:v>
-                </c:pt>
-              </c:strCache>
-            </c:strRef>
-          </c:cat>
-          <c:val>
-            <c:numRef>
               <c:f>Sheet1!$C$2:$C$8</c:f>
               <c:numCache>
                 <c:formatCode>General</c:formatCode>
@@ -4990,7 +4984,7 @@
               <c:strCache>
                 <c:ptCount val="1"/>
                 <c:pt idx="0">
-                  <c:v>Karnataka</c:v>
+                  <c:v>South</c:v>
                 </c:pt>
               </c:strCache>
             </c:strRef>
@@ -5036,25 +5030,25 @@
                 <c:formatCode>General</c:formatCode>
                 <c:ptCount val="7"/>
                 <c:pt idx="0">
-                  <c:v>0.0868</c:v>
+                  <c:v>0.195</c:v>
                 </c:pt>
                 <c:pt idx="1">
-                  <c:v>0.0711</c:v>
+                  <c:v>0.3169</c:v>
                 </c:pt>
                 <c:pt idx="2">
-                  <c:v>0.0992</c:v>
+                  <c:v>0.1693</c:v>
                 </c:pt>
                 <c:pt idx="3">
-                  <c:v>0.1812</c:v>
+                  <c:v>0.298</c:v>
                 </c:pt>
                 <c:pt idx="4">
-                  <c:v>0.1746</c:v>
+                  <c:v>0.2363</c:v>
                 </c:pt>
                 <c:pt idx="5">
                   <c:v>1</c:v>
                 </c:pt>
                 <c:pt idx="6">
-                  <c:v>0.1593</c:v>
+                  <c:v>0.8381</c:v>
                 </c:pt>
               </c:numCache>
             </c:numRef>
@@ -5069,14 +5063,14 @@
               <c:strCache>
                 <c:ptCount val="1"/>
                 <c:pt idx="0">
-                  <c:v>Haryana</c:v>
+                  <c:v>Others (unclassified)</c:v>
                 </c:pt>
               </c:strCache>
             </c:strRef>
           </c:tx>
           <c:spPr>
             <a:solidFill>
-              <a:srgbClr val="FFC000"/>
+              <a:srgbClr val="F2F2F2"/>
             </a:solidFill>
           </c:spPr>
           <c:cat>
@@ -5111,322 +5105,6 @@
           <c:val>
             <c:numRef>
               <c:f>Sheet1!$E$2:$E$8</c:f>
-              <c:numCache>
-                <c:formatCode>General</c:formatCode>
-                <c:ptCount val="7"/>
-                <c:pt idx="0">
-                  <c:v>0.0731</c:v>
-                </c:pt>
-                <c:pt idx="1">
-                  <c:v>0.0583</c:v>
-                </c:pt>
-                <c:pt idx="2">
-                  <c:v>0.0736</c:v>
-                </c:pt>
-                <c:pt idx="3">
-                  <c:v>0.0791</c:v>
-                </c:pt>
-                <c:pt idx="4">
-                  <c:v>0.0692</c:v>
-                </c:pt>
-                <c:pt idx="5">
-                  <c:v>0</c:v>
-                </c:pt>
-                <c:pt idx="6">
-                  <c:v>0</c:v>
-                </c:pt>
-              </c:numCache>
-            </c:numRef>
-          </c:val>
-        </c:ser>
-        <c:ser>
-          <c:idx val="4"/>
-          <c:order val="4"/>
-          <c:tx>
-            <c:strRef>
-              <c:f>Sheet1!$F$1</c:f>
-              <c:strCache>
-                <c:ptCount val="1"/>
-                <c:pt idx="0">
-                  <c:v>Tamil Nadu</c:v>
-                </c:pt>
-              </c:strCache>
-            </c:strRef>
-          </c:tx>
-          <c:spPr>
-            <a:solidFill>
-              <a:srgbClr val="7C3AED"/>
-            </a:solidFill>
-          </c:spPr>
-          <c:cat>
-            <c:strRef>
-              <c:f>Sheet1!$A$2:$A$8</c:f>
-              <c:strCache>
-                <c:ptCount val="7"/>
-                <c:pt idx="0">
-                  <c:v>NBHI</c:v>
-                </c:pt>
-                <c:pt idx="1">
-                  <c:v>STAR</c:v>
-                </c:pt>
-                <c:pt idx="2">
-                  <c:v>CARE</c:v>
-                </c:pt>
-                <c:pt idx="3">
-                  <c:v>CIGNA</c:v>
-                </c:pt>
-                <c:pt idx="4">
-                  <c:v>ABHI</c:v>
-                </c:pt>
-                <c:pt idx="5">
-                  <c:v>Narayana</c:v>
-                </c:pt>
-                <c:pt idx="6">
-                  <c:v>Galaxy</c:v>
-                </c:pt>
-              </c:strCache>
-            </c:strRef>
-          </c:cat>
-          <c:val>
-            <c:numRef>
-              <c:f>Sheet1!$F$2:$F$8</c:f>
-              <c:numCache>
-                <c:formatCode>General</c:formatCode>
-                <c:ptCount val="7"/>
-                <c:pt idx="0">
-                  <c:v>0.0546</c:v>
-                </c:pt>
-                <c:pt idx="1">
-                  <c:v>0.1451</c:v>
-                </c:pt>
-                <c:pt idx="2">
-                  <c:v>0.0453</c:v>
-                </c:pt>
-                <c:pt idx="3">
-                  <c:v>0.0608</c:v>
-                </c:pt>
-                <c:pt idx="4">
-                  <c:v>0.0409</c:v>
-                </c:pt>
-                <c:pt idx="5">
-                  <c:v>0</c:v>
-                </c:pt>
-                <c:pt idx="6">
-                  <c:v>0.6788</c:v>
-                </c:pt>
-              </c:numCache>
-            </c:numRef>
-          </c:val>
-        </c:ser>
-        <c:ser>
-          <c:idx val="5"/>
-          <c:order val="5"/>
-          <c:tx>
-            <c:strRef>
-              <c:f>Sheet1!$G$1</c:f>
-              <c:strCache>
-                <c:ptCount val="1"/>
-                <c:pt idx="0">
-                  <c:v>Kerala</c:v>
-                </c:pt>
-              </c:strCache>
-            </c:strRef>
-          </c:tx>
-          <c:spPr>
-            <a:solidFill>
-              <a:srgbClr val="264E70"/>
-            </a:solidFill>
-          </c:spPr>
-          <c:cat>
-            <c:strRef>
-              <c:f>Sheet1!$A$2:$A$8</c:f>
-              <c:strCache>
-                <c:ptCount val="7"/>
-                <c:pt idx="0">
-                  <c:v>NBHI</c:v>
-                </c:pt>
-                <c:pt idx="1">
-                  <c:v>STAR</c:v>
-                </c:pt>
-                <c:pt idx="2">
-                  <c:v>CARE</c:v>
-                </c:pt>
-                <c:pt idx="3">
-                  <c:v>CIGNA</c:v>
-                </c:pt>
-                <c:pt idx="4">
-                  <c:v>ABHI</c:v>
-                </c:pt>
-                <c:pt idx="5">
-                  <c:v>Narayana</c:v>
-                </c:pt>
-                <c:pt idx="6">
-                  <c:v>Galaxy</c:v>
-                </c:pt>
-              </c:strCache>
-            </c:strRef>
-          </c:cat>
-          <c:val>
-            <c:numRef>
-              <c:f>Sheet1!$G$2:$G$8</c:f>
-              <c:numCache>
-                <c:formatCode>General</c:formatCode>
-                <c:ptCount val="7"/>
-                <c:pt idx="0">
-                  <c:v>0.0536</c:v>
-                </c:pt>
-                <c:pt idx="1">
-                  <c:v>0.1007</c:v>
-                </c:pt>
-                <c:pt idx="2">
-                  <c:v>0.0248</c:v>
-                </c:pt>
-                <c:pt idx="3">
-                  <c:v>0.056</c:v>
-                </c:pt>
-                <c:pt idx="4">
-                  <c:v>0.0208</c:v>
-                </c:pt>
-                <c:pt idx="5">
-                  <c:v>0</c:v>
-                </c:pt>
-                <c:pt idx="6">
-                  <c:v>0</c:v>
-                </c:pt>
-              </c:numCache>
-            </c:numRef>
-          </c:val>
-        </c:ser>
-        <c:ser>
-          <c:idx val="6"/>
-          <c:order val="6"/>
-          <c:tx>
-            <c:strRef>
-              <c:f>Sheet1!$H$1</c:f>
-              <c:strCache>
-                <c:ptCount val="1"/>
-                <c:pt idx="0">
-                  <c:v>Delhi</c:v>
-                </c:pt>
-              </c:strCache>
-            </c:strRef>
-          </c:tx>
-          <c:spPr>
-            <a:solidFill>
-              <a:srgbClr val="C00000"/>
-            </a:solidFill>
-          </c:spPr>
-          <c:cat>
-            <c:strRef>
-              <c:f>Sheet1!$A$2:$A$8</c:f>
-              <c:strCache>
-                <c:ptCount val="7"/>
-                <c:pt idx="0">
-                  <c:v>NBHI</c:v>
-                </c:pt>
-                <c:pt idx="1">
-                  <c:v>STAR</c:v>
-                </c:pt>
-                <c:pt idx="2">
-                  <c:v>CARE</c:v>
-                </c:pt>
-                <c:pt idx="3">
-                  <c:v>CIGNA</c:v>
-                </c:pt>
-                <c:pt idx="4">
-                  <c:v>ABHI</c:v>
-                </c:pt>
-                <c:pt idx="5">
-                  <c:v>Narayana</c:v>
-                </c:pt>
-                <c:pt idx="6">
-                  <c:v>Galaxy</c:v>
-                </c:pt>
-              </c:strCache>
-            </c:strRef>
-          </c:cat>
-          <c:val>
-            <c:numRef>
-              <c:f>Sheet1!$H$2:$H$8</c:f>
-              <c:numCache>
-                <c:formatCode>General</c:formatCode>
-                <c:ptCount val="7"/>
-                <c:pt idx="0">
-                  <c:v>0.0887</c:v>
-                </c:pt>
-                <c:pt idx="1">
-                  <c:v>0.0479</c:v>
-                </c:pt>
-                <c:pt idx="2">
-                  <c:v>0.0623</c:v>
-                </c:pt>
-                <c:pt idx="3">
-                  <c:v>0.0411</c:v>
-                </c:pt>
-                <c:pt idx="4">
-                  <c:v>0.047</c:v>
-                </c:pt>
-                <c:pt idx="5">
-                  <c:v>0</c:v>
-                </c:pt>
-                <c:pt idx="6">
-                  <c:v>0</c:v>
-                </c:pt>
-              </c:numCache>
-            </c:numRef>
-          </c:val>
-        </c:ser>
-        <c:ser>
-          <c:idx val="7"/>
-          <c:order val="7"/>
-          <c:tx>
-            <c:strRef>
-              <c:f>Sheet1!$I$1</c:f>
-              <c:strCache>
-                <c:ptCount val="1"/>
-                <c:pt idx="0">
-                  <c:v>Others</c:v>
-                </c:pt>
-              </c:strCache>
-            </c:strRef>
-          </c:tx>
-          <c:spPr>
-            <a:solidFill>
-              <a:srgbClr val="00B0B0"/>
-            </a:solidFill>
-          </c:spPr>
-          <c:cat>
-            <c:strRef>
-              <c:f>Sheet1!$A$2:$A$8</c:f>
-              <c:strCache>
-                <c:ptCount val="7"/>
-                <c:pt idx="0">
-                  <c:v>NBHI</c:v>
-                </c:pt>
-                <c:pt idx="1">
-                  <c:v>STAR</c:v>
-                </c:pt>
-                <c:pt idx="2">
-                  <c:v>CARE</c:v>
-                </c:pt>
-                <c:pt idx="3">
-                  <c:v>CIGNA</c:v>
-                </c:pt>
-                <c:pt idx="4">
-                  <c:v>ABHI</c:v>
-                </c:pt>
-                <c:pt idx="5">
-                  <c:v>Narayana</c:v>
-                </c:pt>
-                <c:pt idx="6">
-                  <c:v>Galaxy</c:v>
-                </c:pt>
-              </c:strCache>
-            </c:strRef>
-          </c:cat>
-          <c:val>
-            <c:numRef>
-              <c:f>Sheet1!$I$2:$I$8</c:f>
               <c:numCache>
                 <c:formatCode>General</c:formatCode>
                 <c:ptCount val="7"/>
@@ -5556,7 +5234,7 @@
     <c:plotArea>
       <c:barChart>
         <c:barDir val="col"/>
-        <c:grouping val="clustered"/>
+        <c:grouping val="percentStacked"/>
         <c:ser>
           <c:idx val="0"/>
           <c:order val="0"/>
@@ -5566,14 +5244,14 @@
               <c:strCache>
                 <c:ptCount val="1"/>
                 <c:pt idx="0">
-                  <c:v>FY25_Q3</c:v>
+                  <c:v>Uttar Pradesh</c:v>
                 </c:pt>
               </c:strCache>
             </c:strRef>
           </c:tx>
           <c:spPr>
             <a:solidFill>
-              <a:srgbClr val="2E5495"/>
+              <a:srgbClr val="2E75B6"/>
             </a:solidFill>
           </c:spPr>
           <c:cat>
@@ -5612,25 +5290,25 @@
                 <c:formatCode>General</c:formatCode>
                 <c:ptCount val="7"/>
                 <c:pt idx="0">
-                  <c:v>1.0504</c:v>
+                  <c:v>0.1206</c:v>
                 </c:pt>
                 <c:pt idx="1">
-                  <c:v>1.0181</c:v>
+                  <c:v>0.0611</c:v>
                 </c:pt>
                 <c:pt idx="2">
-                  <c:v>1.05</c:v>
+                  <c:v>0.07</c:v>
                 </c:pt>
                 <c:pt idx="3">
-                  <c:v>1.26</c:v>
+                  <c:v>0.0439</c:v>
                 </c:pt>
                 <c:pt idx="4">
-                  <c:v>1.13</c:v>
+                  <c:v>0.0516</c:v>
                 </c:pt>
                 <c:pt idx="5">
-                  <c:v>9.13</c:v>
+                  <c:v>0</c:v>
                 </c:pt>
                 <c:pt idx="6">
-                  <c:v>21.4474</c:v>
+                  <c:v>0.009</c:v>
                 </c:pt>
               </c:numCache>
             </c:numRef>
@@ -5645,14 +5323,14 @@
               <c:strCache>
                 <c:ptCount val="1"/>
                 <c:pt idx="0">
-                  <c:v>FY26_Q3</c:v>
+                  <c:v>Maharashtra</c:v>
                 </c:pt>
               </c:strCache>
             </c:strRef>
           </c:tx>
           <c:spPr>
             <a:solidFill>
-              <a:srgbClr val="A6A6A6"/>
+              <a:srgbClr val="ED7D31"/>
             </a:solidFill>
           </c:spPr>
           <c:cat>
@@ -5691,38 +5369,512 @@
                 <c:formatCode>General</c:formatCode>
                 <c:ptCount val="7"/>
                 <c:pt idx="0">
-                  <c:v>1.1188</c:v>
+                  <c:v>0.149</c:v>
                 </c:pt>
                 <c:pt idx="1">
-                  <c:v>1.0268</c:v>
+                  <c:v>0.1834</c:v>
                 </c:pt>
                 <c:pt idx="2">
-                  <c:v>1.1</c:v>
+                  <c:v>0.251</c:v>
                 </c:pt>
                 <c:pt idx="3">
-                  <c:v>1.33</c:v>
+                  <c:v>0.2905</c:v>
                 </c:pt>
                 <c:pt idx="4">
-                  <c:v>1.11</c:v>
+                  <c:v>0.3402</c:v>
                 </c:pt>
                 <c:pt idx="5">
-                  <c:v>1.66</c:v>
+                  <c:v>0</c:v>
                 </c:pt>
                 <c:pt idx="6">
-                  <c:v>1.9001</c:v>
+                  <c:v>0</c:v>
+                </c:pt>
+              </c:numCache>
+            </c:numRef>
+          </c:val>
+        </c:ser>
+        <c:ser>
+          <c:idx val="2"/>
+          <c:order val="2"/>
+          <c:tx>
+            <c:strRef>
+              <c:f>Sheet1!$D$1</c:f>
+              <c:strCache>
+                <c:ptCount val="1"/>
+                <c:pt idx="0">
+                  <c:v>Karnataka</c:v>
+                </c:pt>
+              </c:strCache>
+            </c:strRef>
+          </c:tx>
+          <c:spPr>
+            <a:solidFill>
+              <a:srgbClr val="70AD47"/>
+            </a:solidFill>
+          </c:spPr>
+          <c:cat>
+            <c:strRef>
+              <c:f>Sheet1!$A$2:$A$8</c:f>
+              <c:strCache>
+                <c:ptCount val="7"/>
+                <c:pt idx="0">
+                  <c:v>NBHI</c:v>
+                </c:pt>
+                <c:pt idx="1">
+                  <c:v>STAR</c:v>
+                </c:pt>
+                <c:pt idx="2">
+                  <c:v>CARE</c:v>
+                </c:pt>
+                <c:pt idx="3">
+                  <c:v>CIGNA</c:v>
+                </c:pt>
+                <c:pt idx="4">
+                  <c:v>ABHI</c:v>
+                </c:pt>
+                <c:pt idx="5">
+                  <c:v>Narayana</c:v>
+                </c:pt>
+                <c:pt idx="6">
+                  <c:v>Galaxy</c:v>
+                </c:pt>
+              </c:strCache>
+            </c:strRef>
+          </c:cat>
+          <c:val>
+            <c:numRef>
+              <c:f>Sheet1!$D$2:$D$8</c:f>
+              <c:numCache>
+                <c:formatCode>General</c:formatCode>
+                <c:ptCount val="7"/>
+                <c:pt idx="0">
+                  <c:v>0.0868</c:v>
+                </c:pt>
+                <c:pt idx="1">
+                  <c:v>0.0711</c:v>
+                </c:pt>
+                <c:pt idx="2">
+                  <c:v>0.0992</c:v>
+                </c:pt>
+                <c:pt idx="3">
+                  <c:v>0.1812</c:v>
+                </c:pt>
+                <c:pt idx="4">
+                  <c:v>0.1746</c:v>
+                </c:pt>
+                <c:pt idx="5">
+                  <c:v>1</c:v>
+                </c:pt>
+                <c:pt idx="6">
+                  <c:v>0.1593</c:v>
+                </c:pt>
+              </c:numCache>
+            </c:numRef>
+          </c:val>
+        </c:ser>
+        <c:ser>
+          <c:idx val="3"/>
+          <c:order val="3"/>
+          <c:tx>
+            <c:strRef>
+              <c:f>Sheet1!$E$1</c:f>
+              <c:strCache>
+                <c:ptCount val="1"/>
+                <c:pt idx="0">
+                  <c:v>Haryana</c:v>
+                </c:pt>
+              </c:strCache>
+            </c:strRef>
+          </c:tx>
+          <c:spPr>
+            <a:solidFill>
+              <a:srgbClr val="FFC000"/>
+            </a:solidFill>
+          </c:spPr>
+          <c:cat>
+            <c:strRef>
+              <c:f>Sheet1!$A$2:$A$8</c:f>
+              <c:strCache>
+                <c:ptCount val="7"/>
+                <c:pt idx="0">
+                  <c:v>NBHI</c:v>
+                </c:pt>
+                <c:pt idx="1">
+                  <c:v>STAR</c:v>
+                </c:pt>
+                <c:pt idx="2">
+                  <c:v>CARE</c:v>
+                </c:pt>
+                <c:pt idx="3">
+                  <c:v>CIGNA</c:v>
+                </c:pt>
+                <c:pt idx="4">
+                  <c:v>ABHI</c:v>
+                </c:pt>
+                <c:pt idx="5">
+                  <c:v>Narayana</c:v>
+                </c:pt>
+                <c:pt idx="6">
+                  <c:v>Galaxy</c:v>
+                </c:pt>
+              </c:strCache>
+            </c:strRef>
+          </c:cat>
+          <c:val>
+            <c:numRef>
+              <c:f>Sheet1!$E$2:$E$8</c:f>
+              <c:numCache>
+                <c:formatCode>General</c:formatCode>
+                <c:ptCount val="7"/>
+                <c:pt idx="0">
+                  <c:v>0.0731</c:v>
+                </c:pt>
+                <c:pt idx="1">
+                  <c:v>0.0583</c:v>
+                </c:pt>
+                <c:pt idx="2">
+                  <c:v>0.0736</c:v>
+                </c:pt>
+                <c:pt idx="3">
+                  <c:v>0.0791</c:v>
+                </c:pt>
+                <c:pt idx="4">
+                  <c:v>0.0692</c:v>
+                </c:pt>
+                <c:pt idx="5">
+                  <c:v>0</c:v>
+                </c:pt>
+                <c:pt idx="6">
+                  <c:v>0</c:v>
+                </c:pt>
+              </c:numCache>
+            </c:numRef>
+          </c:val>
+        </c:ser>
+        <c:ser>
+          <c:idx val="4"/>
+          <c:order val="4"/>
+          <c:tx>
+            <c:strRef>
+              <c:f>Sheet1!$F$1</c:f>
+              <c:strCache>
+                <c:ptCount val="1"/>
+                <c:pt idx="0">
+                  <c:v>Tamil Nadu</c:v>
+                </c:pt>
+              </c:strCache>
+            </c:strRef>
+          </c:tx>
+          <c:spPr>
+            <a:solidFill>
+              <a:srgbClr val="7C3AED"/>
+            </a:solidFill>
+          </c:spPr>
+          <c:cat>
+            <c:strRef>
+              <c:f>Sheet1!$A$2:$A$8</c:f>
+              <c:strCache>
+                <c:ptCount val="7"/>
+                <c:pt idx="0">
+                  <c:v>NBHI</c:v>
+                </c:pt>
+                <c:pt idx="1">
+                  <c:v>STAR</c:v>
+                </c:pt>
+                <c:pt idx="2">
+                  <c:v>CARE</c:v>
+                </c:pt>
+                <c:pt idx="3">
+                  <c:v>CIGNA</c:v>
+                </c:pt>
+                <c:pt idx="4">
+                  <c:v>ABHI</c:v>
+                </c:pt>
+                <c:pt idx="5">
+                  <c:v>Narayana</c:v>
+                </c:pt>
+                <c:pt idx="6">
+                  <c:v>Galaxy</c:v>
+                </c:pt>
+              </c:strCache>
+            </c:strRef>
+          </c:cat>
+          <c:val>
+            <c:numRef>
+              <c:f>Sheet1!$F$2:$F$8</c:f>
+              <c:numCache>
+                <c:formatCode>General</c:formatCode>
+                <c:ptCount val="7"/>
+                <c:pt idx="0">
+                  <c:v>0.0546</c:v>
+                </c:pt>
+                <c:pt idx="1">
+                  <c:v>0.1451</c:v>
+                </c:pt>
+                <c:pt idx="2">
+                  <c:v>0.0453</c:v>
+                </c:pt>
+                <c:pt idx="3">
+                  <c:v>0.0608</c:v>
+                </c:pt>
+                <c:pt idx="4">
+                  <c:v>0.0409</c:v>
+                </c:pt>
+                <c:pt idx="5">
+                  <c:v>0</c:v>
+                </c:pt>
+                <c:pt idx="6">
+                  <c:v>0.6788</c:v>
+                </c:pt>
+              </c:numCache>
+            </c:numRef>
+          </c:val>
+        </c:ser>
+        <c:ser>
+          <c:idx val="5"/>
+          <c:order val="5"/>
+          <c:tx>
+            <c:strRef>
+              <c:f>Sheet1!$G$1</c:f>
+              <c:strCache>
+                <c:ptCount val="1"/>
+                <c:pt idx="0">
+                  <c:v>Kerala</c:v>
+                </c:pt>
+              </c:strCache>
+            </c:strRef>
+          </c:tx>
+          <c:spPr>
+            <a:solidFill>
+              <a:srgbClr val="264E70"/>
+            </a:solidFill>
+          </c:spPr>
+          <c:cat>
+            <c:strRef>
+              <c:f>Sheet1!$A$2:$A$8</c:f>
+              <c:strCache>
+                <c:ptCount val="7"/>
+                <c:pt idx="0">
+                  <c:v>NBHI</c:v>
+                </c:pt>
+                <c:pt idx="1">
+                  <c:v>STAR</c:v>
+                </c:pt>
+                <c:pt idx="2">
+                  <c:v>CARE</c:v>
+                </c:pt>
+                <c:pt idx="3">
+                  <c:v>CIGNA</c:v>
+                </c:pt>
+                <c:pt idx="4">
+                  <c:v>ABHI</c:v>
+                </c:pt>
+                <c:pt idx="5">
+                  <c:v>Narayana</c:v>
+                </c:pt>
+                <c:pt idx="6">
+                  <c:v>Galaxy</c:v>
+                </c:pt>
+              </c:strCache>
+            </c:strRef>
+          </c:cat>
+          <c:val>
+            <c:numRef>
+              <c:f>Sheet1!$G$2:$G$8</c:f>
+              <c:numCache>
+                <c:formatCode>General</c:formatCode>
+                <c:ptCount val="7"/>
+                <c:pt idx="0">
+                  <c:v>0.0536</c:v>
+                </c:pt>
+                <c:pt idx="1">
+                  <c:v>0.1007</c:v>
+                </c:pt>
+                <c:pt idx="2">
+                  <c:v>0.0248</c:v>
+                </c:pt>
+                <c:pt idx="3">
+                  <c:v>0.056</c:v>
+                </c:pt>
+                <c:pt idx="4">
+                  <c:v>0.0208</c:v>
+                </c:pt>
+                <c:pt idx="5">
+                  <c:v>0</c:v>
+                </c:pt>
+                <c:pt idx="6">
+                  <c:v>0</c:v>
+                </c:pt>
+              </c:numCache>
+            </c:numRef>
+          </c:val>
+        </c:ser>
+        <c:ser>
+          <c:idx val="6"/>
+          <c:order val="6"/>
+          <c:tx>
+            <c:strRef>
+              <c:f>Sheet1!$H$1</c:f>
+              <c:strCache>
+                <c:ptCount val="1"/>
+                <c:pt idx="0">
+                  <c:v>Delhi</c:v>
+                </c:pt>
+              </c:strCache>
+            </c:strRef>
+          </c:tx>
+          <c:spPr>
+            <a:solidFill>
+              <a:srgbClr val="C00000"/>
+            </a:solidFill>
+          </c:spPr>
+          <c:cat>
+            <c:strRef>
+              <c:f>Sheet1!$A$2:$A$8</c:f>
+              <c:strCache>
+                <c:ptCount val="7"/>
+                <c:pt idx="0">
+                  <c:v>NBHI</c:v>
+                </c:pt>
+                <c:pt idx="1">
+                  <c:v>STAR</c:v>
+                </c:pt>
+                <c:pt idx="2">
+                  <c:v>CARE</c:v>
+                </c:pt>
+                <c:pt idx="3">
+                  <c:v>CIGNA</c:v>
+                </c:pt>
+                <c:pt idx="4">
+                  <c:v>ABHI</c:v>
+                </c:pt>
+                <c:pt idx="5">
+                  <c:v>Narayana</c:v>
+                </c:pt>
+                <c:pt idx="6">
+                  <c:v>Galaxy</c:v>
+                </c:pt>
+              </c:strCache>
+            </c:strRef>
+          </c:cat>
+          <c:val>
+            <c:numRef>
+              <c:f>Sheet1!$H$2:$H$8</c:f>
+              <c:numCache>
+                <c:formatCode>General</c:formatCode>
+                <c:ptCount val="7"/>
+                <c:pt idx="0">
+                  <c:v>0.0887</c:v>
+                </c:pt>
+                <c:pt idx="1">
+                  <c:v>0.0479</c:v>
+                </c:pt>
+                <c:pt idx="2">
+                  <c:v>0.0623</c:v>
+                </c:pt>
+                <c:pt idx="3">
+                  <c:v>0.0411</c:v>
+                </c:pt>
+                <c:pt idx="4">
+                  <c:v>0.047</c:v>
+                </c:pt>
+                <c:pt idx="5">
+                  <c:v>0</c:v>
+                </c:pt>
+                <c:pt idx="6">
+                  <c:v>0</c:v>
+                </c:pt>
+              </c:numCache>
+            </c:numRef>
+          </c:val>
+        </c:ser>
+        <c:ser>
+          <c:idx val="7"/>
+          <c:order val="7"/>
+          <c:tx>
+            <c:strRef>
+              <c:f>Sheet1!$I$1</c:f>
+              <c:strCache>
+                <c:ptCount val="1"/>
+                <c:pt idx="0">
+                  <c:v>Others</c:v>
+                </c:pt>
+              </c:strCache>
+            </c:strRef>
+          </c:tx>
+          <c:spPr>
+            <a:solidFill>
+              <a:srgbClr val="00B0B0"/>
+            </a:solidFill>
+          </c:spPr>
+          <c:cat>
+            <c:strRef>
+              <c:f>Sheet1!$A$2:$A$8</c:f>
+              <c:strCache>
+                <c:ptCount val="7"/>
+                <c:pt idx="0">
+                  <c:v>NBHI</c:v>
+                </c:pt>
+                <c:pt idx="1">
+                  <c:v>STAR</c:v>
+                </c:pt>
+                <c:pt idx="2">
+                  <c:v>CARE</c:v>
+                </c:pt>
+                <c:pt idx="3">
+                  <c:v>CIGNA</c:v>
+                </c:pt>
+                <c:pt idx="4">
+                  <c:v>ABHI</c:v>
+                </c:pt>
+                <c:pt idx="5">
+                  <c:v>Narayana</c:v>
+                </c:pt>
+                <c:pt idx="6">
+                  <c:v>Galaxy</c:v>
+                </c:pt>
+              </c:strCache>
+            </c:strRef>
+          </c:cat>
+          <c:val>
+            <c:numRef>
+              <c:f>Sheet1!$I$2:$I$8</c:f>
+              <c:numCache>
+                <c:formatCode>General</c:formatCode>
+                <c:ptCount val="7"/>
+                <c:pt idx="0">
+                  <c:v>0.3737</c:v>
+                </c:pt>
+                <c:pt idx="1">
+                  <c:v>0.3325</c:v>
+                </c:pt>
+                <c:pt idx="2">
+                  <c:v>0.3738</c:v>
+                </c:pt>
+                <c:pt idx="3">
+                  <c:v>0.2474</c:v>
+                </c:pt>
+                <c:pt idx="4">
+                  <c:v>0.2556</c:v>
+                </c:pt>
+                <c:pt idx="5">
+                  <c:v>0</c:v>
+                </c:pt>
+                <c:pt idx="6">
+                  <c:v>0.153</c:v>
                 </c:pt>
               </c:numCache>
             </c:numRef>
           </c:val>
         </c:ser>
         <c:dLbls>
-          <c:numFmt formatCode="0.0%" sourceLinked="0"/>
+          <c:numFmt formatCode="0%" sourceLinked="0"/>
           <c:txPr>
             <a:bodyPr/>
             <a:lstStyle/>
             <a:p>
               <a:pPr>
-                <a:defRPr sz="800"/>
+                <a:defRPr sz="700"/>
               </a:pPr>
             </a:p>
           </c:txPr>
@@ -5734,6 +5886,7 @@
           <c:showBubbleSize val="0"/>
           <c:showLeaderLines val="1"/>
         </c:dLbls>
+        <c:overlap val="100"/>
         <c:axId val="-2068027336"/>
         <c:axId val="-2113994440"/>
       </c:barChart>
@@ -5766,21 +5919,12 @@
       <c:valAx>
         <c:axId val="-2113994440"/>
         <c:scaling/>
-        <c:delete val="0"/>
+        <c:delete/>
         <c:axPos val="l"/>
         <c:majorGridlines/>
         <c:majorTickMark val="out"/>
         <c:minorTickMark val="none"/>
         <c:tickLblPos val="nextTo"/>
-        <c:txPr>
-          <a:bodyPr/>
-          <a:lstStyle/>
-          <a:p>
-            <a:pPr>
-              <a:defRPr sz="800"/>
-            </a:pPr>
-          </a:p>
-        </c:txPr>
         <c:crossAx val="-2068027336"/>
         <c:crosses val="autoZero"/>
       </c:valAx>
@@ -5793,7 +5937,7 @@
         <a:lstStyle/>
         <a:p>
           <a:pPr>
-            <a:defRPr sz="900"/>
+            <a:defRPr sz="800"/>
           </a:pPr>
         </a:p>
       </c:txPr>
@@ -5880,25 +6024,25 @@
                 <c:formatCode>General</c:formatCode>
                 <c:ptCount val="7"/>
                 <c:pt idx="0">
-                  <c:v>0.5131</c:v>
+                  <c:v>1.0504</c:v>
                 </c:pt>
                 <c:pt idx="1">
-                  <c:v>0.3115</c:v>
+                  <c:v>1.0181</c:v>
                 </c:pt>
                 <c:pt idx="2">
-                  <c:v>0.38</c:v>
+                  <c:v>1.05</c:v>
                 </c:pt>
                 <c:pt idx="3">
-                  <c:v>0.47</c:v>
+                  <c:v>1.26</c:v>
                 </c:pt>
                 <c:pt idx="4">
-                  <c:v>0.36</c:v>
+                  <c:v>1.13</c:v>
                 </c:pt>
                 <c:pt idx="5">
-                  <c:v>9.15</c:v>
+                  <c:v>9.13</c:v>
                 </c:pt>
                 <c:pt idx="6">
-                  <c:v>21.3424</c:v>
+                  <c:v>21.4474</c:v>
                 </c:pt>
               </c:numCache>
             </c:numRef>
@@ -5959,25 +6103,25 @@
                 <c:formatCode>General</c:formatCode>
                 <c:ptCount val="7"/>
                 <c:pt idx="0">
-                  <c:v>0.4602</c:v>
+                  <c:v>1.1188</c:v>
                 </c:pt>
                 <c:pt idx="1">
-                  <c:v>0.3283</c:v>
+                  <c:v>1.0268</c:v>
                 </c:pt>
                 <c:pt idx="2">
-                  <c:v>0.36</c:v>
+                  <c:v>1.1</c:v>
                 </c:pt>
                 <c:pt idx="3">
-                  <c:v>0.36</c:v>
+                  <c:v>1.33</c:v>
                 </c:pt>
                 <c:pt idx="4">
-                  <c:v>0.28</c:v>
+                  <c:v>1.11</c:v>
                 </c:pt>
                 <c:pt idx="5">
-                  <c:v>0.87</c:v>
+                  <c:v>1.66</c:v>
                 </c:pt>
                 <c:pt idx="6">
-                  <c:v>1.5715</c:v>
+                  <c:v>1.9001</c:v>
                 </c:pt>
               </c:numCache>
             </c:numRef>
@@ -6148,25 +6292,25 @@
                 <c:formatCode>General</c:formatCode>
                 <c:ptCount val="7"/>
                 <c:pt idx="0">
-                  <c:v>0.6341</c:v>
+                  <c:v>0.5131</c:v>
                 </c:pt>
                 <c:pt idx="1">
-                  <c:v>0.7066</c:v>
+                  <c:v>0.3115</c:v>
                 </c:pt>
                 <c:pt idx="2">
-                  <c:v>0.67</c:v>
+                  <c:v>0.38</c:v>
                 </c:pt>
                 <c:pt idx="3">
-                  <c:v>0.79</c:v>
+                  <c:v>0.47</c:v>
                 </c:pt>
                 <c:pt idx="4">
-                  <c:v>0.77</c:v>
+                  <c:v>0.36</c:v>
                 </c:pt>
                 <c:pt idx="5">
-                  <c:v>0.7</c:v>
+                  <c:v>9.15</c:v>
                 </c:pt>
                 <c:pt idx="6">
-                  <c:v>0.1051</c:v>
+                  <c:v>21.3424</c:v>
                 </c:pt>
               </c:numCache>
             </c:numRef>
@@ -6227,25 +6371,25 @@
                 <c:formatCode>General</c:formatCode>
                 <c:ptCount val="7"/>
                 <c:pt idx="0">
-                  <c:v>0.7357</c:v>
+                  <c:v>0.4602</c:v>
                 </c:pt>
                 <c:pt idx="1">
-                  <c:v>0.6985</c:v>
+                  <c:v>0.3283</c:v>
                 </c:pt>
                 <c:pt idx="2">
-                  <c:v>0.74</c:v>
+                  <c:v>0.36</c:v>
                 </c:pt>
                 <c:pt idx="3">
-                  <c:v>0.96</c:v>
+                  <c:v>0.36</c:v>
                 </c:pt>
                 <c:pt idx="4">
-                  <c:v>0.83</c:v>
+                  <c:v>0.28</c:v>
                 </c:pt>
                 <c:pt idx="5">
-                  <c:v>0.78</c:v>
+                  <c:v>0.87</c:v>
                 </c:pt>
                 <c:pt idx="6">
-                  <c:v>0.3286</c:v>
+                  <c:v>1.5715</c:v>
                 </c:pt>
               </c:numCache>
             </c:numRef>
@@ -6370,14 +6514,14 @@
               <c:strCache>
                 <c:ptCount val="1"/>
                 <c:pt idx="0">
-                  <c:v>FY26_Q3</c:v>
+                  <c:v>FY25_Q3</c:v>
                 </c:pt>
               </c:strCache>
             </c:strRef>
           </c:tx>
           <c:spPr>
             <a:solidFill>
-              <a:srgbClr val="2E75B6"/>
+              <a:srgbClr val="2E5495"/>
             </a:solidFill>
           </c:spPr>
           <c:cat>
@@ -6416,25 +6560,104 @@
                 <c:formatCode>General</c:formatCode>
                 <c:ptCount val="7"/>
                 <c:pt idx="0">
-                  <c:v>0.9303</c:v>
+                  <c:v>0.6341</c:v>
                 </c:pt>
                 <c:pt idx="1">
-                  <c:v>0.9052</c:v>
+                  <c:v>0.7066</c:v>
                 </c:pt>
                 <c:pt idx="2">
-                  <c:v>0.9577</c:v>
+                  <c:v>0.67</c:v>
                 </c:pt>
                 <c:pt idx="3">
-                  <c:v>0.9461</c:v>
+                  <c:v>0.79</c:v>
                 </c:pt>
                 <c:pt idx="4">
-                  <c:v>0.9844</c:v>
+                  <c:v>0.77</c:v>
                 </c:pt>
                 <c:pt idx="5">
-                  <c:v>0.4644</c:v>
+                  <c:v>0.7</c:v>
                 </c:pt>
                 <c:pt idx="6">
-                  <c:v>0.805</c:v>
+                  <c:v>0.1051</c:v>
+                </c:pt>
+              </c:numCache>
+            </c:numRef>
+          </c:val>
+        </c:ser>
+        <c:ser>
+          <c:idx val="1"/>
+          <c:order val="1"/>
+          <c:tx>
+            <c:strRef>
+              <c:f>Sheet1!$C$1</c:f>
+              <c:strCache>
+                <c:ptCount val="1"/>
+                <c:pt idx="0">
+                  <c:v>FY26_Q3</c:v>
+                </c:pt>
+              </c:strCache>
+            </c:strRef>
+          </c:tx>
+          <c:spPr>
+            <a:solidFill>
+              <a:srgbClr val="A6A6A6"/>
+            </a:solidFill>
+          </c:spPr>
+          <c:cat>
+            <c:strRef>
+              <c:f>Sheet1!$A$2:$A$8</c:f>
+              <c:strCache>
+                <c:ptCount val="7"/>
+                <c:pt idx="0">
+                  <c:v>NBHI</c:v>
+                </c:pt>
+                <c:pt idx="1">
+                  <c:v>STAR</c:v>
+                </c:pt>
+                <c:pt idx="2">
+                  <c:v>CARE</c:v>
+                </c:pt>
+                <c:pt idx="3">
+                  <c:v>CIGNA</c:v>
+                </c:pt>
+                <c:pt idx="4">
+                  <c:v>ABHI</c:v>
+                </c:pt>
+                <c:pt idx="5">
+                  <c:v>Narayana</c:v>
+                </c:pt>
+                <c:pt idx="6">
+                  <c:v>Galaxy</c:v>
+                </c:pt>
+              </c:strCache>
+            </c:strRef>
+          </c:cat>
+          <c:val>
+            <c:numRef>
+              <c:f>Sheet1!$C$2:$C$8</c:f>
+              <c:numCache>
+                <c:formatCode>General</c:formatCode>
+                <c:ptCount val="7"/>
+                <c:pt idx="0">
+                  <c:v>0.7357</c:v>
+                </c:pt>
+                <c:pt idx="1">
+                  <c:v>0.6985</c:v>
+                </c:pt>
+                <c:pt idx="2">
+                  <c:v>0.74</c:v>
+                </c:pt>
+                <c:pt idx="3">
+                  <c:v>0.96</c:v>
+                </c:pt>
+                <c:pt idx="4">
+                  <c:v>0.83</c:v>
+                </c:pt>
+                <c:pt idx="5">
+                  <c:v>0.78</c:v>
+                </c:pt>
+                <c:pt idx="6">
+                  <c:v>0.3286</c:v>
                 </c:pt>
               </c:numCache>
             </c:numRef>
@@ -6510,6 +6733,19 @@
         <c:crosses val="autoZero"/>
       </c:valAx>
     </c:plotArea>
+    <c:legend>
+      <c:legendPos val="b"/>
+      <c:overlay val="0"/>
+      <c:txPr>
+        <a:bodyPr/>
+        <a:lstStyle/>
+        <a:p>
+          <a:pPr>
+            <a:defRPr sz="900"/>
+          </a:pPr>
+        </a:p>
+      </c:txPr>
+    </c:legend>
     <c:dispBlanksAs val="gap"/>
   </c:chart>
   <c:txPr>
@@ -6546,14 +6782,14 @@
               <c:strCache>
                 <c:ptCount val="1"/>
                 <c:pt idx="0">
-                  <c:v>FY25_Q3</c:v>
+                  <c:v>FY26_Q3</c:v>
                 </c:pt>
               </c:strCache>
             </c:strRef>
           </c:tx>
           <c:spPr>
             <a:solidFill>
-              <a:srgbClr val="2E5495"/>
+              <a:srgbClr val="2E75B6"/>
             </a:solidFill>
           </c:spPr>
           <c:cat>
@@ -6592,104 +6828,25 @@
                 <c:formatCode>General</c:formatCode>
                 <c:ptCount val="7"/>
                 <c:pt idx="0">
-                  <c:v>0.1645</c:v>
+                  <c:v>0.9303</c:v>
                 </c:pt>
                 <c:pt idx="1">
-                  <c:v>0.16</c:v>
+                  <c:v>0.9052</c:v>
                 </c:pt>
                 <c:pt idx="2">
-                  <c:v>0.164</c:v>
+                  <c:v>0.9577</c:v>
                 </c:pt>
                 <c:pt idx="3">
-                  <c:v>0.2413</c:v>
+                  <c:v>0.9461</c:v>
                 </c:pt>
                 <c:pt idx="4">
-                  <c:v>0.2011</c:v>
+                  <c:v>0.9844</c:v>
                 </c:pt>
                 <c:pt idx="5">
-                  <c:v>17.3077</c:v>
+                  <c:v>0.4644</c:v>
                 </c:pt>
                 <c:pt idx="6">
-                  <c:v>19.6471</c:v>
-                </c:pt>
-              </c:numCache>
-            </c:numRef>
-          </c:val>
-        </c:ser>
-        <c:ser>
-          <c:idx val="1"/>
-          <c:order val="1"/>
-          <c:tx>
-            <c:strRef>
-              <c:f>Sheet1!$C$1</c:f>
-              <c:strCache>
-                <c:ptCount val="1"/>
-                <c:pt idx="0">
-                  <c:v>FY26_Q3</c:v>
-                </c:pt>
-              </c:strCache>
-            </c:strRef>
-          </c:tx>
-          <c:spPr>
-            <a:solidFill>
-              <a:srgbClr val="A6A6A6"/>
-            </a:solidFill>
-          </c:spPr>
-          <c:cat>
-            <c:strRef>
-              <c:f>Sheet1!$A$2:$A$8</c:f>
-              <c:strCache>
-                <c:ptCount val="7"/>
-                <c:pt idx="0">
-                  <c:v>NBHI</c:v>
-                </c:pt>
-                <c:pt idx="1">
-                  <c:v>STAR</c:v>
-                </c:pt>
-                <c:pt idx="2">
-                  <c:v>CARE</c:v>
-                </c:pt>
-                <c:pt idx="3">
-                  <c:v>CIGNA</c:v>
-                </c:pt>
-                <c:pt idx="4">
-                  <c:v>ABHI</c:v>
-                </c:pt>
-                <c:pt idx="5">
-                  <c:v>Narayana</c:v>
-                </c:pt>
-                <c:pt idx="6">
-                  <c:v>Galaxy</c:v>
-                </c:pt>
-              </c:strCache>
-            </c:strRef>
-          </c:cat>
-          <c:val>
-            <c:numRef>
-              <c:f>Sheet1!$C$2:$C$8</c:f>
-              <c:numCache>
-                <c:formatCode>General</c:formatCode>
-                <c:ptCount val="7"/>
-                <c:pt idx="0">
-                  <c:v>0.1521</c:v>
-                </c:pt>
-                <c:pt idx="1">
-                  <c:v>0.1643</c:v>
-                </c:pt>
-                <c:pt idx="2">
-                  <c:v>0.1421</c:v>
-                </c:pt>
-                <c:pt idx="3">
-                  <c:v>0.2267</c:v>
-                </c:pt>
-                <c:pt idx="4">
-                  <c:v>0.1668</c:v>
-                </c:pt>
-                <c:pt idx="5">
-                  <c:v>0.8084</c:v>
-                </c:pt>
-                <c:pt idx="6">
-                  <c:v>1.3333</c:v>
+                  <c:v>0.805</c:v>
                 </c:pt>
               </c:numCache>
             </c:numRef>
@@ -6765,19 +6922,6 @@
         <c:crosses val="autoZero"/>
       </c:valAx>
     </c:plotArea>
-    <c:legend>
-      <c:legendPos val="b"/>
-      <c:overlay val="0"/>
-      <c:txPr>
-        <a:bodyPr/>
-        <a:lstStyle/>
-        <a:p>
-          <a:pPr>
-            <a:defRPr sz="900"/>
-          </a:pPr>
-        </a:p>
-      </c:txPr>
-    </c:legend>
     <c:dispBlanksAs val="gap"/>
   </c:chart>
   <c:txPr>
@@ -6997,14 +7141,14 @@
               <c:strCache>
                 <c:ptCount val="1"/>
                 <c:pt idx="0">
-                  <c:v>FY25_Q3</c:v>
+                  <c:v>FY26_Q3</c:v>
                 </c:pt>
               </c:strCache>
             </c:strRef>
           </c:tx>
           <c:spPr>
             <a:solidFill>
-              <a:srgbClr val="2E5495"/>
+              <a:srgbClr val="2E75B6"/>
             </a:solidFill>
           </c:spPr>
           <c:cat>
@@ -7043,36 +7187,133 @@
                 <c:formatCode>General</c:formatCode>
                 <c:ptCount val="7"/>
                 <c:pt idx="0">
-                  <c:v>0.1113</c:v>
+                  <c:v>27334.08</c:v>
                 </c:pt>
                 <c:pt idx="1">
-                  <c:v>0.1064</c:v>
+                  <c:v>39371.42</c:v>
                 </c:pt>
                 <c:pt idx="2">
-                  <c:v>0.1164</c:v>
+                  <c:v>32023.1</c:v>
                 </c:pt>
                 <c:pt idx="3">
-                  <c:v>0.1597</c:v>
+                  <c:v>33608.56</c:v>
                 </c:pt>
                 <c:pt idx="4">
-                  <c:v>0.131</c:v>
+                  <c:v>12190.84</c:v>
                 </c:pt>
                 <c:pt idx="5">
-                  <c:v>7.6</c:v>
+                  <c:v>272861.36</c:v>
                 </c:pt>
                 <c:pt idx="6">
-                  <c:v>10.5462</c:v>
+                  <c:v>72738.1</c:v>
                 </c:pt>
               </c:numCache>
             </c:numRef>
           </c:val>
         </c:ser>
+        <c:dLbls>
+          <c:numFmt formatCode="#,##0" sourceLinked="0"/>
+          <c:txPr>
+            <a:bodyPr/>
+            <a:lstStyle/>
+            <a:p>
+              <a:pPr>
+                <a:defRPr sz="800"/>
+              </a:pPr>
+            </a:p>
+          </c:txPr>
+          <c:showLegendKey val="0"/>
+          <c:showVal val="1"/>
+          <c:showCatName val="0"/>
+          <c:showSerName val="0"/>
+          <c:showPercent val="0"/>
+          <c:showBubbleSize val="0"/>
+          <c:showLeaderLines val="1"/>
+        </c:dLbls>
+        <c:axId val="-2068027336"/>
+        <c:axId val="-2113994440"/>
+      </c:barChart>
+      <c:catAx>
+        <c:axId val="-2068027336"/>
+        <c:scaling>
+          <c:orientation val="minMax"/>
+        </c:scaling>
+        <c:delete val="0"/>
+        <c:axPos val="b"/>
+        <c:majorTickMark val="out"/>
+        <c:minorTickMark val="none"/>
+        <c:tickLblPos val="nextTo"/>
+        <c:txPr>
+          <a:bodyPr/>
+          <a:lstStyle/>
+          <a:p>
+            <a:pPr>
+              <a:defRPr sz="800"/>
+            </a:pPr>
+          </a:p>
+        </c:txPr>
+        <c:crossAx val="-2113994440"/>
+        <c:crosses val="autoZero"/>
+        <c:auto val="1"/>
+        <c:lblAlgn val="ctr"/>
+        <c:lblOffset val="100"/>
+        <c:noMultiLvlLbl val="0"/>
+      </c:catAx>
+      <c:valAx>
+        <c:axId val="-2113994440"/>
+        <c:scaling/>
+        <c:delete val="0"/>
+        <c:axPos val="l"/>
+        <c:majorGridlines/>
+        <c:majorTickMark val="out"/>
+        <c:minorTickMark val="none"/>
+        <c:tickLblPos val="nextTo"/>
+        <c:txPr>
+          <a:bodyPr/>
+          <a:lstStyle/>
+          <a:p>
+            <a:pPr>
+              <a:defRPr sz="800"/>
+            </a:pPr>
+          </a:p>
+        </c:txPr>
+        <c:crossAx val="-2068027336"/>
+        <c:crosses val="autoZero"/>
+      </c:valAx>
+    </c:plotArea>
+    <c:dispBlanksAs val="gap"/>
+  </c:chart>
+  <c:txPr>
+    <a:bodyPr/>
+    <a:lstStyle/>
+    <a:p>
+      <a:pPr>
+        <a:defRPr sz="1800"/>
+      </a:pPr>
+      <a:endParaRPr lang="en-US"/>
+    </a:p>
+  </c:txPr>
+  <c:externalData r:id="rId1">
+    <c:autoUpdate val="0"/>
+  </c:externalData>
+</c:chartSpace>
+</file>
+
+<file path=ppt/charts/chart31.xml><?xml version="1.0" encoding="utf-8"?>
+<c:chartSpace xmlns:c="http://schemas.openxmlformats.org/drawingml/2006/chart" xmlns:a="http://schemas.openxmlformats.org/drawingml/2006/main" xmlns:r="http://schemas.openxmlformats.org/officeDocument/2006/relationships">
+  <c:date1904 val="0"/>
+  <c:chart>
+    <c:autoTitleDeleted val="1"/>
+    <c:plotArea>
+      <c:barChart>
+        <c:barDir val="col"/>
+        <c:grouping val="clustered"/>
         <c:ser>
-          <c:idx val="1"/>
-          <c:order val="1"/>
+          <c:idx val="0"/>
+          <c:order val="0"/>
           <c:tx>
             <c:strRef>
-              <c:f>Sheet1!$C$1</c:f>
+              <c:f>Sheet1!$B$1</c:f>
               <c:strCache>
                 <c:ptCount val="1"/>
                 <c:pt idx="0">
@@ -7083,7 +7324,7 @@
           </c:tx>
           <c:spPr>
             <a:solidFill>
-              <a:srgbClr val="A6A6A6"/>
+              <a:srgbClr val="2E75B6"/>
             </a:solidFill>
           </c:spPr>
           <c:cat>
@@ -7117,30 +7358,30 @@
           </c:cat>
           <c:val>
             <c:numRef>
-              <c:f>Sheet1!$C$2:$C$8</c:f>
+              <c:f>Sheet1!$B$2:$B$8</c:f>
               <c:numCache>
                 <c:formatCode>General</c:formatCode>
                 <c:ptCount val="7"/>
                 <c:pt idx="0">
-                  <c:v>0.0912</c:v>
+                  <c:v>0.703719</c:v>
                 </c:pt>
                 <c:pt idx="1">
-                  <c:v>0.1072</c:v>
+                  <c:v>0.366895</c:v>
                 </c:pt>
                 <c:pt idx="2">
-                  <c:v>0.1045</c:v>
+                  <c:v>0.603589</c:v>
                 </c:pt>
                 <c:pt idx="3">
-                  <c:v>0.1463</c:v>
+                  <c:v>1.352364</c:v>
                 </c:pt>
                 <c:pt idx="4">
-                  <c:v>0.0999</c:v>
+                  <c:v>2.534265</c:v>
                 </c:pt>
                 <c:pt idx="5">
-                  <c:v>0.4309</c:v>
+                  <c:v>0.20774</c:v>
                 </c:pt>
                 <c:pt idx="6">
-                  <c:v>0.6966</c:v>
+                  <c:v>0.011074</c:v>
                 </c:pt>
               </c:numCache>
             </c:numRef>
@@ -7216,287 +7457,6 @@
         <c:crosses val="autoZero"/>
       </c:valAx>
     </c:plotArea>
-    <c:legend>
-      <c:legendPos val="b"/>
-      <c:overlay val="0"/>
-      <c:txPr>
-        <a:bodyPr/>
-        <a:lstStyle/>
-        <a:p>
-          <a:pPr>
-            <a:defRPr sz="900"/>
-          </a:pPr>
-        </a:p>
-      </c:txPr>
-    </c:legend>
-    <c:dispBlanksAs val="gap"/>
-  </c:chart>
-  <c:txPr>
-    <a:bodyPr/>
-    <a:lstStyle/>
-    <a:p>
-      <a:pPr>
-        <a:defRPr sz="1800"/>
-      </a:pPr>
-      <a:endParaRPr lang="en-US"/>
-    </a:p>
-  </c:txPr>
-  <c:externalData r:id="rId1">
-    <c:autoUpdate val="0"/>
-  </c:externalData>
-</c:chartSpace>
-</file>
-
-<file path=ppt/charts/chart31.xml><?xml version="1.0" encoding="utf-8"?>
-<c:chartSpace xmlns:c="http://schemas.openxmlformats.org/drawingml/2006/chart" xmlns:a="http://schemas.openxmlformats.org/drawingml/2006/main" xmlns:r="http://schemas.openxmlformats.org/officeDocument/2006/relationships">
-  <c:date1904 val="0"/>
-  <c:chart>
-    <c:autoTitleDeleted val="1"/>
-    <c:plotArea>
-      <c:barChart>
-        <c:barDir val="col"/>
-        <c:grouping val="clustered"/>
-        <c:ser>
-          <c:idx val="0"/>
-          <c:order val="0"/>
-          <c:tx>
-            <c:strRef>
-              <c:f>Sheet1!$B$1</c:f>
-              <c:strCache>
-                <c:ptCount val="1"/>
-                <c:pt idx="0">
-                  <c:v>FY25_Q3</c:v>
-                </c:pt>
-              </c:strCache>
-            </c:strRef>
-          </c:tx>
-          <c:spPr>
-            <a:solidFill>
-              <a:srgbClr val="2E5495"/>
-            </a:solidFill>
-          </c:spPr>
-          <c:cat>
-            <c:strRef>
-              <c:f>Sheet1!$A$2:$A$8</c:f>
-              <c:strCache>
-                <c:ptCount val="7"/>
-                <c:pt idx="0">
-                  <c:v>NBHI</c:v>
-                </c:pt>
-                <c:pt idx="1">
-                  <c:v>STAR</c:v>
-                </c:pt>
-                <c:pt idx="2">
-                  <c:v>CARE</c:v>
-                </c:pt>
-                <c:pt idx="3">
-                  <c:v>CIGNA</c:v>
-                </c:pt>
-                <c:pt idx="4">
-                  <c:v>ABHI</c:v>
-                </c:pt>
-                <c:pt idx="5">
-                  <c:v>Narayana</c:v>
-                </c:pt>
-                <c:pt idx="6">
-                  <c:v>Galaxy</c:v>
-                </c:pt>
-              </c:strCache>
-            </c:strRef>
-          </c:cat>
-          <c:val>
-            <c:numRef>
-              <c:f>Sheet1!$B$2:$B$8</c:f>
-              <c:numCache>
-                <c:formatCode>General</c:formatCode>
-                <c:ptCount val="7"/>
-                <c:pt idx="0">
-                  <c:v>0.0053</c:v>
-                </c:pt>
-                <c:pt idx="1">
-                  <c:v>0.0115</c:v>
-                </c:pt>
-                <c:pt idx="2">
-                  <c:v>0.005</c:v>
-                </c:pt>
-                <c:pt idx="3">
-                  <c:v>0.0148</c:v>
-                </c:pt>
-                <c:pt idx="4">
-                  <c:v>0.011</c:v>
-                </c:pt>
-                <c:pt idx="5">
-                  <c:v>0</c:v>
-                </c:pt>
-                <c:pt idx="6">
-                  <c:v>1.8361</c:v>
-                </c:pt>
-              </c:numCache>
-            </c:numRef>
-          </c:val>
-        </c:ser>
-        <c:ser>
-          <c:idx val="1"/>
-          <c:order val="1"/>
-          <c:tx>
-            <c:strRef>
-              <c:f>Sheet1!$C$1</c:f>
-              <c:strCache>
-                <c:ptCount val="1"/>
-                <c:pt idx="0">
-                  <c:v>FY26_Q3</c:v>
-                </c:pt>
-              </c:strCache>
-            </c:strRef>
-          </c:tx>
-          <c:spPr>
-            <a:solidFill>
-              <a:srgbClr val="A6A6A6"/>
-            </a:solidFill>
-          </c:spPr>
-          <c:cat>
-            <c:strRef>
-              <c:f>Sheet1!$A$2:$A$8</c:f>
-              <c:strCache>
-                <c:ptCount val="7"/>
-                <c:pt idx="0">
-                  <c:v>NBHI</c:v>
-                </c:pt>
-                <c:pt idx="1">
-                  <c:v>STAR</c:v>
-                </c:pt>
-                <c:pt idx="2">
-                  <c:v>CARE</c:v>
-                </c:pt>
-                <c:pt idx="3">
-                  <c:v>CIGNA</c:v>
-                </c:pt>
-                <c:pt idx="4">
-                  <c:v>ABHI</c:v>
-                </c:pt>
-                <c:pt idx="5">
-                  <c:v>Narayana</c:v>
-                </c:pt>
-                <c:pt idx="6">
-                  <c:v>Galaxy</c:v>
-                </c:pt>
-              </c:strCache>
-            </c:strRef>
-          </c:cat>
-          <c:val>
-            <c:numRef>
-              <c:f>Sheet1!$C$2:$C$8</c:f>
-              <c:numCache>
-                <c:formatCode>General</c:formatCode>
-                <c:ptCount val="7"/>
-                <c:pt idx="0">
-                  <c:v>0.0071</c:v>
-                </c:pt>
-                <c:pt idx="1">
-                  <c:v>0.0129</c:v>
-                </c:pt>
-                <c:pt idx="2">
-                  <c:v>0.0054</c:v>
-                </c:pt>
-                <c:pt idx="3">
-                  <c:v>0.0125</c:v>
-                </c:pt>
-                <c:pt idx="4">
-                  <c:v>0.0108</c:v>
-                </c:pt>
-                <c:pt idx="5">
-                  <c:v>0</c:v>
-                </c:pt>
-                <c:pt idx="6">
-                  <c:v>0.1364</c:v>
-                </c:pt>
-              </c:numCache>
-            </c:numRef>
-          </c:val>
-        </c:ser>
-        <c:dLbls>
-          <c:numFmt formatCode="0.0%" sourceLinked="0"/>
-          <c:txPr>
-            <a:bodyPr/>
-            <a:lstStyle/>
-            <a:p>
-              <a:pPr>
-                <a:defRPr sz="800"/>
-              </a:pPr>
-            </a:p>
-          </c:txPr>
-          <c:showLegendKey val="0"/>
-          <c:showVal val="1"/>
-          <c:showCatName val="0"/>
-          <c:showSerName val="0"/>
-          <c:showPercent val="0"/>
-          <c:showBubbleSize val="0"/>
-          <c:showLeaderLines val="1"/>
-        </c:dLbls>
-        <c:axId val="-2068027336"/>
-        <c:axId val="-2113994440"/>
-      </c:barChart>
-      <c:catAx>
-        <c:axId val="-2068027336"/>
-        <c:scaling>
-          <c:orientation val="minMax"/>
-        </c:scaling>
-        <c:delete val="0"/>
-        <c:axPos val="b"/>
-        <c:majorTickMark val="out"/>
-        <c:minorTickMark val="none"/>
-        <c:tickLblPos val="nextTo"/>
-        <c:txPr>
-          <a:bodyPr/>
-          <a:lstStyle/>
-          <a:p>
-            <a:pPr>
-              <a:defRPr sz="800"/>
-            </a:pPr>
-          </a:p>
-        </c:txPr>
-        <c:crossAx val="-2113994440"/>
-        <c:crosses val="autoZero"/>
-        <c:auto val="1"/>
-        <c:lblAlgn val="ctr"/>
-        <c:lblOffset val="100"/>
-        <c:noMultiLvlLbl val="0"/>
-      </c:catAx>
-      <c:valAx>
-        <c:axId val="-2113994440"/>
-        <c:scaling/>
-        <c:delete val="0"/>
-        <c:axPos val="l"/>
-        <c:majorGridlines/>
-        <c:majorTickMark val="out"/>
-        <c:minorTickMark val="none"/>
-        <c:tickLblPos val="nextTo"/>
-        <c:txPr>
-          <a:bodyPr/>
-          <a:lstStyle/>
-          <a:p>
-            <a:pPr>
-              <a:defRPr sz="800"/>
-            </a:pPr>
-          </a:p>
-        </c:txPr>
-        <c:crossAx val="-2068027336"/>
-        <c:crosses val="autoZero"/>
-      </c:valAx>
-    </c:plotArea>
-    <c:legend>
-      <c:legendPos val="b"/>
-      <c:overlay val="0"/>
-      <c:txPr>
-        <a:bodyPr/>
-        <a:lstStyle/>
-        <a:p>
-          <a:pPr>
-            <a:defRPr sz="900"/>
-          </a:pPr>
-        </a:p>
-      </c:txPr>
-    </c:legend>
     <c:dispBlanksAs val="gap"/>
   </c:chart>
   <c:txPr>
@@ -7579,25 +7539,25 @@
                 <c:formatCode>General</c:formatCode>
                 <c:ptCount val="7"/>
                 <c:pt idx="0">
-                  <c:v>0.6764</c:v>
+                  <c:v>0.1645</c:v>
                 </c:pt>
                 <c:pt idx="1">
-                  <c:v>0.6649</c:v>
+                  <c:v>0.16</c:v>
                 </c:pt>
                 <c:pt idx="2">
-                  <c:v>0.7101</c:v>
+                  <c:v>0.164</c:v>
                 </c:pt>
                 <c:pt idx="3">
-                  <c:v>0.6617</c:v>
+                  <c:v>0.2413</c:v>
                 </c:pt>
                 <c:pt idx="4">
-                  <c:v>0.6512</c:v>
+                  <c:v>0.2011</c:v>
                 </c:pt>
                 <c:pt idx="5">
-                  <c:v>0.4391</c:v>
+                  <c:v>17.3077</c:v>
                 </c:pt>
                 <c:pt idx="6">
-                  <c:v>0.5368</c:v>
+                  <c:v>19.6471</c:v>
                 </c:pt>
               </c:numCache>
             </c:numRef>
@@ -7658,25 +7618,25 @@
                 <c:formatCode>General</c:formatCode>
                 <c:ptCount val="7"/>
                 <c:pt idx="0">
-                  <c:v>0.5996</c:v>
+                  <c:v>0.1521</c:v>
                 </c:pt>
                 <c:pt idx="1">
-                  <c:v>0.6524</c:v>
+                  <c:v>0.1643</c:v>
                 </c:pt>
                 <c:pt idx="2">
-                  <c:v>0.7356</c:v>
+                  <c:v>0.1421</c:v>
                 </c:pt>
                 <c:pt idx="3">
-                  <c:v>0.6453</c:v>
+                  <c:v>0.2267</c:v>
                 </c:pt>
                 <c:pt idx="4">
-                  <c:v>0.5987</c:v>
+                  <c:v>0.1668</c:v>
                 </c:pt>
                 <c:pt idx="5">
-                  <c:v>0.5331</c:v>
+                  <c:v>0.8084</c:v>
                 </c:pt>
                 <c:pt idx="6">
-                  <c:v>0.5224</c:v>
+                  <c:v>1.3333</c:v>
                 </c:pt>
               </c:numCache>
             </c:numRef>
@@ -7801,14 +7761,14 @@
               <c:strCache>
                 <c:ptCount val="1"/>
                 <c:pt idx="0">
-                  <c:v>FY26_Q3</c:v>
+                  <c:v>FY25_Q3</c:v>
                 </c:pt>
               </c:strCache>
             </c:strRef>
           </c:tx>
           <c:spPr>
             <a:solidFill>
-              <a:srgbClr val="2E75B6"/>
+              <a:srgbClr val="2E5495"/>
             </a:solidFill>
           </c:spPr>
           <c:cat>
@@ -7847,32 +7807,111 @@
                 <c:formatCode>General</c:formatCode>
                 <c:ptCount val="7"/>
                 <c:pt idx="0">
-                  <c:v>5.1355</c:v>
+                  <c:v>0.1113</c:v>
                 </c:pt>
                 <c:pt idx="1">
-                  <c:v>7.3931</c:v>
+                  <c:v>0.1064</c:v>
                 </c:pt>
                 <c:pt idx="2">
-                  <c:v>6.0143</c:v>
+                  <c:v>0.1164</c:v>
                 </c:pt>
                 <c:pt idx="3">
-                  <c:v>6.2121</c:v>
+                  <c:v>0.1597</c:v>
                 </c:pt>
                 <c:pt idx="4">
-                  <c:v>6.1921</c:v>
+                  <c:v>0.131</c:v>
                 </c:pt>
                 <c:pt idx="5">
-                  <c:v>8.126</c:v>
+                  <c:v>7.6</c:v>
                 </c:pt>
                 <c:pt idx="6">
-                  <c:v>2.7608</c:v>
+                  <c:v>10.5462</c:v>
+                </c:pt>
+              </c:numCache>
+            </c:numRef>
+          </c:val>
+        </c:ser>
+        <c:ser>
+          <c:idx val="1"/>
+          <c:order val="1"/>
+          <c:tx>
+            <c:strRef>
+              <c:f>Sheet1!$C$1</c:f>
+              <c:strCache>
+                <c:ptCount val="1"/>
+                <c:pt idx="0">
+                  <c:v>FY26_Q3</c:v>
+                </c:pt>
+              </c:strCache>
+            </c:strRef>
+          </c:tx>
+          <c:spPr>
+            <a:solidFill>
+              <a:srgbClr val="A6A6A6"/>
+            </a:solidFill>
+          </c:spPr>
+          <c:cat>
+            <c:strRef>
+              <c:f>Sheet1!$A$2:$A$8</c:f>
+              <c:strCache>
+                <c:ptCount val="7"/>
+                <c:pt idx="0">
+                  <c:v>NBHI</c:v>
+                </c:pt>
+                <c:pt idx="1">
+                  <c:v>STAR</c:v>
+                </c:pt>
+                <c:pt idx="2">
+                  <c:v>CARE</c:v>
+                </c:pt>
+                <c:pt idx="3">
+                  <c:v>CIGNA</c:v>
+                </c:pt>
+                <c:pt idx="4">
+                  <c:v>ABHI</c:v>
+                </c:pt>
+                <c:pt idx="5">
+                  <c:v>Narayana</c:v>
+                </c:pt>
+                <c:pt idx="6">
+                  <c:v>Galaxy</c:v>
+                </c:pt>
+              </c:strCache>
+            </c:strRef>
+          </c:cat>
+          <c:val>
+            <c:numRef>
+              <c:f>Sheet1!$C$2:$C$8</c:f>
+              <c:numCache>
+                <c:formatCode>General</c:formatCode>
+                <c:ptCount val="7"/>
+                <c:pt idx="0">
+                  <c:v>0.0912</c:v>
+                </c:pt>
+                <c:pt idx="1">
+                  <c:v>0.1072</c:v>
+                </c:pt>
+                <c:pt idx="2">
+                  <c:v>0.1045</c:v>
+                </c:pt>
+                <c:pt idx="3">
+                  <c:v>0.1463</c:v>
+                </c:pt>
+                <c:pt idx="4">
+                  <c:v>0.0999</c:v>
+                </c:pt>
+                <c:pt idx="5">
+                  <c:v>0.4309</c:v>
+                </c:pt>
+                <c:pt idx="6">
+                  <c:v>0.6966</c:v>
                 </c:pt>
               </c:numCache>
             </c:numRef>
           </c:val>
         </c:ser>
         <c:dLbls>
-          <c:numFmt formatCode="#,##0" sourceLinked="0"/>
+          <c:numFmt formatCode="0.0%" sourceLinked="0"/>
           <c:txPr>
             <a:bodyPr/>
             <a:lstStyle/>
@@ -7941,6 +7980,19 @@
         <c:crosses val="autoZero"/>
       </c:valAx>
     </c:plotArea>
+    <c:legend>
+      <c:legendPos val="b"/>
+      <c:overlay val="0"/>
+      <c:txPr>
+        <a:bodyPr/>
+        <a:lstStyle/>
+        <a:p>
+          <a:pPr>
+            <a:defRPr sz="900"/>
+          </a:pPr>
+        </a:p>
+      </c:txPr>
+    </c:legend>
     <c:dispBlanksAs val="gap"/>
   </c:chart>
   <c:txPr>
@@ -7977,14 +8029,14 @@
               <c:strCache>
                 <c:ptCount val="1"/>
                 <c:pt idx="0">
-                  <c:v>FY26_Q3</c:v>
+                  <c:v>FY25_Q3</c:v>
                 </c:pt>
               </c:strCache>
             </c:strRef>
           </c:tx>
           <c:spPr>
             <a:solidFill>
-              <a:srgbClr val="2E75B6"/>
+              <a:srgbClr val="2E5495"/>
             </a:solidFill>
           </c:spPr>
           <c:cat>
@@ -8023,32 +8075,111 @@
                 <c:formatCode>General</c:formatCode>
                 <c:ptCount val="7"/>
                 <c:pt idx="0">
-                  <c:v>1.1608</c:v>
+                  <c:v>0.0053</c:v>
                 </c:pt>
                 <c:pt idx="1">
-                  <c:v>1.3929</c:v>
+                  <c:v>0.0115</c:v>
                 </c:pt>
                 <c:pt idx="2">
-                  <c:v>0.9546</c:v>
+                  <c:v>0.005</c:v>
                 </c:pt>
                 <c:pt idx="3">
-                  <c:v>0.8889</c:v>
+                  <c:v>0.0148</c:v>
                 </c:pt>
                 <c:pt idx="4">
-                  <c:v>0.9059</c:v>
+                  <c:v>0.011</c:v>
                 </c:pt>
                 <c:pt idx="5">
-                  <c:v>3.6944</c:v>
+                  <c:v>0</c:v>
                 </c:pt>
                 <c:pt idx="6">
-                  <c:v>0.8503</c:v>
+                  <c:v>1.8361</c:v>
+                </c:pt>
+              </c:numCache>
+            </c:numRef>
+          </c:val>
+        </c:ser>
+        <c:ser>
+          <c:idx val="1"/>
+          <c:order val="1"/>
+          <c:tx>
+            <c:strRef>
+              <c:f>Sheet1!$C$1</c:f>
+              <c:strCache>
+                <c:ptCount val="1"/>
+                <c:pt idx="0">
+                  <c:v>FY26_Q3</c:v>
+                </c:pt>
+              </c:strCache>
+            </c:strRef>
+          </c:tx>
+          <c:spPr>
+            <a:solidFill>
+              <a:srgbClr val="A6A6A6"/>
+            </a:solidFill>
+          </c:spPr>
+          <c:cat>
+            <c:strRef>
+              <c:f>Sheet1!$A$2:$A$8</c:f>
+              <c:strCache>
+                <c:ptCount val="7"/>
+                <c:pt idx="0">
+                  <c:v>NBHI</c:v>
+                </c:pt>
+                <c:pt idx="1">
+                  <c:v>STAR</c:v>
+                </c:pt>
+                <c:pt idx="2">
+                  <c:v>CARE</c:v>
+                </c:pt>
+                <c:pt idx="3">
+                  <c:v>CIGNA</c:v>
+                </c:pt>
+                <c:pt idx="4">
+                  <c:v>ABHI</c:v>
+                </c:pt>
+                <c:pt idx="5">
+                  <c:v>Narayana</c:v>
+                </c:pt>
+                <c:pt idx="6">
+                  <c:v>Galaxy</c:v>
+                </c:pt>
+              </c:strCache>
+            </c:strRef>
+          </c:cat>
+          <c:val>
+            <c:numRef>
+              <c:f>Sheet1!$C$2:$C$8</c:f>
+              <c:numCache>
+                <c:formatCode>General</c:formatCode>
+                <c:ptCount val="7"/>
+                <c:pt idx="0">
+                  <c:v>0.0071</c:v>
+                </c:pt>
+                <c:pt idx="1">
+                  <c:v>0.0129</c:v>
+                </c:pt>
+                <c:pt idx="2">
+                  <c:v>0.0054</c:v>
+                </c:pt>
+                <c:pt idx="3">
+                  <c:v>0.0125</c:v>
+                </c:pt>
+                <c:pt idx="4">
+                  <c:v>0.0108</c:v>
+                </c:pt>
+                <c:pt idx="5">
+                  <c:v>0</c:v>
+                </c:pt>
+                <c:pt idx="6">
+                  <c:v>0.1364</c:v>
                 </c:pt>
               </c:numCache>
             </c:numRef>
           </c:val>
         </c:ser>
         <c:dLbls>
-          <c:numFmt formatCode="#,##0" sourceLinked="0"/>
+          <c:numFmt formatCode="0.0%" sourceLinked="0"/>
           <c:txPr>
             <a:bodyPr/>
             <a:lstStyle/>
@@ -8117,6 +8248,19 @@
         <c:crosses val="autoZero"/>
       </c:valAx>
     </c:plotArea>
+    <c:legend>
+      <c:legendPos val="b"/>
+      <c:overlay val="0"/>
+      <c:txPr>
+        <a:bodyPr/>
+        <a:lstStyle/>
+        <a:p>
+          <a:pPr>
+            <a:defRPr sz="900"/>
+          </a:pPr>
+        </a:p>
+      </c:txPr>
+    </c:legend>
     <c:dispBlanksAs val="gap"/>
   </c:chart>
   <c:txPr>
@@ -8199,25 +8343,25 @@
                 <c:formatCode>General</c:formatCode>
                 <c:ptCount val="7"/>
                 <c:pt idx="0">
-                  <c:v>1827.03</c:v>
+                  <c:v>0.6764</c:v>
                 </c:pt>
                 <c:pt idx="1">
-                  <c:v>587.68</c:v>
+                  <c:v>0.6649</c:v>
                 </c:pt>
                 <c:pt idx="2">
-                  <c:v>973.12</c:v>
+                  <c:v>0.7101</c:v>
                 </c:pt>
                 <c:pt idx="3">
-                  <c:v>1645.25</c:v>
+                  <c:v>0.6617</c:v>
                 </c:pt>
                 <c:pt idx="4">
-                  <c:v>538</c:v>
+                  <c:v>0.6512</c:v>
                 </c:pt>
                 <c:pt idx="5">
-                  <c:v>100.05</c:v>
+                  <c:v>0.4391</c:v>
                 </c:pt>
                 <c:pt idx="6">
-                  <c:v>300.25</c:v>
+                  <c:v>0.5368</c:v>
                 </c:pt>
               </c:numCache>
             </c:numRef>
@@ -8278,32 +8422,32 @@
                 <c:formatCode>General</c:formatCode>
                 <c:ptCount val="7"/>
                 <c:pt idx="0">
-                  <c:v>1847.2</c:v>
+                  <c:v>0.5996</c:v>
                 </c:pt>
                 <c:pt idx="1">
-                  <c:v>588.4</c:v>
+                  <c:v>0.6524</c:v>
                 </c:pt>
                 <c:pt idx="2">
-                  <c:v>995.83</c:v>
+                  <c:v>0.7356</c:v>
                 </c:pt>
                 <c:pt idx="3">
-                  <c:v>1919.22</c:v>
+                  <c:v>0.6453</c:v>
                 </c:pt>
                 <c:pt idx="4">
-                  <c:v>556.52</c:v>
+                  <c:v>0.5987</c:v>
                 </c:pt>
                 <c:pt idx="5">
-                  <c:v>117.05</c:v>
+                  <c:v>0.5331</c:v>
                 </c:pt>
                 <c:pt idx="6">
-                  <c:v>300.25</c:v>
+                  <c:v>0.5224</c:v>
                 </c:pt>
               </c:numCache>
             </c:numRef>
           </c:val>
         </c:ser>
         <c:dLbls>
-          <c:numFmt formatCode="#,##0" sourceLinked="0"/>
+          <c:numFmt formatCode="0.0%" sourceLinked="0"/>
           <c:txPr>
             <a:bodyPr/>
             <a:lstStyle/>
@@ -8421,14 +8565,14 @@
               <c:strCache>
                 <c:ptCount val="1"/>
                 <c:pt idx="0">
-                  <c:v>FY25_Q3</c:v>
+                  <c:v>FY26_Q3</c:v>
                 </c:pt>
               </c:strCache>
             </c:strRef>
           </c:tx>
           <c:spPr>
             <a:solidFill>
-              <a:srgbClr val="2E5495"/>
+              <a:srgbClr val="2E75B6"/>
             </a:solidFill>
           </c:spPr>
           <c:cat>
@@ -8467,104 +8611,25 @@
                 <c:formatCode>General</c:formatCode>
                 <c:ptCount val="7"/>
                 <c:pt idx="0">
-                  <c:v>286505</c:v>
+                  <c:v>5.1355</c:v>
                 </c:pt>
                 <c:pt idx="1">
-                  <c:v>704458</c:v>
+                  <c:v>7.3931</c:v>
                 </c:pt>
                 <c:pt idx="2">
-                  <c:v>221019</c:v>
+                  <c:v>6.0143</c:v>
                 </c:pt>
                 <c:pt idx="3">
-                  <c:v>48126</c:v>
+                  <c:v>6.2121</c:v>
                 </c:pt>
                 <c:pt idx="4">
-                  <c:v>127487</c:v>
+                  <c:v>6.1921</c:v>
                 </c:pt>
                 <c:pt idx="5">
-                  <c:v>9000</c:v>
+                  <c:v>8.126</c:v>
                 </c:pt>
                 <c:pt idx="6">
-                  <c:v>26543</c:v>
-                </c:pt>
-              </c:numCache>
-            </c:numRef>
-          </c:val>
-        </c:ser>
-        <c:ser>
-          <c:idx val="1"/>
-          <c:order val="1"/>
-          <c:tx>
-            <c:strRef>
-              <c:f>Sheet1!$C$1</c:f>
-              <c:strCache>
-                <c:ptCount val="1"/>
-                <c:pt idx="0">
-                  <c:v>FY26_Q3</c:v>
-                </c:pt>
-              </c:strCache>
-            </c:strRef>
-          </c:tx>
-          <c:spPr>
-            <a:solidFill>
-              <a:srgbClr val="A6A6A6"/>
-            </a:solidFill>
-          </c:spPr>
-          <c:cat>
-            <c:strRef>
-              <c:f>Sheet1!$A$2:$A$8</c:f>
-              <c:strCache>
-                <c:ptCount val="7"/>
-                <c:pt idx="0">
-                  <c:v>NBHI</c:v>
-                </c:pt>
-                <c:pt idx="1">
-                  <c:v>STAR</c:v>
-                </c:pt>
-                <c:pt idx="2">
-                  <c:v>CARE</c:v>
-                </c:pt>
-                <c:pt idx="3">
-                  <c:v>CIGNA</c:v>
-                </c:pt>
-                <c:pt idx="4">
-                  <c:v>ABHI</c:v>
-                </c:pt>
-                <c:pt idx="5">
-                  <c:v>Narayana</c:v>
-                </c:pt>
-                <c:pt idx="6">
-                  <c:v>Galaxy</c:v>
-                </c:pt>
-              </c:strCache>
-            </c:strRef>
-          </c:cat>
-          <c:val>
-            <c:numRef>
-              <c:f>Sheet1!$C$2:$C$8</c:f>
-              <c:numCache>
-                <c:formatCode>General</c:formatCode>
-                <c:ptCount val="7"/>
-                <c:pt idx="0">
-                  <c:v>288591</c:v>
-                </c:pt>
-                <c:pt idx="1">
-                  <c:v>768209</c:v>
-                </c:pt>
-                <c:pt idx="2">
-                  <c:v>262217</c:v>
-                </c:pt>
-                <c:pt idx="3">
-                  <c:v>66401</c:v>
-                </c:pt>
-                <c:pt idx="4">
-                  <c:v>154966</c:v>
-                </c:pt>
-                <c:pt idx="5">
-                  <c:v>8568</c:v>
-                </c:pt>
-                <c:pt idx="6">
-                  <c:v>16565</c:v>
+                  <c:v>2.7608</c:v>
                 </c:pt>
               </c:numCache>
             </c:numRef>
@@ -8640,19 +8705,6 @@
         <c:crosses val="autoZero"/>
       </c:valAx>
     </c:plotArea>
-    <c:legend>
-      <c:legendPos val="b"/>
-      <c:overlay val="0"/>
-      <c:txPr>
-        <a:bodyPr/>
-        <a:lstStyle/>
-        <a:p>
-          <a:pPr>
-            <a:defRPr sz="900"/>
-          </a:pPr>
-        </a:p>
-      </c:txPr>
-    </c:legend>
     <c:dispBlanksAs val="gap"/>
   </c:chart>
   <c:txPr>
@@ -8689,14 +8741,14 @@
               <c:strCache>
                 <c:ptCount val="1"/>
                 <c:pt idx="0">
-                  <c:v>FY25_Q3</c:v>
+                  <c:v>FY26_Q3</c:v>
                 </c:pt>
               </c:strCache>
             </c:strRef>
           </c:tx>
           <c:spPr>
             <a:solidFill>
-              <a:srgbClr val="2E5495"/>
+              <a:srgbClr val="2E75B6"/>
             </a:solidFill>
           </c:spPr>
           <c:cat>
@@ -8735,104 +8787,25 @@
                 <c:formatCode>General</c:formatCode>
                 <c:ptCount val="7"/>
                 <c:pt idx="0">
-                  <c:v>7.44</c:v>
+                  <c:v>1.1608</c:v>
                 </c:pt>
                 <c:pt idx="1">
-                  <c:v>861.92</c:v>
+                  <c:v>1.3929</c:v>
                 </c:pt>
                 <c:pt idx="2">
-                  <c:v>14.49</c:v>
+                  <c:v>0.9546</c:v>
                 </c:pt>
                 <c:pt idx="3">
-                  <c:v>-215.08</c:v>
+                  <c:v>0.8889</c:v>
                 </c:pt>
                 <c:pt idx="4">
-                  <c:v>-199.11</c:v>
+                  <c:v>0.9059</c:v>
                 </c:pt>
                 <c:pt idx="5">
-                  <c:v>-3.1</c:v>
+                  <c:v>3.6944</c:v>
                 </c:pt>
                 <c:pt idx="6">
-                  <c:v>-30.99</c:v>
-                </c:pt>
-              </c:numCache>
-            </c:numRef>
-          </c:val>
-        </c:ser>
-        <c:ser>
-          <c:idx val="1"/>
-          <c:order val="1"/>
-          <c:tx>
-            <c:strRef>
-              <c:f>Sheet1!$C$1</c:f>
-              <c:strCache>
-                <c:ptCount val="1"/>
-                <c:pt idx="0">
-                  <c:v>FY26_Q3</c:v>
-                </c:pt>
-              </c:strCache>
-            </c:strRef>
-          </c:tx>
-          <c:spPr>
-            <a:solidFill>
-              <a:srgbClr val="A6A6A6"/>
-            </a:solidFill>
-          </c:spPr>
-          <c:cat>
-            <c:strRef>
-              <c:f>Sheet1!$A$2:$A$8</c:f>
-              <c:strCache>
-                <c:ptCount val="7"/>
-                <c:pt idx="0">
-                  <c:v>NBHI</c:v>
-                </c:pt>
-                <c:pt idx="1">
-                  <c:v>STAR</c:v>
-                </c:pt>
-                <c:pt idx="2">
-                  <c:v>CARE</c:v>
-                </c:pt>
-                <c:pt idx="3">
-                  <c:v>CIGNA</c:v>
-                </c:pt>
-                <c:pt idx="4">
-                  <c:v>ABHI</c:v>
-                </c:pt>
-                <c:pt idx="5">
-                  <c:v>Narayana</c:v>
-                </c:pt>
-                <c:pt idx="6">
-                  <c:v>Galaxy</c:v>
-                </c:pt>
-              </c:strCache>
-            </c:strRef>
-          </c:cat>
-          <c:val>
-            <c:numRef>
-              <c:f>Sheet1!$C$2:$C$8</c:f>
-              <c:numCache>
-                <c:formatCode>General</c:formatCode>
-                <c:ptCount val="7"/>
-                <c:pt idx="0">
-                  <c:v>-214.35</c:v>
-                </c:pt>
-                <c:pt idx="1">
-                  <c:v>603.12</c:v>
-                </c:pt>
-                <c:pt idx="2">
-                  <c:v>-89.33</c:v>
-                </c:pt>
-                <c:pt idx="3">
-                  <c:v>-444.71</c:v>
-                </c:pt>
-                <c:pt idx="4">
-                  <c:v>-179.62</c:v>
-                </c:pt>
-                <c:pt idx="5">
-                  <c:v>-3.17</c:v>
-                </c:pt>
-                <c:pt idx="6">
-                  <c:v>-75.57</c:v>
+                  <c:v>0.8503</c:v>
                 </c:pt>
               </c:numCache>
             </c:numRef>
@@ -8908,6 +8881,261 @@
         <c:crosses val="autoZero"/>
       </c:valAx>
     </c:plotArea>
+    <c:dispBlanksAs val="gap"/>
+  </c:chart>
+  <c:txPr>
+    <a:bodyPr/>
+    <a:lstStyle/>
+    <a:p>
+      <a:pPr>
+        <a:defRPr sz="1800"/>
+      </a:pPr>
+      <a:endParaRPr lang="en-US"/>
+    </a:p>
+  </c:txPr>
+  <c:externalData r:id="rId1">
+    <c:autoUpdate val="0"/>
+  </c:externalData>
+</c:chartSpace>
+</file>
+
+<file path=ppt/charts/chart38.xml><?xml version="1.0" encoding="utf-8"?>
+<c:chartSpace xmlns:c="http://schemas.openxmlformats.org/drawingml/2006/chart" xmlns:a="http://schemas.openxmlformats.org/drawingml/2006/main" xmlns:r="http://schemas.openxmlformats.org/officeDocument/2006/relationships">
+  <c:date1904 val="0"/>
+  <c:chart>
+    <c:autoTitleDeleted val="1"/>
+    <c:plotArea>
+      <c:barChart>
+        <c:barDir val="col"/>
+        <c:grouping val="clustered"/>
+        <c:ser>
+          <c:idx val="0"/>
+          <c:order val="0"/>
+          <c:tx>
+            <c:strRef>
+              <c:f>Sheet1!$B$1</c:f>
+              <c:strCache>
+                <c:ptCount val="1"/>
+                <c:pt idx="0">
+                  <c:v>FY25_Q3</c:v>
+                </c:pt>
+              </c:strCache>
+            </c:strRef>
+          </c:tx>
+          <c:spPr>
+            <a:solidFill>
+              <a:srgbClr val="2E5495"/>
+            </a:solidFill>
+          </c:spPr>
+          <c:cat>
+            <c:strRef>
+              <c:f>Sheet1!$A$2:$A$8</c:f>
+              <c:strCache>
+                <c:ptCount val="7"/>
+                <c:pt idx="0">
+                  <c:v>NBHI</c:v>
+                </c:pt>
+                <c:pt idx="1">
+                  <c:v>STAR</c:v>
+                </c:pt>
+                <c:pt idx="2">
+                  <c:v>CARE</c:v>
+                </c:pt>
+                <c:pt idx="3">
+                  <c:v>CIGNA</c:v>
+                </c:pt>
+                <c:pt idx="4">
+                  <c:v>ABHI</c:v>
+                </c:pt>
+                <c:pt idx="5">
+                  <c:v>Narayana</c:v>
+                </c:pt>
+                <c:pt idx="6">
+                  <c:v>Galaxy</c:v>
+                </c:pt>
+              </c:strCache>
+            </c:strRef>
+          </c:cat>
+          <c:val>
+            <c:numRef>
+              <c:f>Sheet1!$B$2:$B$8</c:f>
+              <c:numCache>
+                <c:formatCode>General</c:formatCode>
+                <c:ptCount val="7"/>
+                <c:pt idx="0">
+                  <c:v>1827.03</c:v>
+                </c:pt>
+                <c:pt idx="1">
+                  <c:v>587.68</c:v>
+                </c:pt>
+                <c:pt idx="2">
+                  <c:v>973.12</c:v>
+                </c:pt>
+                <c:pt idx="3">
+                  <c:v>1645.25</c:v>
+                </c:pt>
+                <c:pt idx="4">
+                  <c:v>538</c:v>
+                </c:pt>
+                <c:pt idx="5">
+                  <c:v>100.05</c:v>
+                </c:pt>
+                <c:pt idx="6">
+                  <c:v>300.25</c:v>
+                </c:pt>
+              </c:numCache>
+            </c:numRef>
+          </c:val>
+        </c:ser>
+        <c:ser>
+          <c:idx val="1"/>
+          <c:order val="1"/>
+          <c:tx>
+            <c:strRef>
+              <c:f>Sheet1!$C$1</c:f>
+              <c:strCache>
+                <c:ptCount val="1"/>
+                <c:pt idx="0">
+                  <c:v>FY26_Q3</c:v>
+                </c:pt>
+              </c:strCache>
+            </c:strRef>
+          </c:tx>
+          <c:spPr>
+            <a:solidFill>
+              <a:srgbClr val="A6A6A6"/>
+            </a:solidFill>
+          </c:spPr>
+          <c:cat>
+            <c:strRef>
+              <c:f>Sheet1!$A$2:$A$8</c:f>
+              <c:strCache>
+                <c:ptCount val="7"/>
+                <c:pt idx="0">
+                  <c:v>NBHI</c:v>
+                </c:pt>
+                <c:pt idx="1">
+                  <c:v>STAR</c:v>
+                </c:pt>
+                <c:pt idx="2">
+                  <c:v>CARE</c:v>
+                </c:pt>
+                <c:pt idx="3">
+                  <c:v>CIGNA</c:v>
+                </c:pt>
+                <c:pt idx="4">
+                  <c:v>ABHI</c:v>
+                </c:pt>
+                <c:pt idx="5">
+                  <c:v>Narayana</c:v>
+                </c:pt>
+                <c:pt idx="6">
+                  <c:v>Galaxy</c:v>
+                </c:pt>
+              </c:strCache>
+            </c:strRef>
+          </c:cat>
+          <c:val>
+            <c:numRef>
+              <c:f>Sheet1!$C$2:$C$8</c:f>
+              <c:numCache>
+                <c:formatCode>General</c:formatCode>
+                <c:ptCount val="7"/>
+                <c:pt idx="0">
+                  <c:v>1847.2</c:v>
+                </c:pt>
+                <c:pt idx="1">
+                  <c:v>588.4</c:v>
+                </c:pt>
+                <c:pt idx="2">
+                  <c:v>995.83</c:v>
+                </c:pt>
+                <c:pt idx="3">
+                  <c:v>1919.22</c:v>
+                </c:pt>
+                <c:pt idx="4">
+                  <c:v>556.52</c:v>
+                </c:pt>
+                <c:pt idx="5">
+                  <c:v>117.05</c:v>
+                </c:pt>
+                <c:pt idx="6">
+                  <c:v>300.25</c:v>
+                </c:pt>
+              </c:numCache>
+            </c:numRef>
+          </c:val>
+        </c:ser>
+        <c:dLbls>
+          <c:numFmt formatCode="#,##0" sourceLinked="0"/>
+          <c:txPr>
+            <a:bodyPr/>
+            <a:lstStyle/>
+            <a:p>
+              <a:pPr>
+                <a:defRPr sz="800"/>
+              </a:pPr>
+            </a:p>
+          </c:txPr>
+          <c:showLegendKey val="0"/>
+          <c:showVal val="1"/>
+          <c:showCatName val="0"/>
+          <c:showSerName val="0"/>
+          <c:showPercent val="0"/>
+          <c:showBubbleSize val="0"/>
+          <c:showLeaderLines val="1"/>
+        </c:dLbls>
+        <c:axId val="-2068027336"/>
+        <c:axId val="-2113994440"/>
+      </c:barChart>
+      <c:catAx>
+        <c:axId val="-2068027336"/>
+        <c:scaling>
+          <c:orientation val="minMax"/>
+        </c:scaling>
+        <c:delete val="0"/>
+        <c:axPos val="b"/>
+        <c:majorTickMark val="out"/>
+        <c:minorTickMark val="none"/>
+        <c:tickLblPos val="nextTo"/>
+        <c:txPr>
+          <a:bodyPr/>
+          <a:lstStyle/>
+          <a:p>
+            <a:pPr>
+              <a:defRPr sz="800"/>
+            </a:pPr>
+          </a:p>
+        </c:txPr>
+        <c:crossAx val="-2113994440"/>
+        <c:crosses val="autoZero"/>
+        <c:auto val="1"/>
+        <c:lblAlgn val="ctr"/>
+        <c:lblOffset val="100"/>
+        <c:noMultiLvlLbl val="0"/>
+      </c:catAx>
+      <c:valAx>
+        <c:axId val="-2113994440"/>
+        <c:scaling/>
+        <c:delete val="0"/>
+        <c:axPos val="l"/>
+        <c:majorGridlines/>
+        <c:majorTickMark val="out"/>
+        <c:minorTickMark val="none"/>
+        <c:tickLblPos val="nextTo"/>
+        <c:txPr>
+          <a:bodyPr/>
+          <a:lstStyle/>
+          <a:p>
+            <a:pPr>
+              <a:defRPr sz="800"/>
+            </a:pPr>
+          </a:p>
+        </c:txPr>
+        <c:crossAx val="-2068027336"/>
+        <c:crosses val="autoZero"/>
+      </c:valAx>
+    </c:plotArea>
     <c:legend>
       <c:legendPos val="b"/>
       <c:overlay val="0"/>
@@ -8939,7 +9167,7 @@
 </c:chartSpace>
 </file>
 
-<file path=ppt/charts/chart38.xml><?xml version="1.0" encoding="utf-8"?>
+<file path=ppt/charts/chart39.xml><?xml version="1.0" encoding="utf-8"?>
 <c:chartSpace xmlns:c="http://schemas.openxmlformats.org/drawingml/2006/chart" xmlns:a="http://schemas.openxmlformats.org/drawingml/2006/main" xmlns:r="http://schemas.openxmlformats.org/officeDocument/2006/relationships">
   <c:date1904 val="0"/>
   <c:chart>
@@ -8947,7 +9175,7 @@
     <c:plotArea>
       <c:barChart>
         <c:barDir val="col"/>
-        <c:grouping val="percentStacked"/>
+        <c:grouping val="clustered"/>
         <c:ser>
           <c:idx val="0"/>
           <c:order val="0"/>
@@ -8957,14 +9185,14 @@
               <c:strCache>
                 <c:ptCount val="1"/>
                 <c:pt idx="0">
-                  <c:v>Corporate Bonds/Debentures</c:v>
+                  <c:v>FY25_Q3</c:v>
                 </c:pt>
               </c:strCache>
             </c:strRef>
           </c:tx>
           <c:spPr>
             <a:solidFill>
-              <a:srgbClr val="2E75B6"/>
+              <a:srgbClr val="2E5495"/>
             </a:solidFill>
           </c:spPr>
           <c:cat>
@@ -9003,25 +9231,25 @@
                 <c:formatCode>General</c:formatCode>
                 <c:ptCount val="7"/>
                 <c:pt idx="0">
-                  <c:v>0.5676013411652736</c:v>
+                  <c:v>286505</c:v>
                 </c:pt>
                 <c:pt idx="1">
-                  <c:v>0.3686368576693841</c:v>
+                  <c:v>704458</c:v>
                 </c:pt>
                 <c:pt idx="2">
-                  <c:v>0.6455636596462582</c:v>
+                  <c:v>221019</c:v>
                 </c:pt>
                 <c:pt idx="3">
-                  <c:v>0.5142161841594013</c:v>
+                  <c:v>48126</c:v>
                 </c:pt>
                 <c:pt idx="4">
-                  <c:v>0.4794079126340204</c:v>
+                  <c:v>127487</c:v>
                 </c:pt>
                 <c:pt idx="5">
-                  <c:v>0.0</c:v>
+                  <c:v>9000</c:v>
                 </c:pt>
                 <c:pt idx="6">
-                  <c:v>0.3768820820613649</c:v>
+                  <c:v>26543</c:v>
                 </c:pt>
               </c:numCache>
             </c:numRef>
@@ -9036,14 +9264,14 @@
               <c:strCache>
                 <c:ptCount val="1"/>
                 <c:pt idx="0">
-                  <c:v>Govt Bonds</c:v>
+                  <c:v>FY26_Q3</c:v>
                 </c:pt>
               </c:strCache>
             </c:strRef>
           </c:tx>
           <c:spPr>
             <a:solidFill>
-              <a:srgbClr val="ED7D31"/>
+              <a:srgbClr val="A6A6A6"/>
             </a:solidFill>
           </c:spPr>
           <c:cat>
@@ -9082,275 +9310,38 @@
                 <c:formatCode>General</c:formatCode>
                 <c:ptCount val="7"/>
                 <c:pt idx="0">
-                  <c:v>0.35012332763011156</c:v>
+                  <c:v>288591</c:v>
                 </c:pt>
                 <c:pt idx="1">
-                  <c:v>0.4209859282036258</c:v>
+                  <c:v>768209</c:v>
                 </c:pt>
                 <c:pt idx="2">
-                  <c:v>0.24898454200218847</c:v>
+                  <c:v>262217</c:v>
                 </c:pt>
                 <c:pt idx="3">
-                  <c:v>0.4351427071759181</c:v>
+                  <c:v>66401</c:v>
                 </c:pt>
                 <c:pt idx="4">
-                  <c:v>0.3586066090995011</c:v>
+                  <c:v>154966</c:v>
                 </c:pt>
                 <c:pt idx="5">
-                  <c:v>0.6952611553095815</c:v>
+                  <c:v>8568</c:v>
                 </c:pt>
                 <c:pt idx="6">
-                  <c:v>0.6020592952863869</c:v>
-                </c:pt>
-              </c:numCache>
-            </c:numRef>
-          </c:val>
-        </c:ser>
-        <c:ser>
-          <c:idx val="2"/>
-          <c:order val="2"/>
-          <c:tx>
-            <c:strRef>
-              <c:f>Sheet1!$D$1</c:f>
-              <c:strCache>
-                <c:ptCount val="1"/>
-                <c:pt idx="0">
-                  <c:v>Deposits</c:v>
-                </c:pt>
-              </c:strCache>
-            </c:strRef>
-          </c:tx>
-          <c:spPr>
-            <a:solidFill>
-              <a:srgbClr val="70AD47"/>
-            </a:solidFill>
-          </c:spPr>
-          <c:cat>
-            <c:strRef>
-              <c:f>Sheet1!$A$2:$A$8</c:f>
-              <c:strCache>
-                <c:ptCount val="7"/>
-                <c:pt idx="0">
-                  <c:v>NBHI</c:v>
-                </c:pt>
-                <c:pt idx="1">
-                  <c:v>STAR</c:v>
-                </c:pt>
-                <c:pt idx="2">
-                  <c:v>CARE</c:v>
-                </c:pt>
-                <c:pt idx="3">
-                  <c:v>CIGNA</c:v>
-                </c:pt>
-                <c:pt idx="4">
-                  <c:v>ABHI</c:v>
-                </c:pt>
-                <c:pt idx="5">
-                  <c:v>Narayana</c:v>
-                </c:pt>
-                <c:pt idx="6">
-                  <c:v>Galaxy</c:v>
-                </c:pt>
-              </c:strCache>
-            </c:strRef>
-          </c:cat>
-          <c:val>
-            <c:numRef>
-              <c:f>Sheet1!$D$2:$D$8</c:f>
-              <c:numCache>
-                <c:formatCode>General</c:formatCode>
-                <c:ptCount val="7"/>
-                <c:pt idx="0">
-                  <c:v>0.014530501338622437</c:v>
-                </c:pt>
-                <c:pt idx="1">
-                  <c:v>0.0</c:v>
-                </c:pt>
-                <c:pt idx="2">
-                  <c:v>0</c:v>
-                </c:pt>
-                <c:pt idx="3">
-                  <c:v>0.021813372960960878</c:v>
-                </c:pt>
-                <c:pt idx="4">
-                  <c:v>0.074493295827736</c:v>
-                </c:pt>
-                <c:pt idx="5">
-                  <c:v>0.17762020062262193</c:v>
-                </c:pt>
-                <c:pt idx="6">
-                  <c:v>0.0</c:v>
-                </c:pt>
-              </c:numCache>
-            </c:numRef>
-          </c:val>
-        </c:ser>
-        <c:ser>
-          <c:idx val="3"/>
-          <c:order val="3"/>
-          <c:tx>
-            <c:strRef>
-              <c:f>Sheet1!$E$1</c:f>
-              <c:strCache>
-                <c:ptCount val="1"/>
-                <c:pt idx="0">
-                  <c:v>Equity/Invits/REIT</c:v>
-                </c:pt>
-              </c:strCache>
-            </c:strRef>
-          </c:tx>
-          <c:spPr>
-            <a:solidFill>
-              <a:srgbClr val="FFC000"/>
-            </a:solidFill>
-          </c:spPr>
-          <c:cat>
-            <c:strRef>
-              <c:f>Sheet1!$A$2:$A$8</c:f>
-              <c:strCache>
-                <c:ptCount val="7"/>
-                <c:pt idx="0">
-                  <c:v>NBHI</c:v>
-                </c:pt>
-                <c:pt idx="1">
-                  <c:v>STAR</c:v>
-                </c:pt>
-                <c:pt idx="2">
-                  <c:v>CARE</c:v>
-                </c:pt>
-                <c:pt idx="3">
-                  <c:v>CIGNA</c:v>
-                </c:pt>
-                <c:pt idx="4">
-                  <c:v>ABHI</c:v>
-                </c:pt>
-                <c:pt idx="5">
-                  <c:v>Narayana</c:v>
-                </c:pt>
-                <c:pt idx="6">
-                  <c:v>Galaxy</c:v>
-                </c:pt>
-              </c:strCache>
-            </c:strRef>
-          </c:cat>
-          <c:val>
-            <c:numRef>
-              <c:f>Sheet1!$E$2:$E$8</c:f>
-              <c:numCache>
-                <c:formatCode>General</c:formatCode>
-                <c:ptCount val="7"/>
-                <c:pt idx="0">
-                  <c:v>0.0016837218426128747</c:v>
-                </c:pt>
-                <c:pt idx="1">
-                  <c:v>0.08248918685969665</c:v>
-                </c:pt>
-                <c:pt idx="2">
-                  <c:v>0.0671495244257595</c:v>
-                </c:pt>
-                <c:pt idx="3">
-                  <c:v>0.0</c:v>
-                </c:pt>
-                <c:pt idx="4">
-                  <c:v>0.0</c:v>
-                </c:pt>
-                <c:pt idx="5">
-                  <c:v>0.0</c:v>
-                </c:pt>
-                <c:pt idx="6">
-                  <c:v>0.0</c:v>
-                </c:pt>
-              </c:numCache>
-            </c:numRef>
-          </c:val>
-        </c:ser>
-        <c:ser>
-          <c:idx val="4"/>
-          <c:order val="4"/>
-          <c:tx>
-            <c:strRef>
-              <c:f>Sheet1!$F$1</c:f>
-              <c:strCache>
-                <c:ptCount val="1"/>
-                <c:pt idx="0">
-                  <c:v>Mutual Funds</c:v>
-                </c:pt>
-              </c:strCache>
-            </c:strRef>
-          </c:tx>
-          <c:spPr>
-            <a:solidFill>
-              <a:srgbClr val="7C3AED"/>
-            </a:solidFill>
-          </c:spPr>
-          <c:cat>
-            <c:strRef>
-              <c:f>Sheet1!$A$2:$A$8</c:f>
-              <c:strCache>
-                <c:ptCount val="7"/>
-                <c:pt idx="0">
-                  <c:v>NBHI</c:v>
-                </c:pt>
-                <c:pt idx="1">
-                  <c:v>STAR</c:v>
-                </c:pt>
-                <c:pt idx="2">
-                  <c:v>CARE</c:v>
-                </c:pt>
-                <c:pt idx="3">
-                  <c:v>CIGNA</c:v>
-                </c:pt>
-                <c:pt idx="4">
-                  <c:v>ABHI</c:v>
-                </c:pt>
-                <c:pt idx="5">
-                  <c:v>Narayana</c:v>
-                </c:pt>
-                <c:pt idx="6">
-                  <c:v>Galaxy</c:v>
-                </c:pt>
-              </c:strCache>
-            </c:strRef>
-          </c:cat>
-          <c:val>
-            <c:numRef>
-              <c:f>Sheet1!$F$2:$F$8</c:f>
-              <c:numCache>
-                <c:formatCode>General</c:formatCode>
-                <c:ptCount val="7"/>
-                <c:pt idx="0">
-                  <c:v>0.06606110802337957</c:v>
-                </c:pt>
-                <c:pt idx="1">
-                  <c:v>0.1278880272672935</c:v>
-                </c:pt>
-                <c:pt idx="2">
-                  <c:v>0.03830227392579394</c:v>
-                </c:pt>
-                <c:pt idx="3">
-                  <c:v>0.02882773570371986</c:v>
-                </c:pt>
-                <c:pt idx="4">
-                  <c:v>0.08749218243874257</c:v>
-                </c:pt>
-                <c:pt idx="5">
-                  <c:v>0.1271186440677966</c:v>
-                </c:pt>
-                <c:pt idx="6">
-                  <c:v>0.02105862265224815</c:v>
+                  <c:v>16565</c:v>
                 </c:pt>
               </c:numCache>
             </c:numRef>
           </c:val>
         </c:ser>
         <c:dLbls>
-          <c:numFmt formatCode="0%" sourceLinked="0"/>
+          <c:numFmt formatCode="#,##0" sourceLinked="0"/>
           <c:txPr>
             <a:bodyPr/>
             <a:lstStyle/>
             <a:p>
               <a:pPr>
-                <a:defRPr sz="700"/>
+                <a:defRPr sz="800"/>
               </a:pPr>
             </a:p>
           </c:txPr>
@@ -9362,7 +9353,6 @@
           <c:showBubbleSize val="0"/>
           <c:showLeaderLines val="1"/>
         </c:dLbls>
-        <c:overlap val="100"/>
         <c:axId val="-2068027336"/>
         <c:axId val="-2113994440"/>
       </c:barChart>
@@ -9395,12 +9385,21 @@
       <c:valAx>
         <c:axId val="-2113994440"/>
         <c:scaling/>
-        <c:delete/>
+        <c:delete val="0"/>
         <c:axPos val="l"/>
         <c:majorGridlines/>
         <c:majorTickMark val="out"/>
         <c:minorTickMark val="none"/>
         <c:tickLblPos val="nextTo"/>
+        <c:txPr>
+          <a:bodyPr/>
+          <a:lstStyle/>
+          <a:p>
+            <a:pPr>
+              <a:defRPr sz="800"/>
+            </a:pPr>
+          </a:p>
+        </c:txPr>
         <c:crossAx val="-2068027336"/>
         <c:crosses val="autoZero"/>
       </c:valAx>
@@ -9413,504 +9412,7 @@
         <a:lstStyle/>
         <a:p>
           <a:pPr>
-            <a:defRPr sz="800"/>
-          </a:pPr>
-        </a:p>
-      </c:txPr>
-    </c:legend>
-    <c:dispBlanksAs val="gap"/>
-  </c:chart>
-  <c:txPr>
-    <a:bodyPr/>
-    <a:lstStyle/>
-    <a:p>
-      <a:pPr>
-        <a:defRPr sz="1800"/>
-      </a:pPr>
-      <a:endParaRPr lang="en-US"/>
-    </a:p>
-  </c:txPr>
-  <c:externalData r:id="rId1">
-    <c:autoUpdate val="0"/>
-  </c:externalData>
-</c:chartSpace>
-</file>
-
-<file path=ppt/charts/chart39.xml><?xml version="1.0" encoding="utf-8"?>
-<c:chartSpace xmlns:c="http://schemas.openxmlformats.org/drawingml/2006/chart" xmlns:a="http://schemas.openxmlformats.org/drawingml/2006/main" xmlns:r="http://schemas.openxmlformats.org/officeDocument/2006/relationships">
-  <c:date1904 val="0"/>
-  <c:chart>
-    <c:autoTitleDeleted val="1"/>
-    <c:plotArea>
-      <c:barChart>
-        <c:barDir val="col"/>
-        <c:grouping val="percentStacked"/>
-        <c:ser>
-          <c:idx val="0"/>
-          <c:order val="0"/>
-          <c:tx>
-            <c:strRef>
-              <c:f>Sheet1!$B$1</c:f>
-              <c:strCache>
-                <c:ptCount val="1"/>
-                <c:pt idx="0">
-                  <c:v>Corporate Bonds/Debentures</c:v>
-                </c:pt>
-              </c:strCache>
-            </c:strRef>
-          </c:tx>
-          <c:spPr>
-            <a:solidFill>
-              <a:srgbClr val="2E75B6"/>
-            </a:solidFill>
-          </c:spPr>
-          <c:cat>
-            <c:strRef>
-              <c:f>Sheet1!$A$2:$A$8</c:f>
-              <c:strCache>
-                <c:ptCount val="7"/>
-                <c:pt idx="0">
-                  <c:v>NBHI</c:v>
-                </c:pt>
-                <c:pt idx="1">
-                  <c:v>STAR</c:v>
-                </c:pt>
-                <c:pt idx="2">
-                  <c:v>CARE</c:v>
-                </c:pt>
-                <c:pt idx="3">
-                  <c:v>CIGNA</c:v>
-                </c:pt>
-                <c:pt idx="4">
-                  <c:v>ABHI</c:v>
-                </c:pt>
-                <c:pt idx="5">
-                  <c:v>Narayana</c:v>
-                </c:pt>
-                <c:pt idx="6">
-                  <c:v>Galaxy</c:v>
-                </c:pt>
-              </c:strCache>
-            </c:strRef>
-          </c:cat>
-          <c:val>
-            <c:numRef>
-              <c:f>Sheet1!$B$2:$B$8</c:f>
-              <c:numCache>
-                <c:formatCode>General</c:formatCode>
-                <c:ptCount val="7"/>
-                <c:pt idx="0">
-                  <c:v>0.5740654255206232</c:v>
-                </c:pt>
-                <c:pt idx="1">
-                  <c:v>0.44329257003062555</c:v>
-                </c:pt>
-                <c:pt idx="2">
-                  <c:v>0.5475434717461605</c:v>
-                </c:pt>
-                <c:pt idx="3">
-                  <c:v>0.4898508720541835</c:v>
-                </c:pt>
-                <c:pt idx="4">
-                  <c:v>0.4084929995493606</c:v>
-                </c:pt>
-                <c:pt idx="5">
-                  <c:v>0.0</c:v>
-                </c:pt>
-                <c:pt idx="6">
-                  <c:v>0.26074811756133104</c:v>
-                </c:pt>
-              </c:numCache>
-            </c:numRef>
-          </c:val>
-        </c:ser>
-        <c:ser>
-          <c:idx val="1"/>
-          <c:order val="1"/>
-          <c:tx>
-            <c:strRef>
-              <c:f>Sheet1!$C$1</c:f>
-              <c:strCache>
-                <c:ptCount val="1"/>
-                <c:pt idx="0">
-                  <c:v>Govt Bonds</c:v>
-                </c:pt>
-              </c:strCache>
-            </c:strRef>
-          </c:tx>
-          <c:spPr>
-            <a:solidFill>
-              <a:srgbClr val="ED7D31"/>
-            </a:solidFill>
-          </c:spPr>
-          <c:cat>
-            <c:strRef>
-              <c:f>Sheet1!$A$2:$A$8</c:f>
-              <c:strCache>
-                <c:ptCount val="7"/>
-                <c:pt idx="0">
-                  <c:v>NBHI</c:v>
-                </c:pt>
-                <c:pt idx="1">
-                  <c:v>STAR</c:v>
-                </c:pt>
-                <c:pt idx="2">
-                  <c:v>CARE</c:v>
-                </c:pt>
-                <c:pt idx="3">
-                  <c:v>CIGNA</c:v>
-                </c:pt>
-                <c:pt idx="4">
-                  <c:v>ABHI</c:v>
-                </c:pt>
-                <c:pt idx="5">
-                  <c:v>Narayana</c:v>
-                </c:pt>
-                <c:pt idx="6">
-                  <c:v>Galaxy</c:v>
-                </c:pt>
-              </c:strCache>
-            </c:strRef>
-          </c:cat>
-          <c:val>
-            <c:numRef>
-              <c:f>Sheet1!$C$2:$C$8</c:f>
-              <c:numCache>
-                <c:formatCode>General</c:formatCode>
-                <c:ptCount val="7"/>
-                <c:pt idx="0">
-                  <c:v>0.35044473220540473</c:v>
-                </c:pt>
-                <c:pt idx="1">
-                  <c:v>0.43291355933746734</c:v>
-                </c:pt>
-                <c:pt idx="2">
-                  <c:v>0.3258647757718164</c:v>
-                </c:pt>
-                <c:pt idx="3">
-                  <c:v>0.43524599430621075</c:v>
-                </c:pt>
-                <c:pt idx="4">
-                  <c:v>0.47253818780787216</c:v>
-                </c:pt>
-                <c:pt idx="5">
-                  <c:v>0.7906379334950764</c:v>
-                </c:pt>
-                <c:pt idx="6">
-                  <c:v>0.7285240061533479</c:v>
-                </c:pt>
-              </c:numCache>
-            </c:numRef>
-          </c:val>
-        </c:ser>
-        <c:ser>
-          <c:idx val="2"/>
-          <c:order val="2"/>
-          <c:tx>
-            <c:strRef>
-              <c:f>Sheet1!$D$1</c:f>
-              <c:strCache>
-                <c:ptCount val="1"/>
-                <c:pt idx="0">
-                  <c:v>Deposits</c:v>
-                </c:pt>
-              </c:strCache>
-            </c:strRef>
-          </c:tx>
-          <c:spPr>
-            <a:solidFill>
-              <a:srgbClr val="70AD47"/>
-            </a:solidFill>
-          </c:spPr>
-          <c:cat>
-            <c:strRef>
-              <c:f>Sheet1!$A$2:$A$8</c:f>
-              <c:strCache>
-                <c:ptCount val="7"/>
-                <c:pt idx="0">
-                  <c:v>NBHI</c:v>
-                </c:pt>
-                <c:pt idx="1">
-                  <c:v>STAR</c:v>
-                </c:pt>
-                <c:pt idx="2">
-                  <c:v>CARE</c:v>
-                </c:pt>
-                <c:pt idx="3">
-                  <c:v>CIGNA</c:v>
-                </c:pt>
-                <c:pt idx="4">
-                  <c:v>ABHI</c:v>
-                </c:pt>
-                <c:pt idx="5">
-                  <c:v>Narayana</c:v>
-                </c:pt>
-                <c:pt idx="6">
-                  <c:v>Galaxy</c:v>
-                </c:pt>
-              </c:strCache>
-            </c:strRef>
-          </c:cat>
-          <c:val>
-            <c:numRef>
-              <c:f>Sheet1!$D$2:$D$8</c:f>
-              <c:numCache>
-                <c:formatCode>General</c:formatCode>
-                <c:ptCount val="7"/>
-                <c:pt idx="0">
-                  <c:v>0.033965228097734945</c:v>
-                </c:pt>
-                <c:pt idx="1">
-                  <c:v>0.0</c:v>
-                </c:pt>
-                <c:pt idx="2">
-                  <c:v>0</c:v>
-                </c:pt>
-                <c:pt idx="3">
-                  <c:v>0.03895209611609574</c:v>
-                </c:pt>
-                <c:pt idx="4">
-                  <c:v>0.060082669028638916</c:v>
-                </c:pt>
-                <c:pt idx="5">
-                  <c:v>0.13358070500927643</c:v>
-                </c:pt>
-                <c:pt idx="6">
-                  <c:v>0.0</c:v>
-                </c:pt>
-              </c:numCache>
-            </c:numRef>
-          </c:val>
-        </c:ser>
-        <c:ser>
-          <c:idx val="3"/>
-          <c:order val="3"/>
-          <c:tx>
-            <c:strRef>
-              <c:f>Sheet1!$E$1</c:f>
-              <c:strCache>
-                <c:ptCount val="1"/>
-                <c:pt idx="0">
-                  <c:v>Equity/Invits/REIT</c:v>
-                </c:pt>
-              </c:strCache>
-            </c:strRef>
-          </c:tx>
-          <c:spPr>
-            <a:solidFill>
-              <a:srgbClr val="FFC000"/>
-            </a:solidFill>
-          </c:spPr>
-          <c:cat>
-            <c:strRef>
-              <c:f>Sheet1!$A$2:$A$8</c:f>
-              <c:strCache>
-                <c:ptCount val="7"/>
-                <c:pt idx="0">
-                  <c:v>NBHI</c:v>
-                </c:pt>
-                <c:pt idx="1">
-                  <c:v>STAR</c:v>
-                </c:pt>
-                <c:pt idx="2">
-                  <c:v>CARE</c:v>
-                </c:pt>
-                <c:pt idx="3">
-                  <c:v>CIGNA</c:v>
-                </c:pt>
-                <c:pt idx="4">
-                  <c:v>ABHI</c:v>
-                </c:pt>
-                <c:pt idx="5">
-                  <c:v>Narayana</c:v>
-                </c:pt>
-                <c:pt idx="6">
-                  <c:v>Galaxy</c:v>
-                </c:pt>
-              </c:strCache>
-            </c:strRef>
-          </c:cat>
-          <c:val>
-            <c:numRef>
-              <c:f>Sheet1!$E$2:$E$8</c:f>
-              <c:numCache>
-                <c:formatCode>General</c:formatCode>
-                <c:ptCount val="7"/>
-                <c:pt idx="0">
-                  <c:v>0.0016218396416668435</c:v>
-                </c:pt>
-                <c:pt idx="1">
-                  <c:v>0.007323280611176369</c:v>
-                </c:pt>
-                <c:pt idx="2">
-                  <c:v>0.08215463015283507</c:v>
-                </c:pt>
-                <c:pt idx="3">
-                  <c:v>0.0</c:v>
-                </c:pt>
-                <c:pt idx="4">
-                  <c:v>0.0</c:v>
-                </c:pt>
-                <c:pt idx="5">
-                  <c:v>0.0</c:v>
-                </c:pt>
-                <c:pt idx="6">
-                  <c:v>0.0</c:v>
-                </c:pt>
-              </c:numCache>
-            </c:numRef>
-          </c:val>
-        </c:ser>
-        <c:ser>
-          <c:idx val="4"/>
-          <c:order val="4"/>
-          <c:tx>
-            <c:strRef>
-              <c:f>Sheet1!$F$1</c:f>
-              <c:strCache>
-                <c:ptCount val="1"/>
-                <c:pt idx="0">
-                  <c:v>Mutual Funds</c:v>
-                </c:pt>
-              </c:strCache>
-            </c:strRef>
-          </c:tx>
-          <c:spPr>
-            <a:solidFill>
-              <a:srgbClr val="7C3AED"/>
-            </a:solidFill>
-          </c:spPr>
-          <c:cat>
-            <c:strRef>
-              <c:f>Sheet1!$A$2:$A$8</c:f>
-              <c:strCache>
-                <c:ptCount val="7"/>
-                <c:pt idx="0">
-                  <c:v>NBHI</c:v>
-                </c:pt>
-                <c:pt idx="1">
-                  <c:v>STAR</c:v>
-                </c:pt>
-                <c:pt idx="2">
-                  <c:v>CARE</c:v>
-                </c:pt>
-                <c:pt idx="3">
-                  <c:v>CIGNA</c:v>
-                </c:pt>
-                <c:pt idx="4">
-                  <c:v>ABHI</c:v>
-                </c:pt>
-                <c:pt idx="5">
-                  <c:v>Narayana</c:v>
-                </c:pt>
-                <c:pt idx="6">
-                  <c:v>Galaxy</c:v>
-                </c:pt>
-              </c:strCache>
-            </c:strRef>
-          </c:cat>
-          <c:val>
-            <c:numRef>
-              <c:f>Sheet1!$F$2:$F$8</c:f>
-              <c:numCache>
-                <c:formatCode>General</c:formatCode>
-                <c:ptCount val="7"/>
-                <c:pt idx="0">
-                  <c:v>0.03990277453457024</c:v>
-                </c:pt>
-                <c:pt idx="1">
-                  <c:v>0.11647059002073071</c:v>
-                </c:pt>
-                <c:pt idx="2">
-                  <c:v>0.044437122329188054</c:v>
-                </c:pt>
-                <c:pt idx="3">
-                  <c:v>0.035951037523510004</c:v>
-                </c:pt>
-                <c:pt idx="4">
-                  <c:v>0.05888614361412833</c:v>
-                </c:pt>
-                <c:pt idx="5">
-                  <c:v>0.07578136149564721</c:v>
-                </c:pt>
-                <c:pt idx="6">
-                  <c:v>0.010727876285321026</c:v>
-                </c:pt>
-              </c:numCache>
-            </c:numRef>
-          </c:val>
-        </c:ser>
-        <c:dLbls>
-          <c:numFmt formatCode="0%" sourceLinked="0"/>
-          <c:txPr>
-            <a:bodyPr/>
-            <a:lstStyle/>
-            <a:p>
-              <a:pPr>
-                <a:defRPr sz="700"/>
-              </a:pPr>
-            </a:p>
-          </c:txPr>
-          <c:showLegendKey val="0"/>
-          <c:showVal val="1"/>
-          <c:showCatName val="0"/>
-          <c:showSerName val="0"/>
-          <c:showPercent val="0"/>
-          <c:showBubbleSize val="0"/>
-          <c:showLeaderLines val="1"/>
-        </c:dLbls>
-        <c:overlap val="100"/>
-        <c:axId val="-2068027336"/>
-        <c:axId val="-2113994440"/>
-      </c:barChart>
-      <c:catAx>
-        <c:axId val="-2068027336"/>
-        <c:scaling>
-          <c:orientation val="minMax"/>
-        </c:scaling>
-        <c:delete val="0"/>
-        <c:axPos val="b"/>
-        <c:majorTickMark val="out"/>
-        <c:minorTickMark val="none"/>
-        <c:tickLblPos val="nextTo"/>
-        <c:txPr>
-          <a:bodyPr/>
-          <a:lstStyle/>
-          <a:p>
-            <a:pPr>
-              <a:defRPr sz="800"/>
-            </a:pPr>
-          </a:p>
-        </c:txPr>
-        <c:crossAx val="-2113994440"/>
-        <c:crosses val="autoZero"/>
-        <c:auto val="1"/>
-        <c:lblAlgn val="ctr"/>
-        <c:lblOffset val="100"/>
-        <c:noMultiLvlLbl val="0"/>
-      </c:catAx>
-      <c:valAx>
-        <c:axId val="-2113994440"/>
-        <c:scaling/>
-        <c:delete/>
-        <c:axPos val="l"/>
-        <c:majorGridlines/>
-        <c:majorTickMark val="out"/>
-        <c:minorTickMark val="none"/>
-        <c:tickLblPos val="nextTo"/>
-        <c:crossAx val="-2068027336"/>
-        <c:crosses val="autoZero"/>
-      </c:valAx>
-    </c:plotArea>
-    <c:legend>
-      <c:legendPos val="b"/>
-      <c:overlay val="0"/>
-      <c:txPr>
-        <a:bodyPr/>
-        <a:lstStyle/>
-        <a:p>
-          <a:pPr>
-            <a:defRPr sz="800"/>
+            <a:defRPr sz="900"/>
           </a:pPr>
         </a:p>
       </c:txPr>
@@ -10124,7 +9626,7 @@
     <c:plotArea>
       <c:barChart>
         <c:barDir val="col"/>
-        <c:grouping val="percentStacked"/>
+        <c:grouping val="clustered"/>
         <c:ser>
           <c:idx val="0"/>
           <c:order val="0"/>
@@ -10134,14 +9636,14 @@
               <c:strCache>
                 <c:ptCount val="1"/>
                 <c:pt idx="0">
-                  <c:v>Sovereign</c:v>
+                  <c:v>FY25_Q3</c:v>
                 </c:pt>
               </c:strCache>
             </c:strRef>
           </c:tx>
           <c:spPr>
             <a:solidFill>
-              <a:srgbClr val="2E75B6"/>
+              <a:srgbClr val="2E5495"/>
             </a:solidFill>
           </c:spPr>
           <c:cat>
@@ -10180,25 +9682,25 @@
                 <c:formatCode>General</c:formatCode>
                 <c:ptCount val="7"/>
                 <c:pt idx="0">
-                  <c:v>0.32</c:v>
+                  <c:v>7.44</c:v>
                 </c:pt>
                 <c:pt idx="1">
-                  <c:v>0.3589</c:v>
+                  <c:v>861.92</c:v>
                 </c:pt>
                 <c:pt idx="2">
-                  <c:v>0</c:v>
+                  <c:v>14.49</c:v>
                 </c:pt>
                 <c:pt idx="3">
-                  <c:v>0.38</c:v>
+                  <c:v>-215.08</c:v>
                 </c:pt>
                 <c:pt idx="4">
-                  <c:v>0.61</c:v>
+                  <c:v>-199.11</c:v>
                 </c:pt>
                 <c:pt idx="5">
-                  <c:v>1</c:v>
+                  <c:v>-3.1</c:v>
                 </c:pt>
                 <c:pt idx="6">
-                  <c:v>0.5957</c:v>
+                  <c:v>-30.99</c:v>
                 </c:pt>
               </c:numCache>
             </c:numRef>
@@ -10213,14 +9715,14 @@
               <c:strCache>
                 <c:ptCount val="1"/>
                 <c:pt idx="0">
-                  <c:v>AAA rated</c:v>
+                  <c:v>FY26_Q3</c:v>
                 </c:pt>
               </c:strCache>
             </c:strRef>
           </c:tx>
           <c:spPr>
             <a:solidFill>
-              <a:srgbClr val="ED7D31"/>
+              <a:srgbClr val="A6A6A6"/>
             </a:solidFill>
           </c:spPr>
           <c:cat>
@@ -10259,275 +9761,38 @@
                 <c:formatCode>General</c:formatCode>
                 <c:ptCount val="7"/>
                 <c:pt idx="0">
-                  <c:v>0.6</c:v>
+                  <c:v>-214.35</c:v>
                 </c:pt>
                 <c:pt idx="1">
-                  <c:v>0.4135</c:v>
+                  <c:v>603.12</c:v>
                 </c:pt>
                 <c:pt idx="2">
-                  <c:v>0</c:v>
+                  <c:v>-89.33</c:v>
                 </c:pt>
                 <c:pt idx="3">
-                  <c:v>0.62</c:v>
+                  <c:v>-444.71</c:v>
                 </c:pt>
                 <c:pt idx="4">
-                  <c:v>0.36</c:v>
+                  <c:v>-179.62</c:v>
                 </c:pt>
                 <c:pt idx="5">
-                  <c:v>0</c:v>
+                  <c:v>-3.17</c:v>
                 </c:pt>
                 <c:pt idx="6">
-                  <c:v>0.3781</c:v>
-                </c:pt>
-              </c:numCache>
-            </c:numRef>
-          </c:val>
-        </c:ser>
-        <c:ser>
-          <c:idx val="2"/>
-          <c:order val="2"/>
-          <c:tx>
-            <c:strRef>
-              <c:f>Sheet1!$D$1</c:f>
-              <c:strCache>
-                <c:ptCount val="1"/>
-                <c:pt idx="0">
-                  <c:v>AA or better</c:v>
-                </c:pt>
-              </c:strCache>
-            </c:strRef>
-          </c:tx>
-          <c:spPr>
-            <a:solidFill>
-              <a:srgbClr val="70AD47"/>
-            </a:solidFill>
-          </c:spPr>
-          <c:cat>
-            <c:strRef>
-              <c:f>Sheet1!$A$2:$A$8</c:f>
-              <c:strCache>
-                <c:ptCount val="7"/>
-                <c:pt idx="0">
-                  <c:v>NBHI</c:v>
-                </c:pt>
-                <c:pt idx="1">
-                  <c:v>STAR</c:v>
-                </c:pt>
-                <c:pt idx="2">
-                  <c:v>CARE</c:v>
-                </c:pt>
-                <c:pt idx="3">
-                  <c:v>CIGNA</c:v>
-                </c:pt>
-                <c:pt idx="4">
-                  <c:v>ABHI</c:v>
-                </c:pt>
-                <c:pt idx="5">
-                  <c:v>Narayana</c:v>
-                </c:pt>
-                <c:pt idx="6">
-                  <c:v>Galaxy</c:v>
-                </c:pt>
-              </c:strCache>
-            </c:strRef>
-          </c:cat>
-          <c:val>
-            <c:numRef>
-              <c:f>Sheet1!$D$2:$D$8</c:f>
-              <c:numCache>
-                <c:formatCode>General</c:formatCode>
-                <c:ptCount val="7"/>
-                <c:pt idx="0">
-                  <c:v>0.08</c:v>
-                </c:pt>
-                <c:pt idx="1">
-                  <c:v>0.1937</c:v>
-                </c:pt>
-                <c:pt idx="2">
-                  <c:v>0</c:v>
-                </c:pt>
-                <c:pt idx="3">
-                  <c:v>0</c:v>
-                </c:pt>
-                <c:pt idx="4">
-                  <c:v>0.02</c:v>
-                </c:pt>
-                <c:pt idx="5">
-                  <c:v>0</c:v>
-                </c:pt>
-                <c:pt idx="6">
-                  <c:v>0</c:v>
-                </c:pt>
-              </c:numCache>
-            </c:numRef>
-          </c:val>
-        </c:ser>
-        <c:ser>
-          <c:idx val="3"/>
-          <c:order val="3"/>
-          <c:tx>
-            <c:strRef>
-              <c:f>Sheet1!$E$1</c:f>
-              <c:strCache>
-                <c:ptCount val="1"/>
-                <c:pt idx="0">
-                  <c:v>Rated below AA but above A</c:v>
-                </c:pt>
-              </c:strCache>
-            </c:strRef>
-          </c:tx>
-          <c:spPr>
-            <a:solidFill>
-              <a:srgbClr val="FFC000"/>
-            </a:solidFill>
-          </c:spPr>
-          <c:cat>
-            <c:strRef>
-              <c:f>Sheet1!$A$2:$A$8</c:f>
-              <c:strCache>
-                <c:ptCount val="7"/>
-                <c:pt idx="0">
-                  <c:v>NBHI</c:v>
-                </c:pt>
-                <c:pt idx="1">
-                  <c:v>STAR</c:v>
-                </c:pt>
-                <c:pt idx="2">
-                  <c:v>CARE</c:v>
-                </c:pt>
-                <c:pt idx="3">
-                  <c:v>CIGNA</c:v>
-                </c:pt>
-                <c:pt idx="4">
-                  <c:v>ABHI</c:v>
-                </c:pt>
-                <c:pt idx="5">
-                  <c:v>Narayana</c:v>
-                </c:pt>
-                <c:pt idx="6">
-                  <c:v>Galaxy</c:v>
-                </c:pt>
-              </c:strCache>
-            </c:strRef>
-          </c:cat>
-          <c:val>
-            <c:numRef>
-              <c:f>Sheet1!$E$2:$E$8</c:f>
-              <c:numCache>
-                <c:formatCode>General</c:formatCode>
-                <c:ptCount val="7"/>
-                <c:pt idx="0">
-                  <c:v>0</c:v>
-                </c:pt>
-                <c:pt idx="1">
-                  <c:v>0.0338</c:v>
-                </c:pt>
-                <c:pt idx="2">
-                  <c:v>0</c:v>
-                </c:pt>
-                <c:pt idx="3">
-                  <c:v>0</c:v>
-                </c:pt>
-                <c:pt idx="4">
-                  <c:v>0</c:v>
-                </c:pt>
-                <c:pt idx="5">
-                  <c:v>0</c:v>
-                </c:pt>
-                <c:pt idx="6">
-                  <c:v>0</c:v>
-                </c:pt>
-              </c:numCache>
-            </c:numRef>
-          </c:val>
-        </c:ser>
-        <c:ser>
-          <c:idx val="4"/>
-          <c:order val="4"/>
-          <c:tx>
-            <c:strRef>
-              <c:f>Sheet1!$F$1</c:f>
-              <c:strCache>
-                <c:ptCount val="1"/>
-                <c:pt idx="0">
-                  <c:v>Rated below A</c:v>
-                </c:pt>
-              </c:strCache>
-            </c:strRef>
-          </c:tx>
-          <c:spPr>
-            <a:solidFill>
-              <a:srgbClr val="7C3AED"/>
-            </a:solidFill>
-          </c:spPr>
-          <c:cat>
-            <c:strRef>
-              <c:f>Sheet1!$A$2:$A$8</c:f>
-              <c:strCache>
-                <c:ptCount val="7"/>
-                <c:pt idx="0">
-                  <c:v>NBHI</c:v>
-                </c:pt>
-                <c:pt idx="1">
-                  <c:v>STAR</c:v>
-                </c:pt>
-                <c:pt idx="2">
-                  <c:v>CARE</c:v>
-                </c:pt>
-                <c:pt idx="3">
-                  <c:v>CIGNA</c:v>
-                </c:pt>
-                <c:pt idx="4">
-                  <c:v>ABHI</c:v>
-                </c:pt>
-                <c:pt idx="5">
-                  <c:v>Narayana</c:v>
-                </c:pt>
-                <c:pt idx="6">
-                  <c:v>Galaxy</c:v>
-                </c:pt>
-              </c:strCache>
-            </c:strRef>
-          </c:cat>
-          <c:val>
-            <c:numRef>
-              <c:f>Sheet1!$F$2:$F$8</c:f>
-              <c:numCache>
-                <c:formatCode>General</c:formatCode>
-                <c:ptCount val="7"/>
-                <c:pt idx="0">
-                  <c:v>0</c:v>
-                </c:pt>
-                <c:pt idx="1">
-                  <c:v>0</c:v>
-                </c:pt>
-                <c:pt idx="2">
-                  <c:v>0</c:v>
-                </c:pt>
-                <c:pt idx="3">
-                  <c:v>0</c:v>
-                </c:pt>
-                <c:pt idx="4">
-                  <c:v>0</c:v>
-                </c:pt>
-                <c:pt idx="5">
-                  <c:v>0</c:v>
-                </c:pt>
-                <c:pt idx="6">
-                  <c:v>0</c:v>
+                  <c:v>-75.57</c:v>
                 </c:pt>
               </c:numCache>
             </c:numRef>
           </c:val>
         </c:ser>
         <c:dLbls>
-          <c:numFmt formatCode="0%" sourceLinked="0"/>
+          <c:numFmt formatCode="#,##0" sourceLinked="0"/>
           <c:txPr>
             <a:bodyPr/>
             <a:lstStyle/>
             <a:p>
               <a:pPr>
-                <a:defRPr sz="700"/>
+                <a:defRPr sz="800"/>
               </a:pPr>
             </a:p>
           </c:txPr>
@@ -10539,7 +9804,6 @@
           <c:showBubbleSize val="0"/>
           <c:showLeaderLines val="1"/>
         </c:dLbls>
-        <c:overlap val="100"/>
         <c:axId val="-2068027336"/>
         <c:axId val="-2113994440"/>
       </c:barChart>
@@ -10572,12 +9836,21 @@
       <c:valAx>
         <c:axId val="-2113994440"/>
         <c:scaling/>
-        <c:delete/>
+        <c:delete val="0"/>
         <c:axPos val="l"/>
         <c:majorGridlines/>
         <c:majorTickMark val="out"/>
         <c:minorTickMark val="none"/>
         <c:tickLblPos val="nextTo"/>
+        <c:txPr>
+          <a:bodyPr/>
+          <a:lstStyle/>
+          <a:p>
+            <a:pPr>
+              <a:defRPr sz="800"/>
+            </a:pPr>
+          </a:p>
+        </c:txPr>
         <c:crossAx val="-2068027336"/>
         <c:crosses val="autoZero"/>
       </c:valAx>
@@ -10590,7 +9863,7 @@
         <a:lstStyle/>
         <a:p>
           <a:pPr>
-            <a:defRPr sz="800"/>
+            <a:defRPr sz="900"/>
           </a:pPr>
         </a:p>
       </c:txPr>
@@ -10631,7 +9904,7 @@
               <c:strCache>
                 <c:ptCount val="1"/>
                 <c:pt idx="0">
-                  <c:v>Sovereign</c:v>
+                  <c:v>Corporate Bonds/Debentures</c:v>
                 </c:pt>
               </c:strCache>
             </c:strRef>
@@ -10677,25 +9950,25 @@
                 <c:formatCode>General</c:formatCode>
                 <c:ptCount val="7"/>
                 <c:pt idx="0">
-                  <c:v>0.31</c:v>
+                  <c:v>0.5694694866670886</c:v>
                 </c:pt>
                 <c:pt idx="1">
-                  <c:v>0.3752</c:v>
+                  <c:v>0.3686368576693841</c:v>
                 </c:pt>
                 <c:pt idx="2">
-                  <c:v>0</c:v>
+                  <c:v>0.2828959693670065</c:v>
                 </c:pt>
                 <c:pt idx="3">
-                  <c:v>0.43</c:v>
+                  <c:v>0.5142161841594013</c:v>
                 </c:pt>
                 <c:pt idx="4">
-                  <c:v>0.66</c:v>
+                  <c:v>0.46748425778504527</c:v>
                 </c:pt>
                 <c:pt idx="5">
-                  <c:v>1</c:v>
+                  <c:v>0.0</c:v>
                 </c:pt>
                 <c:pt idx="6">
-                  <c:v>0.7285</c:v>
+                  <c:v>0.18677831048686608</c:v>
                 </c:pt>
               </c:numCache>
             </c:numRef>
@@ -10710,7 +9983,7 @@
               <c:strCache>
                 <c:ptCount val="1"/>
                 <c:pt idx="0">
-                  <c:v>AAA rated</c:v>
+                  <c:v>Govt Bonds</c:v>
                 </c:pt>
               </c:strCache>
             </c:strRef>
@@ -10756,25 +10029,25 @@
                 <c:formatCode>General</c:formatCode>
                 <c:ptCount val="7"/>
                 <c:pt idx="0">
-                  <c:v>0.63</c:v>
+                  <c:v>0.3486106464359668</c:v>
                 </c:pt>
                 <c:pt idx="1">
-                  <c:v>0.394</c:v>
+                  <c:v>0.4209859282036258</c:v>
                 </c:pt>
                 <c:pt idx="2">
-                  <c:v>0</c:v>
+                  <c:v>0.5037514450602927</c:v>
                 </c:pt>
                 <c:pt idx="3">
-                  <c:v>0.57</c:v>
+                  <c:v>0.4351427071759181</c:v>
                 </c:pt>
                 <c:pt idx="4">
-                  <c:v>0.31</c:v>
+                  <c:v>0.3668201442976606</c:v>
                 </c:pt>
                 <c:pt idx="5">
-                  <c:v>0</c:v>
+                  <c:v>0.6952611553095815</c:v>
                 </c:pt>
                 <c:pt idx="6">
-                  <c:v>0.2608</c:v>
+                  <c:v>0.7857384023229117</c:v>
                 </c:pt>
               </c:numCache>
             </c:numRef>
@@ -10789,7 +10062,7 @@
               <c:strCache>
                 <c:ptCount val="1"/>
                 <c:pt idx="0">
-                  <c:v>AA or better</c:v>
+                  <c:v>Deposits</c:v>
                 </c:pt>
               </c:strCache>
             </c:strRef>
@@ -10835,25 +10108,25 @@
                 <c:formatCode>General</c:formatCode>
                 <c:ptCount val="7"/>
                 <c:pt idx="0">
-                  <c:v>0.06</c:v>
+                  <c:v>0.014467723413297646</c:v>
                 </c:pt>
                 <c:pt idx="1">
-                  <c:v>0.1922</c:v>
+                  <c:v>0.0</c:v>
                 </c:pt>
                 <c:pt idx="2">
-                  <c:v>0</c:v>
+                  <c:v>0.0</c:v>
                 </c:pt>
                 <c:pt idx="3">
-                  <c:v>0</c:v>
+                  <c:v>0.021813372960960878</c:v>
                 </c:pt>
                 <c:pt idx="4">
-                  <c:v>0.02</c:v>
+                  <c:v>0.07619949223288437</c:v>
                 </c:pt>
                 <c:pt idx="5">
-                  <c:v>0</c:v>
+                  <c:v>0.17762020062262193</c:v>
                 </c:pt>
                 <c:pt idx="6">
-                  <c:v>0</c:v>
+                  <c:v>0.0</c:v>
                 </c:pt>
               </c:numCache>
             </c:numRef>
@@ -10868,7 +10141,7 @@
               <c:strCache>
                 <c:ptCount val="1"/>
                 <c:pt idx="0">
-                  <c:v>Rated below AA but above A</c:v>
+                  <c:v>Equity/Invits/REIT</c:v>
                 </c:pt>
               </c:strCache>
             </c:strRef>
@@ -10914,25 +10187,25 @@
                 <c:formatCode>General</c:formatCode>
                 <c:ptCount val="7"/>
                 <c:pt idx="0">
-                  <c:v>0</c:v>
+                  <c:v>0.0016764474505158646</c:v>
                 </c:pt>
                 <c:pt idx="1">
-                  <c:v>0.0372</c:v>
+                  <c:v>0.08248918685969665</c:v>
                 </c:pt>
                 <c:pt idx="2">
-                  <c:v>0</c:v>
+                  <c:v>0.13585851431809148</c:v>
                 </c:pt>
                 <c:pt idx="3">
-                  <c:v>0</c:v>
+                  <c:v>0.0</c:v>
                 </c:pt>
                 <c:pt idx="4">
-                  <c:v>0.01</c:v>
+                  <c:v>0.0</c:v>
                 </c:pt>
                 <c:pt idx="5">
-                  <c:v>0</c:v>
+                  <c:v>0.0</c:v>
                 </c:pt>
                 <c:pt idx="6">
-                  <c:v>0</c:v>
+                  <c:v>0.0</c:v>
                 </c:pt>
               </c:numCache>
             </c:numRef>
@@ -10947,7 +10220,7 @@
               <c:strCache>
                 <c:ptCount val="1"/>
                 <c:pt idx="0">
-                  <c:v>Rated below A</c:v>
+                  <c:v>Mutual Funds</c:v>
                 </c:pt>
               </c:strCache>
             </c:strRef>
@@ -10993,25 +10266,25 @@
                 <c:formatCode>General</c:formatCode>
                 <c:ptCount val="7"/>
                 <c:pt idx="0">
-                  <c:v>0</c:v>
+                  <c:v>0.06577569603313108</c:v>
                 </c:pt>
                 <c:pt idx="1">
-                  <c:v>0.0014</c:v>
+                  <c:v>0.1278880272672935</c:v>
                 </c:pt>
                 <c:pt idx="2">
-                  <c:v>0</c:v>
+                  <c:v>0.07749407125460935</c:v>
                 </c:pt>
                 <c:pt idx="3">
-                  <c:v>0</c:v>
+                  <c:v>0.02882773570371986</c:v>
                 </c:pt>
                 <c:pt idx="4">
-                  <c:v>0</c:v>
+                  <c:v>0.08949610568440984</c:v>
                 </c:pt>
                 <c:pt idx="5">
-                  <c:v>0</c:v>
+                  <c:v>0.1271186440677966</c:v>
                 </c:pt>
                 <c:pt idx="6">
-                  <c:v>0</c:v>
+                  <c:v>0.027483287190222163</c:v>
                 </c:pt>
               </c:numCache>
             </c:numRef>
@@ -11128,7 +10401,7 @@
               <c:strCache>
                 <c:ptCount val="1"/>
                 <c:pt idx="0">
-                  <c:v>Up to 1 year</c:v>
+                  <c:v>Corporate Bonds/Debentures</c:v>
                 </c:pt>
               </c:strCache>
             </c:strRef>
@@ -11174,25 +10447,25 @@
                 <c:formatCode>General</c:formatCode>
                 <c:ptCount val="7"/>
                 <c:pt idx="0">
-                  <c:v>0.08</c:v>
+                  <c:v>0.5491447806000468</c:v>
                 </c:pt>
                 <c:pt idx="1">
-                  <c:v>0.1708</c:v>
+                  <c:v>0.44329257003062555</c:v>
                 </c:pt>
                 <c:pt idx="2">
-                  <c:v>0</c:v>
+                  <c:v>0.2510759799808495</c:v>
                 </c:pt>
                 <c:pt idx="3">
-                  <c:v>0.16</c:v>
+                  <c:v>0.4898508720541835</c:v>
                 </c:pt>
                 <c:pt idx="4">
-                  <c:v>0.11</c:v>
+                  <c:v>0.4413277661182617</c:v>
                 </c:pt>
                 <c:pt idx="5">
-                  <c:v>0</c:v>
+                  <c:v>0.0</c:v>
                 </c:pt>
                 <c:pt idx="6">
-                  <c:v>0.0313</c:v>
+                  <c:v>0.062384473197781884</c:v>
                 </c:pt>
               </c:numCache>
             </c:numRef>
@@ -11207,7 +10480,7 @@
               <c:strCache>
                 <c:ptCount val="1"/>
                 <c:pt idx="0">
-                  <c:v>More than 1 year and upto 3 years</c:v>
+                  <c:v>Govt Bonds</c:v>
                 </c:pt>
               </c:strCache>
             </c:strRef>
@@ -11253,25 +10526,25 @@
                 <c:formatCode>General</c:formatCode>
                 <c:ptCount val="7"/>
                 <c:pt idx="0">
-                  <c:v>0.24</c:v>
+                  <c:v>0.37094860594294343</c:v>
                 </c:pt>
                 <c:pt idx="1">
-                  <c:v>0.1614</c:v>
+                  <c:v>0.43291355933746734</c:v>
                 </c:pt>
                 <c:pt idx="2">
-                  <c:v>0</c:v>
+                  <c:v>0.5393843222806828</c:v>
                 </c:pt>
                 <c:pt idx="3">
-                  <c:v>0.36</c:v>
+                  <c:v>0.43524599430621075</c:v>
                 </c:pt>
                 <c:pt idx="4">
-                  <c:v>0.23</c:v>
+                  <c:v>0.44629569837239674</c:v>
                 </c:pt>
                 <c:pt idx="5">
-                  <c:v>0</c:v>
+                  <c:v>0.7906379334950764</c:v>
                 </c:pt>
                 <c:pt idx="6">
-                  <c:v>0.2927</c:v>
+                  <c:v>0.9240090367631957</c:v>
                 </c:pt>
               </c:numCache>
             </c:numRef>
@@ -11286,7 +10559,7 @@
               <c:strCache>
                 <c:ptCount val="1"/>
                 <c:pt idx="0">
-                  <c:v>More than 3 years and upto 7 years</c:v>
+                  <c:v>Deposits</c:v>
                 </c:pt>
               </c:strCache>
             </c:strRef>
@@ -11332,25 +10605,25 @@
                 <c:formatCode>General</c:formatCode>
                 <c:ptCount val="7"/>
                 <c:pt idx="0">
-                  <c:v>0.32</c:v>
+                  <c:v>0.035952470833558035</c:v>
                 </c:pt>
                 <c:pt idx="1">
-                  <c:v>0.5117</c:v>
+                  <c:v>0.0</c:v>
                 </c:pt>
                 <c:pt idx="2">
-                  <c:v>0</c:v>
+                  <c:v>0.0</c:v>
                 </c:pt>
                 <c:pt idx="3">
-                  <c:v>0.16</c:v>
+                  <c:v>0.03895209611609574</c:v>
                 </c:pt>
                 <c:pt idx="4">
-                  <c:v>0.18</c:v>
+                  <c:v>0.056760643996653794</c:v>
                 </c:pt>
                 <c:pt idx="5">
-                  <c:v>0.33</c:v>
+                  <c:v>0.13358070500927643</c:v>
                 </c:pt>
                 <c:pt idx="6">
-                  <c:v>0.4344</c:v>
+                  <c:v>0.0</c:v>
                 </c:pt>
               </c:numCache>
             </c:numRef>
@@ -11365,7 +10638,7 @@
               <c:strCache>
                 <c:ptCount val="1"/>
                 <c:pt idx="0">
-                  <c:v>More than 7 years and upto 10 years</c:v>
+                  <c:v>Equity/Invits/REIT</c:v>
                 </c:pt>
               </c:strCache>
             </c:strRef>
@@ -11411,25 +10684,25 @@
                 <c:formatCode>General</c:formatCode>
                 <c:ptCount val="7"/>
                 <c:pt idx="0">
-                  <c:v>0.22</c:v>
+                  <c:v>0.0017167304823023962</c:v>
                 </c:pt>
                 <c:pt idx="1">
-                  <c:v>0.1067</c:v>
+                  <c:v>0.007323280611176369</c:v>
                 </c:pt>
                 <c:pt idx="2">
-                  <c:v>0</c:v>
+                  <c:v>0.13598560753383415</c:v>
                 </c:pt>
                 <c:pt idx="3">
-                  <c:v>0.24</c:v>
+                  <c:v>0.0</c:v>
                 </c:pt>
                 <c:pt idx="4">
-                  <c:v>0.22</c:v>
+                  <c:v>0.0</c:v>
                 </c:pt>
                 <c:pt idx="5">
-                  <c:v>0.67</c:v>
+                  <c:v>0.0</c:v>
                 </c:pt>
                 <c:pt idx="6">
-                  <c:v>0.216</c:v>
+                  <c:v>0.0</c:v>
                 </c:pt>
               </c:numCache>
             </c:numRef>
@@ -11444,7 +10717,7 @@
               <c:strCache>
                 <c:ptCount val="1"/>
                 <c:pt idx="0">
-                  <c:v>Above 10 years</c:v>
+                  <c:v>Mutual Funds</c:v>
                 </c:pt>
               </c:strCache>
             </c:strRef>
@@ -11490,25 +10763,25 @@
                 <c:formatCode>General</c:formatCode>
                 <c:ptCount val="7"/>
                 <c:pt idx="0">
-                  <c:v>0.14</c:v>
+                  <c:v>0.0422374121411494</c:v>
                 </c:pt>
                 <c:pt idx="1">
-                  <c:v>0.0495</c:v>
+                  <c:v>0.11647059002073071</c:v>
                 </c:pt>
                 <c:pt idx="2">
-                  <c:v>0</c:v>
+                  <c:v>0.07355409020463363</c:v>
                 </c:pt>
                 <c:pt idx="3">
-                  <c:v>0.09</c:v>
+                  <c:v>0.035951037523510004</c:v>
                 </c:pt>
                 <c:pt idx="4">
-                  <c:v>0.2</c:v>
+                  <c:v>0.05561589151268768</c:v>
                 </c:pt>
                 <c:pt idx="5">
-                  <c:v>0</c:v>
+                  <c:v>0.07578136149564721</c:v>
                 </c:pt>
                 <c:pt idx="6">
-                  <c:v>0.0255</c:v>
+                  <c:v>0.013606490039022385</c:v>
                 </c:pt>
               </c:numCache>
             </c:numRef>
@@ -11625,7 +10898,7 @@
               <c:strCache>
                 <c:ptCount val="1"/>
                 <c:pt idx="0">
-                  <c:v>Up to 1 year</c:v>
+                  <c:v>Sovereign</c:v>
                 </c:pt>
               </c:strCache>
             </c:strRef>
@@ -11671,25 +10944,25 @@
                 <c:formatCode>General</c:formatCode>
                 <c:ptCount val="7"/>
                 <c:pt idx="0">
-                  <c:v>0.1</c:v>
+                  <c:v>0.32</c:v>
                 </c:pt>
                 <c:pt idx="1">
-                  <c:v>0.1267</c:v>
+                  <c:v>0.3589</c:v>
                 </c:pt>
                 <c:pt idx="2">
                   <c:v>0</c:v>
                 </c:pt>
                 <c:pt idx="3">
-                  <c:v>0.06</c:v>
+                  <c:v>0.38</c:v>
                 </c:pt>
                 <c:pt idx="4">
-                  <c:v>0.08</c:v>
+                  <c:v>0.61</c:v>
                 </c:pt>
                 <c:pt idx="5">
-                  <c:v>0.21</c:v>
+                  <c:v>1</c:v>
                 </c:pt>
                 <c:pt idx="6">
-                  <c:v>0.0107</c:v>
+                  <c:v>0.5957</c:v>
                 </c:pt>
               </c:numCache>
             </c:numRef>
@@ -11704,7 +10977,7 @@
               <c:strCache>
                 <c:ptCount val="1"/>
                 <c:pt idx="0">
-                  <c:v>More than 1 year and upto 3 years</c:v>
+                  <c:v>AAA rated</c:v>
                 </c:pt>
               </c:strCache>
             </c:strRef>
@@ -11750,25 +11023,25 @@
                 <c:formatCode>General</c:formatCode>
                 <c:ptCount val="7"/>
                 <c:pt idx="0">
-                  <c:v>0.2</c:v>
+                  <c:v>0.6</c:v>
                 </c:pt>
                 <c:pt idx="1">
-                  <c:v>0.1596</c:v>
+                  <c:v>0.4135</c:v>
                 </c:pt>
                 <c:pt idx="2">
                   <c:v>0</c:v>
                 </c:pt>
                 <c:pt idx="3">
-                  <c:v>0.34</c:v>
+                  <c:v>0.62</c:v>
                 </c:pt>
                 <c:pt idx="4">
-                  <c:v>0.22</c:v>
+                  <c:v>0.36</c:v>
                 </c:pt>
                 <c:pt idx="5">
                   <c:v>0</c:v>
                 </c:pt>
                 <c:pt idx="6">
-                  <c:v>0.1707</c:v>
+                  <c:v>0.3781</c:v>
                 </c:pt>
               </c:numCache>
             </c:numRef>
@@ -11783,7 +11056,7 @@
               <c:strCache>
                 <c:ptCount val="1"/>
                 <c:pt idx="0">
-                  <c:v>More than 3 years and upto 7 years</c:v>
+                  <c:v>AA or better</c:v>
                 </c:pt>
               </c:strCache>
             </c:strRef>
@@ -11829,25 +11102,25 @@
                 <c:formatCode>General</c:formatCode>
                 <c:ptCount val="7"/>
                 <c:pt idx="0">
-                  <c:v>0.4</c:v>
+                  <c:v>0.08</c:v>
                 </c:pt>
                 <c:pt idx="1">
-                  <c:v>0.5385</c:v>
+                  <c:v>0.1937</c:v>
                 </c:pt>
                 <c:pt idx="2">
                   <c:v>0</c:v>
                 </c:pt>
                 <c:pt idx="3">
-                  <c:v>0.4</c:v>
+                  <c:v>0</c:v>
                 </c:pt>
                 <c:pt idx="4">
-                  <c:v>0.35</c:v>
+                  <c:v>0.02</c:v>
                 </c:pt>
                 <c:pt idx="5">
-                  <c:v>0.29</c:v>
+                  <c:v>0</c:v>
                 </c:pt>
                 <c:pt idx="6">
-                  <c:v>0.6388</c:v>
+                  <c:v>0</c:v>
                 </c:pt>
               </c:numCache>
             </c:numRef>
@@ -11862,7 +11135,7 @@
               <c:strCache>
                 <c:ptCount val="1"/>
                 <c:pt idx="0">
-                  <c:v>More than 7 years and upto 10 years</c:v>
+                  <c:v>Rated below AA but above A</c:v>
                 </c:pt>
               </c:strCache>
             </c:strRef>
@@ -11908,25 +11181,25 @@
                 <c:formatCode>General</c:formatCode>
                 <c:ptCount val="7"/>
                 <c:pt idx="0">
-                  <c:v>0.2</c:v>
+                  <c:v>0</c:v>
                 </c:pt>
                 <c:pt idx="1">
-                  <c:v>0.1482</c:v>
+                  <c:v>0.0338</c:v>
                 </c:pt>
                 <c:pt idx="2">
                   <c:v>0</c:v>
                 </c:pt>
                 <c:pt idx="3">
-                  <c:v>0.14</c:v>
+                  <c:v>0</c:v>
                 </c:pt>
                 <c:pt idx="4">
-                  <c:v>0.15</c:v>
+                  <c:v>0</c:v>
                 </c:pt>
                 <c:pt idx="5">
-                  <c:v>0.5</c:v>
+                  <c:v>0</c:v>
                 </c:pt>
                 <c:pt idx="6">
-                  <c:v>0.1798</c:v>
+                  <c:v>0</c:v>
                 </c:pt>
               </c:numCache>
             </c:numRef>
@@ -11941,7 +11214,7 @@
               <c:strCache>
                 <c:ptCount val="1"/>
                 <c:pt idx="0">
-                  <c:v>Above 10 years</c:v>
+                  <c:v>Rated below A</c:v>
                 </c:pt>
               </c:strCache>
             </c:strRef>
@@ -11987,19 +11260,19 @@
                 <c:formatCode>General</c:formatCode>
                 <c:ptCount val="7"/>
                 <c:pt idx="0">
-                  <c:v>0.1</c:v>
+                  <c:v>0</c:v>
                 </c:pt>
                 <c:pt idx="1">
-                  <c:v>0.027</c:v>
+                  <c:v>0</c:v>
                 </c:pt>
                 <c:pt idx="2">
                   <c:v>0</c:v>
                 </c:pt>
                 <c:pt idx="3">
-                  <c:v>0.06</c:v>
+                  <c:v>0</c:v>
                 </c:pt>
                 <c:pt idx="4">
-                  <c:v>0.15</c:v>
+                  <c:v>0</c:v>
                 </c:pt>
                 <c:pt idx="5">
                   <c:v>0</c:v>
@@ -12112,7 +11385,7 @@
     <c:plotArea>
       <c:barChart>
         <c:barDir val="col"/>
-        <c:grouping val="clustered"/>
+        <c:grouping val="percentStacked"/>
         <c:ser>
           <c:idx val="0"/>
           <c:order val="0"/>
@@ -12122,14 +11395,14 @@
               <c:strCache>
                 <c:ptCount val="1"/>
                 <c:pt idx="0">
-                  <c:v>FY25_Q3</c:v>
+                  <c:v>Sovereign</c:v>
                 </c:pt>
               </c:strCache>
             </c:strRef>
           </c:tx>
           <c:spPr>
             <a:solidFill>
-              <a:srgbClr val="2E5495"/>
+              <a:srgbClr val="2E75B6"/>
             </a:solidFill>
           </c:spPr>
           <c:cat>
@@ -12168,25 +11441,25 @@
                 <c:formatCode>General</c:formatCode>
                 <c:ptCount val="7"/>
                 <c:pt idx="0">
-                  <c:v>4683.58</c:v>
+                  <c:v>0.31</c:v>
                 </c:pt>
                 <c:pt idx="1">
-                  <c:v>11603.13</c:v>
+                  <c:v>0.3752</c:v>
                 </c:pt>
                 <c:pt idx="2">
-                  <c:v>5781.79</c:v>
+                  <c:v>0</c:v>
                 </c:pt>
                 <c:pt idx="3">
-                  <c:v>1209.68</c:v>
+                  <c:v>0.43</c:v>
                 </c:pt>
                 <c:pt idx="4">
-                  <c:v>3218.57</c:v>
+                  <c:v>0.66</c:v>
                 </c:pt>
                 <c:pt idx="5">
-                  <c:v>0.65</c:v>
+                  <c:v>1</c:v>
                 </c:pt>
                 <c:pt idx="6">
-                  <c:v>2.38</c:v>
+                  <c:v>0.7285</c:v>
                 </c:pt>
               </c:numCache>
             </c:numRef>
@@ -12201,14 +11474,14 @@
               <c:strCache>
                 <c:ptCount val="1"/>
                 <c:pt idx="0">
-                  <c:v>FY26_Q3</c:v>
+                  <c:v>AAA rated</c:v>
                 </c:pt>
               </c:strCache>
             </c:strRef>
           </c:tx>
           <c:spPr>
             <a:solidFill>
-              <a:srgbClr val="A6A6A6"/>
+              <a:srgbClr val="ED7D31"/>
             </a:solidFill>
           </c:spPr>
           <c:cat>
@@ -12247,38 +11520,275 @@
                 <c:formatCode>General</c:formatCode>
                 <c:ptCount val="7"/>
                 <c:pt idx="0">
-                  <c:v>5706.25</c:v>
+                  <c:v>0.63</c:v>
                 </c:pt>
                 <c:pt idx="1">
-                  <c:v>12638.21</c:v>
+                  <c:v>0.394</c:v>
                 </c:pt>
                 <c:pt idx="2">
-                  <c:v>6609.78</c:v>
+                  <c:v>0</c:v>
                 </c:pt>
                 <c:pt idx="3">
-                  <c:v>1545.42</c:v>
+                  <c:v>0.57</c:v>
                 </c:pt>
                 <c:pt idx="4">
-                  <c:v>4418.17</c:v>
+                  <c:v>0.31</c:v>
                 </c:pt>
                 <c:pt idx="5">
-                  <c:v>23.95</c:v>
+                  <c:v>0</c:v>
                 </c:pt>
                 <c:pt idx="6">
-                  <c:v>75.9</c:v>
+                  <c:v>0.2608</c:v>
+                </c:pt>
+              </c:numCache>
+            </c:numRef>
+          </c:val>
+        </c:ser>
+        <c:ser>
+          <c:idx val="2"/>
+          <c:order val="2"/>
+          <c:tx>
+            <c:strRef>
+              <c:f>Sheet1!$D$1</c:f>
+              <c:strCache>
+                <c:ptCount val="1"/>
+                <c:pt idx="0">
+                  <c:v>AA or better</c:v>
+                </c:pt>
+              </c:strCache>
+            </c:strRef>
+          </c:tx>
+          <c:spPr>
+            <a:solidFill>
+              <a:srgbClr val="70AD47"/>
+            </a:solidFill>
+          </c:spPr>
+          <c:cat>
+            <c:strRef>
+              <c:f>Sheet1!$A$2:$A$8</c:f>
+              <c:strCache>
+                <c:ptCount val="7"/>
+                <c:pt idx="0">
+                  <c:v>NBHI</c:v>
+                </c:pt>
+                <c:pt idx="1">
+                  <c:v>STAR</c:v>
+                </c:pt>
+                <c:pt idx="2">
+                  <c:v>CARE</c:v>
+                </c:pt>
+                <c:pt idx="3">
+                  <c:v>CIGNA</c:v>
+                </c:pt>
+                <c:pt idx="4">
+                  <c:v>ABHI</c:v>
+                </c:pt>
+                <c:pt idx="5">
+                  <c:v>Narayana</c:v>
+                </c:pt>
+                <c:pt idx="6">
+                  <c:v>Galaxy</c:v>
+                </c:pt>
+              </c:strCache>
+            </c:strRef>
+          </c:cat>
+          <c:val>
+            <c:numRef>
+              <c:f>Sheet1!$D$2:$D$8</c:f>
+              <c:numCache>
+                <c:formatCode>General</c:formatCode>
+                <c:ptCount val="7"/>
+                <c:pt idx="0">
+                  <c:v>0.06</c:v>
+                </c:pt>
+                <c:pt idx="1">
+                  <c:v>0.1922</c:v>
+                </c:pt>
+                <c:pt idx="2">
+                  <c:v>0</c:v>
+                </c:pt>
+                <c:pt idx="3">
+                  <c:v>0</c:v>
+                </c:pt>
+                <c:pt idx="4">
+                  <c:v>0.02</c:v>
+                </c:pt>
+                <c:pt idx="5">
+                  <c:v>0</c:v>
+                </c:pt>
+                <c:pt idx="6">
+                  <c:v>0</c:v>
+                </c:pt>
+              </c:numCache>
+            </c:numRef>
+          </c:val>
+        </c:ser>
+        <c:ser>
+          <c:idx val="3"/>
+          <c:order val="3"/>
+          <c:tx>
+            <c:strRef>
+              <c:f>Sheet1!$E$1</c:f>
+              <c:strCache>
+                <c:ptCount val="1"/>
+                <c:pt idx="0">
+                  <c:v>Rated below AA but above A</c:v>
+                </c:pt>
+              </c:strCache>
+            </c:strRef>
+          </c:tx>
+          <c:spPr>
+            <a:solidFill>
+              <a:srgbClr val="FFC000"/>
+            </a:solidFill>
+          </c:spPr>
+          <c:cat>
+            <c:strRef>
+              <c:f>Sheet1!$A$2:$A$8</c:f>
+              <c:strCache>
+                <c:ptCount val="7"/>
+                <c:pt idx="0">
+                  <c:v>NBHI</c:v>
+                </c:pt>
+                <c:pt idx="1">
+                  <c:v>STAR</c:v>
+                </c:pt>
+                <c:pt idx="2">
+                  <c:v>CARE</c:v>
+                </c:pt>
+                <c:pt idx="3">
+                  <c:v>CIGNA</c:v>
+                </c:pt>
+                <c:pt idx="4">
+                  <c:v>ABHI</c:v>
+                </c:pt>
+                <c:pt idx="5">
+                  <c:v>Narayana</c:v>
+                </c:pt>
+                <c:pt idx="6">
+                  <c:v>Galaxy</c:v>
+                </c:pt>
+              </c:strCache>
+            </c:strRef>
+          </c:cat>
+          <c:val>
+            <c:numRef>
+              <c:f>Sheet1!$E$2:$E$8</c:f>
+              <c:numCache>
+                <c:formatCode>General</c:formatCode>
+                <c:ptCount val="7"/>
+                <c:pt idx="0">
+                  <c:v>0</c:v>
+                </c:pt>
+                <c:pt idx="1">
+                  <c:v>0.0372</c:v>
+                </c:pt>
+                <c:pt idx="2">
+                  <c:v>0</c:v>
+                </c:pt>
+                <c:pt idx="3">
+                  <c:v>0</c:v>
+                </c:pt>
+                <c:pt idx="4">
+                  <c:v>0.01</c:v>
+                </c:pt>
+                <c:pt idx="5">
+                  <c:v>0</c:v>
+                </c:pt>
+                <c:pt idx="6">
+                  <c:v>0</c:v>
+                </c:pt>
+              </c:numCache>
+            </c:numRef>
+          </c:val>
+        </c:ser>
+        <c:ser>
+          <c:idx val="4"/>
+          <c:order val="4"/>
+          <c:tx>
+            <c:strRef>
+              <c:f>Sheet1!$F$1</c:f>
+              <c:strCache>
+                <c:ptCount val="1"/>
+                <c:pt idx="0">
+                  <c:v>Rated below A</c:v>
+                </c:pt>
+              </c:strCache>
+            </c:strRef>
+          </c:tx>
+          <c:spPr>
+            <a:solidFill>
+              <a:srgbClr val="7C3AED"/>
+            </a:solidFill>
+          </c:spPr>
+          <c:cat>
+            <c:strRef>
+              <c:f>Sheet1!$A$2:$A$8</c:f>
+              <c:strCache>
+                <c:ptCount val="7"/>
+                <c:pt idx="0">
+                  <c:v>NBHI</c:v>
+                </c:pt>
+                <c:pt idx="1">
+                  <c:v>STAR</c:v>
+                </c:pt>
+                <c:pt idx="2">
+                  <c:v>CARE</c:v>
+                </c:pt>
+                <c:pt idx="3">
+                  <c:v>CIGNA</c:v>
+                </c:pt>
+                <c:pt idx="4">
+                  <c:v>ABHI</c:v>
+                </c:pt>
+                <c:pt idx="5">
+                  <c:v>Narayana</c:v>
+                </c:pt>
+                <c:pt idx="6">
+                  <c:v>Galaxy</c:v>
+                </c:pt>
+              </c:strCache>
+            </c:strRef>
+          </c:cat>
+          <c:val>
+            <c:numRef>
+              <c:f>Sheet1!$F$2:$F$8</c:f>
+              <c:numCache>
+                <c:formatCode>General</c:formatCode>
+                <c:ptCount val="7"/>
+                <c:pt idx="0">
+                  <c:v>0</c:v>
+                </c:pt>
+                <c:pt idx="1">
+                  <c:v>0.0014</c:v>
+                </c:pt>
+                <c:pt idx="2">
+                  <c:v>0</c:v>
+                </c:pt>
+                <c:pt idx="3">
+                  <c:v>0</c:v>
+                </c:pt>
+                <c:pt idx="4">
+                  <c:v>0</c:v>
+                </c:pt>
+                <c:pt idx="5">
+                  <c:v>0</c:v>
+                </c:pt>
+                <c:pt idx="6">
+                  <c:v>0</c:v>
                 </c:pt>
               </c:numCache>
             </c:numRef>
           </c:val>
         </c:ser>
         <c:dLbls>
-          <c:numFmt formatCode="#,##0" sourceLinked="0"/>
+          <c:numFmt formatCode="0%" sourceLinked="0"/>
           <c:txPr>
             <a:bodyPr/>
             <a:lstStyle/>
             <a:p>
               <a:pPr>
-                <a:defRPr sz="800"/>
+                <a:defRPr sz="700"/>
               </a:pPr>
             </a:p>
           </c:txPr>
@@ -12290,6 +11800,7 @@
           <c:showBubbleSize val="0"/>
           <c:showLeaderLines val="1"/>
         </c:dLbls>
+        <c:overlap val="100"/>
         <c:axId val="-2068027336"/>
         <c:axId val="-2113994440"/>
       </c:barChart>
@@ -12322,21 +11833,12 @@
       <c:valAx>
         <c:axId val="-2113994440"/>
         <c:scaling/>
-        <c:delete val="0"/>
+        <c:delete/>
         <c:axPos val="l"/>
         <c:majorGridlines/>
         <c:majorTickMark val="out"/>
         <c:minorTickMark val="none"/>
         <c:tickLblPos val="nextTo"/>
-        <c:txPr>
-          <a:bodyPr/>
-          <a:lstStyle/>
-          <a:p>
-            <a:pPr>
-              <a:defRPr sz="800"/>
-            </a:pPr>
-          </a:p>
-        </c:txPr>
         <c:crossAx val="-2068027336"/>
         <c:crosses val="autoZero"/>
       </c:valAx>
@@ -12349,7 +11851,7 @@
         <a:lstStyle/>
         <a:p>
           <a:pPr>
-            <a:defRPr sz="900"/>
+            <a:defRPr sz="800"/>
           </a:pPr>
         </a:p>
       </c:txPr>
@@ -12380,7 +11882,7 @@
     <c:plotArea>
       <c:barChart>
         <c:barDir val="col"/>
-        <c:grouping val="clustered"/>
+        <c:grouping val="percentStacked"/>
         <c:ser>
           <c:idx val="0"/>
           <c:order val="0"/>
@@ -12390,14 +11892,14 @@
               <c:strCache>
                 <c:ptCount val="1"/>
                 <c:pt idx="0">
-                  <c:v>FY25_Q3</c:v>
+                  <c:v>Up to 1 year</c:v>
                 </c:pt>
               </c:strCache>
             </c:strRef>
           </c:tx>
           <c:spPr>
             <a:solidFill>
-              <a:srgbClr val="2E5495"/>
+              <a:srgbClr val="2E75B6"/>
             </a:solidFill>
           </c:spPr>
           <c:cat>
@@ -12436,25 +11938,25 @@
                 <c:formatCode>General</c:formatCode>
                 <c:ptCount val="7"/>
                 <c:pt idx="0">
-                  <c:v>7.44</c:v>
+                  <c:v>0.08</c:v>
                 </c:pt>
                 <c:pt idx="1">
-                  <c:v>861.92</c:v>
+                  <c:v>0.1708</c:v>
                 </c:pt>
                 <c:pt idx="2">
-                  <c:v>14.49</c:v>
+                  <c:v>0</c:v>
                 </c:pt>
                 <c:pt idx="3">
-                  <c:v>-215.08</c:v>
+                  <c:v>0.16</c:v>
                 </c:pt>
                 <c:pt idx="4">
-                  <c:v>-199.11</c:v>
+                  <c:v>0.11</c:v>
                 </c:pt>
                 <c:pt idx="5">
-                  <c:v>-3.1</c:v>
+                  <c:v>0</c:v>
                 </c:pt>
                 <c:pt idx="6">
-                  <c:v>-30.99</c:v>
+                  <c:v>0.0313</c:v>
                 </c:pt>
               </c:numCache>
             </c:numRef>
@@ -12469,14 +11971,14 @@
               <c:strCache>
                 <c:ptCount val="1"/>
                 <c:pt idx="0">
-                  <c:v>FY26_Q3</c:v>
+                  <c:v>More than 1 year and upto 3 years</c:v>
                 </c:pt>
               </c:strCache>
             </c:strRef>
           </c:tx>
           <c:spPr>
             <a:solidFill>
-              <a:srgbClr val="A6A6A6"/>
+              <a:srgbClr val="ED7D31"/>
             </a:solidFill>
           </c:spPr>
           <c:cat>
@@ -12515,38 +12017,275 @@
                 <c:formatCode>General</c:formatCode>
                 <c:ptCount val="7"/>
                 <c:pt idx="0">
-                  <c:v>-214.35</c:v>
+                  <c:v>0.24</c:v>
                 </c:pt>
                 <c:pt idx="1">
-                  <c:v>603.12</c:v>
+                  <c:v>0.1614</c:v>
                 </c:pt>
                 <c:pt idx="2">
-                  <c:v>-89.33</c:v>
+                  <c:v>0</c:v>
                 </c:pt>
                 <c:pt idx="3">
-                  <c:v>-444.71</c:v>
+                  <c:v>0.36</c:v>
                 </c:pt>
                 <c:pt idx="4">
-                  <c:v>-179.62</c:v>
+                  <c:v>0.23</c:v>
                 </c:pt>
                 <c:pt idx="5">
-                  <c:v>-3.17</c:v>
+                  <c:v>0</c:v>
                 </c:pt>
                 <c:pt idx="6">
-                  <c:v>-75.57</c:v>
+                  <c:v>0.2927</c:v>
+                </c:pt>
+              </c:numCache>
+            </c:numRef>
+          </c:val>
+        </c:ser>
+        <c:ser>
+          <c:idx val="2"/>
+          <c:order val="2"/>
+          <c:tx>
+            <c:strRef>
+              <c:f>Sheet1!$D$1</c:f>
+              <c:strCache>
+                <c:ptCount val="1"/>
+                <c:pt idx="0">
+                  <c:v>More than 3 years and upto 7 years</c:v>
+                </c:pt>
+              </c:strCache>
+            </c:strRef>
+          </c:tx>
+          <c:spPr>
+            <a:solidFill>
+              <a:srgbClr val="70AD47"/>
+            </a:solidFill>
+          </c:spPr>
+          <c:cat>
+            <c:strRef>
+              <c:f>Sheet1!$A$2:$A$8</c:f>
+              <c:strCache>
+                <c:ptCount val="7"/>
+                <c:pt idx="0">
+                  <c:v>NBHI</c:v>
+                </c:pt>
+                <c:pt idx="1">
+                  <c:v>STAR</c:v>
+                </c:pt>
+                <c:pt idx="2">
+                  <c:v>CARE</c:v>
+                </c:pt>
+                <c:pt idx="3">
+                  <c:v>CIGNA</c:v>
+                </c:pt>
+                <c:pt idx="4">
+                  <c:v>ABHI</c:v>
+                </c:pt>
+                <c:pt idx="5">
+                  <c:v>Narayana</c:v>
+                </c:pt>
+                <c:pt idx="6">
+                  <c:v>Galaxy</c:v>
+                </c:pt>
+              </c:strCache>
+            </c:strRef>
+          </c:cat>
+          <c:val>
+            <c:numRef>
+              <c:f>Sheet1!$D$2:$D$8</c:f>
+              <c:numCache>
+                <c:formatCode>General</c:formatCode>
+                <c:ptCount val="7"/>
+                <c:pt idx="0">
+                  <c:v>0.32</c:v>
+                </c:pt>
+                <c:pt idx="1">
+                  <c:v>0.5117</c:v>
+                </c:pt>
+                <c:pt idx="2">
+                  <c:v>0</c:v>
+                </c:pt>
+                <c:pt idx="3">
+                  <c:v>0.16</c:v>
+                </c:pt>
+                <c:pt idx="4">
+                  <c:v>0.18</c:v>
+                </c:pt>
+                <c:pt idx="5">
+                  <c:v>0.33</c:v>
+                </c:pt>
+                <c:pt idx="6">
+                  <c:v>0.4344</c:v>
+                </c:pt>
+              </c:numCache>
+            </c:numRef>
+          </c:val>
+        </c:ser>
+        <c:ser>
+          <c:idx val="3"/>
+          <c:order val="3"/>
+          <c:tx>
+            <c:strRef>
+              <c:f>Sheet1!$E$1</c:f>
+              <c:strCache>
+                <c:ptCount val="1"/>
+                <c:pt idx="0">
+                  <c:v>More than 7 years and upto 10 years</c:v>
+                </c:pt>
+              </c:strCache>
+            </c:strRef>
+          </c:tx>
+          <c:spPr>
+            <a:solidFill>
+              <a:srgbClr val="FFC000"/>
+            </a:solidFill>
+          </c:spPr>
+          <c:cat>
+            <c:strRef>
+              <c:f>Sheet1!$A$2:$A$8</c:f>
+              <c:strCache>
+                <c:ptCount val="7"/>
+                <c:pt idx="0">
+                  <c:v>NBHI</c:v>
+                </c:pt>
+                <c:pt idx="1">
+                  <c:v>STAR</c:v>
+                </c:pt>
+                <c:pt idx="2">
+                  <c:v>CARE</c:v>
+                </c:pt>
+                <c:pt idx="3">
+                  <c:v>CIGNA</c:v>
+                </c:pt>
+                <c:pt idx="4">
+                  <c:v>ABHI</c:v>
+                </c:pt>
+                <c:pt idx="5">
+                  <c:v>Narayana</c:v>
+                </c:pt>
+                <c:pt idx="6">
+                  <c:v>Galaxy</c:v>
+                </c:pt>
+              </c:strCache>
+            </c:strRef>
+          </c:cat>
+          <c:val>
+            <c:numRef>
+              <c:f>Sheet1!$E$2:$E$8</c:f>
+              <c:numCache>
+                <c:formatCode>General</c:formatCode>
+                <c:ptCount val="7"/>
+                <c:pt idx="0">
+                  <c:v>0.22</c:v>
+                </c:pt>
+                <c:pt idx="1">
+                  <c:v>0.1067</c:v>
+                </c:pt>
+                <c:pt idx="2">
+                  <c:v>0</c:v>
+                </c:pt>
+                <c:pt idx="3">
+                  <c:v>0.24</c:v>
+                </c:pt>
+                <c:pt idx="4">
+                  <c:v>0.22</c:v>
+                </c:pt>
+                <c:pt idx="5">
+                  <c:v>0</c:v>
+                </c:pt>
+                <c:pt idx="6">
+                  <c:v>0.216</c:v>
+                </c:pt>
+              </c:numCache>
+            </c:numRef>
+          </c:val>
+        </c:ser>
+        <c:ser>
+          <c:idx val="4"/>
+          <c:order val="4"/>
+          <c:tx>
+            <c:strRef>
+              <c:f>Sheet1!$F$1</c:f>
+              <c:strCache>
+                <c:ptCount val="1"/>
+                <c:pt idx="0">
+                  <c:v>Above 10 years</c:v>
+                </c:pt>
+              </c:strCache>
+            </c:strRef>
+          </c:tx>
+          <c:spPr>
+            <a:solidFill>
+              <a:srgbClr val="7C3AED"/>
+            </a:solidFill>
+          </c:spPr>
+          <c:cat>
+            <c:strRef>
+              <c:f>Sheet1!$A$2:$A$8</c:f>
+              <c:strCache>
+                <c:ptCount val="7"/>
+                <c:pt idx="0">
+                  <c:v>NBHI</c:v>
+                </c:pt>
+                <c:pt idx="1">
+                  <c:v>STAR</c:v>
+                </c:pt>
+                <c:pt idx="2">
+                  <c:v>CARE</c:v>
+                </c:pt>
+                <c:pt idx="3">
+                  <c:v>CIGNA</c:v>
+                </c:pt>
+                <c:pt idx="4">
+                  <c:v>ABHI</c:v>
+                </c:pt>
+                <c:pt idx="5">
+                  <c:v>Narayana</c:v>
+                </c:pt>
+                <c:pt idx="6">
+                  <c:v>Galaxy</c:v>
+                </c:pt>
+              </c:strCache>
+            </c:strRef>
+          </c:cat>
+          <c:val>
+            <c:numRef>
+              <c:f>Sheet1!$F$2:$F$8</c:f>
+              <c:numCache>
+                <c:formatCode>General</c:formatCode>
+                <c:ptCount val="7"/>
+                <c:pt idx="0">
+                  <c:v>0.14</c:v>
+                </c:pt>
+                <c:pt idx="1">
+                  <c:v>0.0495</c:v>
+                </c:pt>
+                <c:pt idx="2">
+                  <c:v>0</c:v>
+                </c:pt>
+                <c:pt idx="3">
+                  <c:v>0.09</c:v>
+                </c:pt>
+                <c:pt idx="4">
+                  <c:v>0.2</c:v>
+                </c:pt>
+                <c:pt idx="5">
+                  <c:v>0.67</c:v>
+                </c:pt>
+                <c:pt idx="6">
+                  <c:v>0.0255</c:v>
                 </c:pt>
               </c:numCache>
             </c:numRef>
           </c:val>
         </c:ser>
         <c:dLbls>
-          <c:numFmt formatCode="#,##0" sourceLinked="0"/>
+          <c:numFmt formatCode="0%" sourceLinked="0"/>
           <c:txPr>
             <a:bodyPr/>
             <a:lstStyle/>
             <a:p>
               <a:pPr>
-                <a:defRPr sz="800"/>
+                <a:defRPr sz="700"/>
               </a:pPr>
             </a:p>
           </c:txPr>
@@ -12558,6 +12297,7 @@
           <c:showBubbleSize val="0"/>
           <c:showLeaderLines val="1"/>
         </c:dLbls>
+        <c:overlap val="100"/>
         <c:axId val="-2068027336"/>
         <c:axId val="-2113994440"/>
       </c:barChart>
@@ -12590,21 +12330,12 @@
       <c:valAx>
         <c:axId val="-2113994440"/>
         <c:scaling/>
-        <c:delete val="0"/>
+        <c:delete/>
         <c:axPos val="l"/>
         <c:majorGridlines/>
         <c:majorTickMark val="out"/>
         <c:minorTickMark val="none"/>
         <c:tickLblPos val="nextTo"/>
-        <c:txPr>
-          <a:bodyPr/>
-          <a:lstStyle/>
-          <a:p>
-            <a:pPr>
-              <a:defRPr sz="800"/>
-            </a:pPr>
-          </a:p>
-        </c:txPr>
         <c:crossAx val="-2068027336"/>
         <c:crosses val="autoZero"/>
       </c:valAx>
@@ -12617,7 +12348,7 @@
         <a:lstStyle/>
         <a:p>
           <a:pPr>
-            <a:defRPr sz="900"/>
+            <a:defRPr sz="800"/>
           </a:pPr>
         </a:p>
       </c:txPr>
@@ -12648,7 +12379,7 @@
     <c:plotArea>
       <c:barChart>
         <c:barDir val="col"/>
-        <c:grouping val="clustered"/>
+        <c:grouping val="percentStacked"/>
         <c:ser>
           <c:idx val="0"/>
           <c:order val="0"/>
@@ -12658,14 +12389,14 @@
               <c:strCache>
                 <c:ptCount val="1"/>
                 <c:pt idx="0">
-                  <c:v>FY25_Q3</c:v>
+                  <c:v>Up to 1 year</c:v>
                 </c:pt>
               </c:strCache>
             </c:strRef>
           </c:tx>
           <c:spPr>
             <a:solidFill>
-              <a:srgbClr val="2E5495"/>
+              <a:srgbClr val="2E75B6"/>
             </a:solidFill>
           </c:spPr>
           <c:cat>
@@ -12704,25 +12435,25 @@
                 <c:formatCode>General</c:formatCode>
                 <c:ptCount val="7"/>
                 <c:pt idx="0">
-                  <c:v>1.0504</c:v>
+                  <c:v>0.1</c:v>
                 </c:pt>
                 <c:pt idx="1">
-                  <c:v>1.0181</c:v>
+                  <c:v>0.1267</c:v>
                 </c:pt>
                 <c:pt idx="2">
-                  <c:v>1.05</c:v>
+                  <c:v>0</c:v>
                 </c:pt>
                 <c:pt idx="3">
-                  <c:v>1.26</c:v>
+                  <c:v>0.06</c:v>
                 </c:pt>
                 <c:pt idx="4">
-                  <c:v>1.13</c:v>
+                  <c:v>0.08</c:v>
                 </c:pt>
                 <c:pt idx="5">
-                  <c:v>9.13</c:v>
+                  <c:v>0.21</c:v>
                 </c:pt>
                 <c:pt idx="6">
-                  <c:v>21.4474</c:v>
+                  <c:v>0.0107</c:v>
                 </c:pt>
               </c:numCache>
             </c:numRef>
@@ -12737,14 +12468,14 @@
               <c:strCache>
                 <c:ptCount val="1"/>
                 <c:pt idx="0">
-                  <c:v>FY26_Q3</c:v>
+                  <c:v>More than 1 year and upto 3 years</c:v>
                 </c:pt>
               </c:strCache>
             </c:strRef>
           </c:tx>
           <c:spPr>
             <a:solidFill>
-              <a:srgbClr val="A6A6A6"/>
+              <a:srgbClr val="ED7D31"/>
             </a:solidFill>
           </c:spPr>
           <c:cat>
@@ -12783,38 +12514,275 @@
                 <c:formatCode>General</c:formatCode>
                 <c:ptCount val="7"/>
                 <c:pt idx="0">
-                  <c:v>1.1188</c:v>
+                  <c:v>0.2</c:v>
                 </c:pt>
                 <c:pt idx="1">
-                  <c:v>1.0268</c:v>
+                  <c:v>0.1596</c:v>
                 </c:pt>
                 <c:pt idx="2">
-                  <c:v>1.1</c:v>
+                  <c:v>0</c:v>
                 </c:pt>
                 <c:pt idx="3">
-                  <c:v>1.33</c:v>
+                  <c:v>0.34</c:v>
                 </c:pt>
                 <c:pt idx="4">
-                  <c:v>1.11</c:v>
+                  <c:v>0.22</c:v>
                 </c:pt>
                 <c:pt idx="5">
-                  <c:v>1.66</c:v>
+                  <c:v>0</c:v>
                 </c:pt>
                 <c:pt idx="6">
-                  <c:v>1.9001</c:v>
+                  <c:v>0.1707</c:v>
+                </c:pt>
+              </c:numCache>
+            </c:numRef>
+          </c:val>
+        </c:ser>
+        <c:ser>
+          <c:idx val="2"/>
+          <c:order val="2"/>
+          <c:tx>
+            <c:strRef>
+              <c:f>Sheet1!$D$1</c:f>
+              <c:strCache>
+                <c:ptCount val="1"/>
+                <c:pt idx="0">
+                  <c:v>More than 3 years and upto 7 years</c:v>
+                </c:pt>
+              </c:strCache>
+            </c:strRef>
+          </c:tx>
+          <c:spPr>
+            <a:solidFill>
+              <a:srgbClr val="70AD47"/>
+            </a:solidFill>
+          </c:spPr>
+          <c:cat>
+            <c:strRef>
+              <c:f>Sheet1!$A$2:$A$8</c:f>
+              <c:strCache>
+                <c:ptCount val="7"/>
+                <c:pt idx="0">
+                  <c:v>NBHI</c:v>
+                </c:pt>
+                <c:pt idx="1">
+                  <c:v>STAR</c:v>
+                </c:pt>
+                <c:pt idx="2">
+                  <c:v>CARE</c:v>
+                </c:pt>
+                <c:pt idx="3">
+                  <c:v>CIGNA</c:v>
+                </c:pt>
+                <c:pt idx="4">
+                  <c:v>ABHI</c:v>
+                </c:pt>
+                <c:pt idx="5">
+                  <c:v>Narayana</c:v>
+                </c:pt>
+                <c:pt idx="6">
+                  <c:v>Galaxy</c:v>
+                </c:pt>
+              </c:strCache>
+            </c:strRef>
+          </c:cat>
+          <c:val>
+            <c:numRef>
+              <c:f>Sheet1!$D$2:$D$8</c:f>
+              <c:numCache>
+                <c:formatCode>General</c:formatCode>
+                <c:ptCount val="7"/>
+                <c:pt idx="0">
+                  <c:v>0.4</c:v>
+                </c:pt>
+                <c:pt idx="1">
+                  <c:v>0.5385</c:v>
+                </c:pt>
+                <c:pt idx="2">
+                  <c:v>0</c:v>
+                </c:pt>
+                <c:pt idx="3">
+                  <c:v>0.4</c:v>
+                </c:pt>
+                <c:pt idx="4">
+                  <c:v>0.35</c:v>
+                </c:pt>
+                <c:pt idx="5">
+                  <c:v>0.29</c:v>
+                </c:pt>
+                <c:pt idx="6">
+                  <c:v>0.6388</c:v>
+                </c:pt>
+              </c:numCache>
+            </c:numRef>
+          </c:val>
+        </c:ser>
+        <c:ser>
+          <c:idx val="3"/>
+          <c:order val="3"/>
+          <c:tx>
+            <c:strRef>
+              <c:f>Sheet1!$E$1</c:f>
+              <c:strCache>
+                <c:ptCount val="1"/>
+                <c:pt idx="0">
+                  <c:v>More than 7 years and upto 10 years</c:v>
+                </c:pt>
+              </c:strCache>
+            </c:strRef>
+          </c:tx>
+          <c:spPr>
+            <a:solidFill>
+              <a:srgbClr val="FFC000"/>
+            </a:solidFill>
+          </c:spPr>
+          <c:cat>
+            <c:strRef>
+              <c:f>Sheet1!$A$2:$A$8</c:f>
+              <c:strCache>
+                <c:ptCount val="7"/>
+                <c:pt idx="0">
+                  <c:v>NBHI</c:v>
+                </c:pt>
+                <c:pt idx="1">
+                  <c:v>STAR</c:v>
+                </c:pt>
+                <c:pt idx="2">
+                  <c:v>CARE</c:v>
+                </c:pt>
+                <c:pt idx="3">
+                  <c:v>CIGNA</c:v>
+                </c:pt>
+                <c:pt idx="4">
+                  <c:v>ABHI</c:v>
+                </c:pt>
+                <c:pt idx="5">
+                  <c:v>Narayana</c:v>
+                </c:pt>
+                <c:pt idx="6">
+                  <c:v>Galaxy</c:v>
+                </c:pt>
+              </c:strCache>
+            </c:strRef>
+          </c:cat>
+          <c:val>
+            <c:numRef>
+              <c:f>Sheet1!$E$2:$E$8</c:f>
+              <c:numCache>
+                <c:formatCode>General</c:formatCode>
+                <c:ptCount val="7"/>
+                <c:pt idx="0">
+                  <c:v>0.2</c:v>
+                </c:pt>
+                <c:pt idx="1">
+                  <c:v>0.1482</c:v>
+                </c:pt>
+                <c:pt idx="2">
+                  <c:v>0</c:v>
+                </c:pt>
+                <c:pt idx="3">
+                  <c:v>0.14</c:v>
+                </c:pt>
+                <c:pt idx="4">
+                  <c:v>0.15</c:v>
+                </c:pt>
+                <c:pt idx="5">
+                  <c:v>0</c:v>
+                </c:pt>
+                <c:pt idx="6">
+                  <c:v>0.1798</c:v>
+                </c:pt>
+              </c:numCache>
+            </c:numRef>
+          </c:val>
+        </c:ser>
+        <c:ser>
+          <c:idx val="4"/>
+          <c:order val="4"/>
+          <c:tx>
+            <c:strRef>
+              <c:f>Sheet1!$F$1</c:f>
+              <c:strCache>
+                <c:ptCount val="1"/>
+                <c:pt idx="0">
+                  <c:v>Above 10 years</c:v>
+                </c:pt>
+              </c:strCache>
+            </c:strRef>
+          </c:tx>
+          <c:spPr>
+            <a:solidFill>
+              <a:srgbClr val="7C3AED"/>
+            </a:solidFill>
+          </c:spPr>
+          <c:cat>
+            <c:strRef>
+              <c:f>Sheet1!$A$2:$A$8</c:f>
+              <c:strCache>
+                <c:ptCount val="7"/>
+                <c:pt idx="0">
+                  <c:v>NBHI</c:v>
+                </c:pt>
+                <c:pt idx="1">
+                  <c:v>STAR</c:v>
+                </c:pt>
+                <c:pt idx="2">
+                  <c:v>CARE</c:v>
+                </c:pt>
+                <c:pt idx="3">
+                  <c:v>CIGNA</c:v>
+                </c:pt>
+                <c:pt idx="4">
+                  <c:v>ABHI</c:v>
+                </c:pt>
+                <c:pt idx="5">
+                  <c:v>Narayana</c:v>
+                </c:pt>
+                <c:pt idx="6">
+                  <c:v>Galaxy</c:v>
+                </c:pt>
+              </c:strCache>
+            </c:strRef>
+          </c:cat>
+          <c:val>
+            <c:numRef>
+              <c:f>Sheet1!$F$2:$F$8</c:f>
+              <c:numCache>
+                <c:formatCode>General</c:formatCode>
+                <c:ptCount val="7"/>
+                <c:pt idx="0">
+                  <c:v>0.1</c:v>
+                </c:pt>
+                <c:pt idx="1">
+                  <c:v>0.027</c:v>
+                </c:pt>
+                <c:pt idx="2">
+                  <c:v>0</c:v>
+                </c:pt>
+                <c:pt idx="3">
+                  <c:v>0.06</c:v>
+                </c:pt>
+                <c:pt idx="4">
+                  <c:v>0.15</c:v>
+                </c:pt>
+                <c:pt idx="5">
+                  <c:v>0.5</c:v>
+                </c:pt>
+                <c:pt idx="6">
+                  <c:v>0</c:v>
                 </c:pt>
               </c:numCache>
             </c:numRef>
           </c:val>
         </c:ser>
         <c:dLbls>
-          <c:numFmt formatCode="0.0%" sourceLinked="0"/>
+          <c:numFmt formatCode="0%" sourceLinked="0"/>
           <c:txPr>
             <a:bodyPr/>
             <a:lstStyle/>
             <a:p>
               <a:pPr>
-                <a:defRPr sz="800"/>
+                <a:defRPr sz="700"/>
               </a:pPr>
             </a:p>
           </c:txPr>
@@ -12826,6 +12794,7 @@
           <c:showBubbleSize val="0"/>
           <c:showLeaderLines val="1"/>
         </c:dLbls>
+        <c:overlap val="100"/>
         <c:axId val="-2068027336"/>
         <c:axId val="-2113994440"/>
       </c:barChart>
@@ -12858,21 +12827,12 @@
       <c:valAx>
         <c:axId val="-2113994440"/>
         <c:scaling/>
-        <c:delete val="0"/>
+        <c:delete/>
         <c:axPos val="l"/>
         <c:majorGridlines/>
         <c:majorTickMark val="out"/>
         <c:minorTickMark val="none"/>
         <c:tickLblPos val="nextTo"/>
-        <c:txPr>
-          <a:bodyPr/>
-          <a:lstStyle/>
-          <a:p>
-            <a:pPr>
-              <a:defRPr sz="800"/>
-            </a:pPr>
-          </a:p>
-        </c:txPr>
         <c:crossAx val="-2068027336"/>
         <c:crosses val="autoZero"/>
       </c:valAx>
@@ -12885,7 +12845,7 @@
         <a:lstStyle/>
         <a:p>
           <a:pPr>
-            <a:defRPr sz="900"/>
+            <a:defRPr sz="800"/>
           </a:pPr>
         </a:p>
       </c:txPr>
@@ -12972,25 +12932,25 @@
                 <c:formatCode>General</c:formatCode>
                 <c:ptCount val="7"/>
                 <c:pt idx="0">
-                  <c:v>0.6341</c:v>
+                  <c:v>4683.58</c:v>
                 </c:pt>
                 <c:pt idx="1">
-                  <c:v>0.7066</c:v>
+                  <c:v>11603.13</c:v>
                 </c:pt>
                 <c:pt idx="2">
-                  <c:v>0.67</c:v>
+                  <c:v>5781.79</c:v>
                 </c:pt>
                 <c:pt idx="3">
-                  <c:v>0.79</c:v>
+                  <c:v>1209.68</c:v>
                 </c:pt>
                 <c:pt idx="4">
-                  <c:v>0.77</c:v>
+                  <c:v>3218.57</c:v>
                 </c:pt>
                 <c:pt idx="5">
-                  <c:v>0.7</c:v>
+                  <c:v>0.65</c:v>
                 </c:pt>
                 <c:pt idx="6">
-                  <c:v>0.1051</c:v>
+                  <c:v>2.38</c:v>
                 </c:pt>
               </c:numCache>
             </c:numRef>
@@ -13051,32 +13011,32 @@
                 <c:formatCode>General</c:formatCode>
                 <c:ptCount val="7"/>
                 <c:pt idx="0">
-                  <c:v>0.7357</c:v>
+                  <c:v>5706.25</c:v>
                 </c:pt>
                 <c:pt idx="1">
-                  <c:v>0.6985</c:v>
+                  <c:v>12638.21</c:v>
                 </c:pt>
                 <c:pt idx="2">
-                  <c:v>0.74</c:v>
+                  <c:v>6609.78</c:v>
                 </c:pt>
                 <c:pt idx="3">
-                  <c:v>0.96</c:v>
+                  <c:v>1545.42</c:v>
                 </c:pt>
                 <c:pt idx="4">
-                  <c:v>0.83</c:v>
+                  <c:v>4418.17</c:v>
                 </c:pt>
                 <c:pt idx="5">
-                  <c:v>0.78</c:v>
+                  <c:v>23.95</c:v>
                 </c:pt>
                 <c:pt idx="6">
-                  <c:v>0.3286</c:v>
+                  <c:v>75.9</c:v>
                 </c:pt>
               </c:numCache>
             </c:numRef>
           </c:val>
         </c:ser>
         <c:dLbls>
-          <c:numFmt formatCode="0.0%" sourceLinked="0"/>
+          <c:numFmt formatCode="#,##0" sourceLinked="0"/>
           <c:txPr>
             <a:bodyPr/>
             <a:lstStyle/>
@@ -13240,25 +13200,25 @@
                 <c:formatCode>General</c:formatCode>
                 <c:ptCount val="7"/>
                 <c:pt idx="0">
-                  <c:v>0.5131</c:v>
+                  <c:v>7.44</c:v>
                 </c:pt>
                 <c:pt idx="1">
-                  <c:v>0.3115</c:v>
+                  <c:v>861.92</c:v>
                 </c:pt>
                 <c:pt idx="2">
-                  <c:v>0.38</c:v>
+                  <c:v>14.49</c:v>
                 </c:pt>
                 <c:pt idx="3">
-                  <c:v>0.47</c:v>
+                  <c:v>-215.08</c:v>
                 </c:pt>
                 <c:pt idx="4">
-                  <c:v>0.36</c:v>
+                  <c:v>-199.11</c:v>
                 </c:pt>
                 <c:pt idx="5">
-                  <c:v>9.15</c:v>
+                  <c:v>-3.1</c:v>
                 </c:pt>
                 <c:pt idx="6">
-                  <c:v>21.3424</c:v>
+                  <c:v>-30.99</c:v>
                 </c:pt>
               </c:numCache>
             </c:numRef>
@@ -13319,32 +13279,32 @@
                 <c:formatCode>General</c:formatCode>
                 <c:ptCount val="7"/>
                 <c:pt idx="0">
-                  <c:v>0.4602</c:v>
+                  <c:v>-214.35</c:v>
                 </c:pt>
                 <c:pt idx="1">
-                  <c:v>0.3283</c:v>
+                  <c:v>603.12</c:v>
                 </c:pt>
                 <c:pt idx="2">
-                  <c:v>0.36</c:v>
+                  <c:v>-89.33</c:v>
                 </c:pt>
                 <c:pt idx="3">
-                  <c:v>0.36</c:v>
+                  <c:v>-444.71</c:v>
                 </c:pt>
                 <c:pt idx="4">
-                  <c:v>0.28</c:v>
+                  <c:v>-179.62</c:v>
                 </c:pt>
                 <c:pt idx="5">
-                  <c:v>0.87</c:v>
+                  <c:v>-3.17</c:v>
                 </c:pt>
                 <c:pt idx="6">
-                  <c:v>1.5715</c:v>
+                  <c:v>-75.57</c:v>
                 </c:pt>
               </c:numCache>
             </c:numRef>
           </c:val>
         </c:ser>
         <c:dLbls>
-          <c:numFmt formatCode="0.0%" sourceLinked="0"/>
+          <c:numFmt formatCode="#,##0" sourceLinked="0"/>
           <c:txPr>
             <a:bodyPr/>
             <a:lstStyle/>
@@ -13508,25 +13468,25 @@
                 <c:formatCode>General</c:formatCode>
                 <c:ptCount val="7"/>
                 <c:pt idx="0">
-                  <c:v>0.405</c:v>
+                  <c:v>1.0504</c:v>
                 </c:pt>
                 <c:pt idx="1">
-                  <c:v>0.3167</c:v>
+                  <c:v>1.0181</c:v>
                 </c:pt>
                 <c:pt idx="2">
-                  <c:v>0.36</c:v>
+                  <c:v>1.05</c:v>
                 </c:pt>
                 <c:pt idx="3">
-                  <c:v>0.46</c:v>
+                  <c:v>1.26</c:v>
                 </c:pt>
                 <c:pt idx="4">
-                  <c:v>0.42</c:v>
+                  <c:v>1.13</c:v>
                 </c:pt>
                 <c:pt idx="5">
-                  <c:v>8.79</c:v>
+                  <c:v>9.13</c:v>
                 </c:pt>
                 <c:pt idx="6">
-                  <c:v>19.7788</c:v>
+                  <c:v>21.4474</c:v>
                 </c:pt>
               </c:numCache>
             </c:numRef>
@@ -13587,25 +13547,25 @@
                 <c:formatCode>General</c:formatCode>
                 <c:ptCount val="7"/>
                 <c:pt idx="0">
-                  <c:v>0.3633</c:v>
+                  <c:v>1.1188</c:v>
                 </c:pt>
                 <c:pt idx="1">
-                  <c:v>0.3317</c:v>
+                  <c:v>1.0268</c:v>
                 </c:pt>
                 <c:pt idx="2">
-                  <c:v>0.35</c:v>
+                  <c:v>1.1</c:v>
                 </c:pt>
                 <c:pt idx="3">
-                  <c:v>0.4</c:v>
+                  <c:v>1.33</c:v>
                 </c:pt>
                 <c:pt idx="4">
-                  <c:v>0.38</c:v>
+                  <c:v>1.11</c:v>
                 </c:pt>
                 <c:pt idx="5">
-                  <c:v>0.84</c:v>
+                  <c:v>1.66</c:v>
                 </c:pt>
                 <c:pt idx="6">
-                  <c:v>1.5024</c:v>
+                  <c:v>1.9001</c:v>
                 </c:pt>
               </c:numCache>
             </c:numRef>
@@ -13857,14 +13817,14 @@
               <c:strCache>
                 <c:ptCount val="1"/>
                 <c:pt idx="0">
-                  <c:v>FY26_Q3</c:v>
+                  <c:v>FY25_Q3</c:v>
                 </c:pt>
               </c:strCache>
             </c:strRef>
           </c:tx>
           <c:spPr>
             <a:solidFill>
-              <a:srgbClr val="2E75B6"/>
+              <a:srgbClr val="2E5495"/>
             </a:solidFill>
           </c:spPr>
           <c:cat>
@@ -13903,25 +13863,104 @@
                 <c:formatCode>General</c:formatCode>
                 <c:ptCount val="7"/>
                 <c:pt idx="0">
-                  <c:v>0.2106</c:v>
+                  <c:v>0.6341</c:v>
                 </c:pt>
                 <c:pt idx="1">
-                  <c:v>0.0476</c:v>
+                  <c:v>0.7066</c:v>
                 </c:pt>
                 <c:pt idx="2">
-                  <c:v>0.2648</c:v>
+                  <c:v>0.67</c:v>
                 </c:pt>
                 <c:pt idx="3">
-                  <c:v>0.0417</c:v>
+                  <c:v>0.79</c:v>
                 </c:pt>
                 <c:pt idx="4">
-                  <c:v>0.2897</c:v>
+                  <c:v>0.77</c:v>
                 </c:pt>
                 <c:pt idx="5">
-                  <c:v>0.0401</c:v>
+                  <c:v>0.7</c:v>
                 </c:pt>
                 <c:pt idx="6">
-                  <c:v>0.0485</c:v>
+                  <c:v>0.1051</c:v>
+                </c:pt>
+              </c:numCache>
+            </c:numRef>
+          </c:val>
+        </c:ser>
+        <c:ser>
+          <c:idx val="1"/>
+          <c:order val="1"/>
+          <c:tx>
+            <c:strRef>
+              <c:f>Sheet1!$C$1</c:f>
+              <c:strCache>
+                <c:ptCount val="1"/>
+                <c:pt idx="0">
+                  <c:v>FY26_Q3</c:v>
+                </c:pt>
+              </c:strCache>
+            </c:strRef>
+          </c:tx>
+          <c:spPr>
+            <a:solidFill>
+              <a:srgbClr val="A6A6A6"/>
+            </a:solidFill>
+          </c:spPr>
+          <c:cat>
+            <c:strRef>
+              <c:f>Sheet1!$A$2:$A$8</c:f>
+              <c:strCache>
+                <c:ptCount val="7"/>
+                <c:pt idx="0">
+                  <c:v>NBHI</c:v>
+                </c:pt>
+                <c:pt idx="1">
+                  <c:v>STAR</c:v>
+                </c:pt>
+                <c:pt idx="2">
+                  <c:v>CARE</c:v>
+                </c:pt>
+                <c:pt idx="3">
+                  <c:v>CIGNA</c:v>
+                </c:pt>
+                <c:pt idx="4">
+                  <c:v>ABHI</c:v>
+                </c:pt>
+                <c:pt idx="5">
+                  <c:v>Narayana</c:v>
+                </c:pt>
+                <c:pt idx="6">
+                  <c:v>Galaxy</c:v>
+                </c:pt>
+              </c:strCache>
+            </c:strRef>
+          </c:cat>
+          <c:val>
+            <c:numRef>
+              <c:f>Sheet1!$C$2:$C$8</c:f>
+              <c:numCache>
+                <c:formatCode>General</c:formatCode>
+                <c:ptCount val="7"/>
+                <c:pt idx="0">
+                  <c:v>0.7357</c:v>
+                </c:pt>
+                <c:pt idx="1">
+                  <c:v>0.6985</c:v>
+                </c:pt>
+                <c:pt idx="2">
+                  <c:v>0.74</c:v>
+                </c:pt>
+                <c:pt idx="3">
+                  <c:v>0.96</c:v>
+                </c:pt>
+                <c:pt idx="4">
+                  <c:v>0.83</c:v>
+                </c:pt>
+                <c:pt idx="5">
+                  <c:v>0.78</c:v>
+                </c:pt>
+                <c:pt idx="6">
+                  <c:v>0.3286</c:v>
                 </c:pt>
               </c:numCache>
             </c:numRef>
@@ -13997,6 +14036,19 @@
         <c:crosses val="autoZero"/>
       </c:valAx>
     </c:plotArea>
+    <c:legend>
+      <c:legendPos val="b"/>
+      <c:overlay val="0"/>
+      <c:txPr>
+        <a:bodyPr/>
+        <a:lstStyle/>
+        <a:p>
+          <a:pPr>
+            <a:defRPr sz="900"/>
+          </a:pPr>
+        </a:p>
+      </c:txPr>
+    </c:legend>
     <c:dispBlanksAs val="gap"/>
   </c:chart>
   <c:txPr>
@@ -14033,14 +14085,14 @@
               <c:strCache>
                 <c:ptCount val="1"/>
                 <c:pt idx="0">
-                  <c:v>FY26_Q3</c:v>
+                  <c:v>FY25_Q3</c:v>
                 </c:pt>
               </c:strCache>
             </c:strRef>
           </c:tx>
           <c:spPr>
             <a:solidFill>
-              <a:srgbClr val="2E75B6"/>
+              <a:srgbClr val="2E5495"/>
             </a:solidFill>
           </c:spPr>
           <c:cat>
@@ -14079,25 +14131,104 @@
                 <c:formatCode>General</c:formatCode>
                 <c:ptCount val="7"/>
                 <c:pt idx="0">
-                  <c:v>0.3444</c:v>
+                  <c:v>0.5131</c:v>
                 </c:pt>
                 <c:pt idx="1">
-                  <c:v>0.3916</c:v>
+                  <c:v>0.3115</c:v>
                 </c:pt>
                 <c:pt idx="2">
-                  <c:v>0.2998</c:v>
+                  <c:v>0.38</c:v>
                 </c:pt>
                 <c:pt idx="3">
-                  <c:v>0.1767</c:v>
+                  <c:v>0.47</c:v>
                 </c:pt>
                 <c:pt idx="4">
-                  <c:v>0.5884</c:v>
+                  <c:v>0.36</c:v>
                 </c:pt>
                 <c:pt idx="5">
-                  <c:v>-0.0729</c:v>
+                  <c:v>9.15</c:v>
                 </c:pt>
                 <c:pt idx="6">
-                  <c:v>0.1467</c:v>
+                  <c:v>21.3424</c:v>
+                </c:pt>
+              </c:numCache>
+            </c:numRef>
+          </c:val>
+        </c:ser>
+        <c:ser>
+          <c:idx val="1"/>
+          <c:order val="1"/>
+          <c:tx>
+            <c:strRef>
+              <c:f>Sheet1!$C$1</c:f>
+              <c:strCache>
+                <c:ptCount val="1"/>
+                <c:pt idx="0">
+                  <c:v>FY26_Q3</c:v>
+                </c:pt>
+              </c:strCache>
+            </c:strRef>
+          </c:tx>
+          <c:spPr>
+            <a:solidFill>
+              <a:srgbClr val="A6A6A6"/>
+            </a:solidFill>
+          </c:spPr>
+          <c:cat>
+            <c:strRef>
+              <c:f>Sheet1!$A$2:$A$8</c:f>
+              <c:strCache>
+                <c:ptCount val="7"/>
+                <c:pt idx="0">
+                  <c:v>NBHI</c:v>
+                </c:pt>
+                <c:pt idx="1">
+                  <c:v>STAR</c:v>
+                </c:pt>
+                <c:pt idx="2">
+                  <c:v>CARE</c:v>
+                </c:pt>
+                <c:pt idx="3">
+                  <c:v>CIGNA</c:v>
+                </c:pt>
+                <c:pt idx="4">
+                  <c:v>ABHI</c:v>
+                </c:pt>
+                <c:pt idx="5">
+                  <c:v>Narayana</c:v>
+                </c:pt>
+                <c:pt idx="6">
+                  <c:v>Galaxy</c:v>
+                </c:pt>
+              </c:strCache>
+            </c:strRef>
+          </c:cat>
+          <c:val>
+            <c:numRef>
+              <c:f>Sheet1!$C$2:$C$8</c:f>
+              <c:numCache>
+                <c:formatCode>General</c:formatCode>
+                <c:ptCount val="7"/>
+                <c:pt idx="0">
+                  <c:v>0.4602</c:v>
+                </c:pt>
+                <c:pt idx="1">
+                  <c:v>0.3283</c:v>
+                </c:pt>
+                <c:pt idx="2">
+                  <c:v>0.36</c:v>
+                </c:pt>
+                <c:pt idx="3">
+                  <c:v>0.36</c:v>
+                </c:pt>
+                <c:pt idx="4">
+                  <c:v>0.28</c:v>
+                </c:pt>
+                <c:pt idx="5">
+                  <c:v>0.87</c:v>
+                </c:pt>
+                <c:pt idx="6">
+                  <c:v>1.5715</c:v>
                 </c:pt>
               </c:numCache>
             </c:numRef>
@@ -14173,6 +14304,19 @@
         <c:crosses val="autoZero"/>
       </c:valAx>
     </c:plotArea>
+    <c:legend>
+      <c:legendPos val="b"/>
+      <c:overlay val="0"/>
+      <c:txPr>
+        <a:bodyPr/>
+        <a:lstStyle/>
+        <a:p>
+          <a:pPr>
+            <a:defRPr sz="900"/>
+          </a:pPr>
+        </a:p>
+      </c:txPr>
+    </c:legend>
     <c:dispBlanksAs val="gap"/>
   </c:chart>
   <c:txPr>
@@ -14209,14 +14353,14 @@
               <c:strCache>
                 <c:ptCount val="1"/>
                 <c:pt idx="0">
-                  <c:v>FY26_Q3</c:v>
+                  <c:v>FY25_Q3</c:v>
                 </c:pt>
               </c:strCache>
             </c:strRef>
           </c:tx>
           <c:spPr>
             <a:solidFill>
-              <a:srgbClr val="2E75B6"/>
+              <a:srgbClr val="2E5495"/>
             </a:solidFill>
           </c:spPr>
           <c:cat>
@@ -14255,25 +14399,104 @@
                 <c:formatCode>General</c:formatCode>
                 <c:ptCount val="7"/>
                 <c:pt idx="0">
-                  <c:v>-0.0745</c:v>
+                  <c:v>0.405</c:v>
                 </c:pt>
                 <c:pt idx="1">
-                  <c:v>0.0605</c:v>
+                  <c:v>0.3167</c:v>
                 </c:pt>
                 <c:pt idx="2">
-                  <c:v>-0.0276</c:v>
+                  <c:v>0.36</c:v>
                 </c:pt>
                 <c:pt idx="3">
-                  <c:v>-0.7766</c:v>
+                  <c:v>0.46</c:v>
                 </c:pt>
                 <c:pt idx="4">
-                  <c:v>-0.1272</c:v>
+                  <c:v>0.42</c:v>
                 </c:pt>
                 <c:pt idx="5">
-                  <c:v>-0.1519</c:v>
+                  <c:v>8.79</c:v>
                 </c:pt>
                 <c:pt idx="6">
-                  <c:v>-0.3506</c:v>
+                  <c:v>19.7788</c:v>
+                </c:pt>
+              </c:numCache>
+            </c:numRef>
+          </c:val>
+        </c:ser>
+        <c:ser>
+          <c:idx val="1"/>
+          <c:order val="1"/>
+          <c:tx>
+            <c:strRef>
+              <c:f>Sheet1!$C$1</c:f>
+              <c:strCache>
+                <c:ptCount val="1"/>
+                <c:pt idx="0">
+                  <c:v>FY26_Q3</c:v>
+                </c:pt>
+              </c:strCache>
+            </c:strRef>
+          </c:tx>
+          <c:spPr>
+            <a:solidFill>
+              <a:srgbClr val="A6A6A6"/>
+            </a:solidFill>
+          </c:spPr>
+          <c:cat>
+            <c:strRef>
+              <c:f>Sheet1!$A$2:$A$8</c:f>
+              <c:strCache>
+                <c:ptCount val="7"/>
+                <c:pt idx="0">
+                  <c:v>NBHI</c:v>
+                </c:pt>
+                <c:pt idx="1">
+                  <c:v>STAR</c:v>
+                </c:pt>
+                <c:pt idx="2">
+                  <c:v>CARE</c:v>
+                </c:pt>
+                <c:pt idx="3">
+                  <c:v>CIGNA</c:v>
+                </c:pt>
+                <c:pt idx="4">
+                  <c:v>ABHI</c:v>
+                </c:pt>
+                <c:pt idx="5">
+                  <c:v>Narayana</c:v>
+                </c:pt>
+                <c:pt idx="6">
+                  <c:v>Galaxy</c:v>
+                </c:pt>
+              </c:strCache>
+            </c:strRef>
+          </c:cat>
+          <c:val>
+            <c:numRef>
+              <c:f>Sheet1!$C$2:$C$8</c:f>
+              <c:numCache>
+                <c:formatCode>General</c:formatCode>
+                <c:ptCount val="7"/>
+                <c:pt idx="0">
+                  <c:v>0.3633</c:v>
+                </c:pt>
+                <c:pt idx="1">
+                  <c:v>0.3317</c:v>
+                </c:pt>
+                <c:pt idx="2">
+                  <c:v>0.35</c:v>
+                </c:pt>
+                <c:pt idx="3">
+                  <c:v>0.4</c:v>
+                </c:pt>
+                <c:pt idx="4">
+                  <c:v>0.38</c:v>
+                </c:pt>
+                <c:pt idx="5">
+                  <c:v>0.84</c:v>
+                </c:pt>
+                <c:pt idx="6">
+                  <c:v>1.5024</c:v>
                 </c:pt>
               </c:numCache>
             </c:numRef>
@@ -14349,6 +14572,19 @@
         <c:crosses val="autoZero"/>
       </c:valAx>
     </c:plotArea>
+    <c:legend>
+      <c:legendPos val="b"/>
+      <c:overlay val="0"/>
+      <c:txPr>
+        <a:bodyPr/>
+        <a:lstStyle/>
+        <a:p>
+          <a:pPr>
+            <a:defRPr sz="900"/>
+          </a:pPr>
+        </a:p>
+      </c:txPr>
+    </c:legend>
     <c:dispBlanksAs val="gap"/>
   </c:chart>
   <c:txPr>
@@ -14385,14 +14621,14 @@
               <c:strCache>
                 <c:ptCount val="1"/>
                 <c:pt idx="0">
-                  <c:v>FY25_Q3</c:v>
+                  <c:v>FY26_Q3</c:v>
                 </c:pt>
               </c:strCache>
             </c:strRef>
           </c:tx>
           <c:spPr>
             <a:solidFill>
-              <a:srgbClr val="2E5495"/>
+              <a:srgbClr val="2E75B6"/>
             </a:solidFill>
           </c:spPr>
           <c:cat>
@@ -14431,640 +14667,25 @@
                 <c:formatCode>General</c:formatCode>
                 <c:ptCount val="7"/>
                 <c:pt idx="0">
-                  <c:v>3.03</c:v>
+                  <c:v>0.2103</c:v>
                 </c:pt>
                 <c:pt idx="1">
-                  <c:v>2.22</c:v>
+                  <c:v>0.0476</c:v>
                 </c:pt>
                 <c:pt idx="2">
-                  <c:v>1.56</c:v>
+                  <c:v>0.2763</c:v>
                 </c:pt>
                 <c:pt idx="3">
-                  <c:v>157</c:v>
+                  <c:v>0.0417</c:v>
                 </c:pt>
                 <c:pt idx="4">
-                  <c:v>1.64</c:v>
+                  <c:v>0.2891</c:v>
                 </c:pt>
                 <c:pt idx="5">
-                  <c:v>1.77</c:v>
+                  <c:v>0.0401</c:v>
                 </c:pt>
                 <c:pt idx="6">
-                  <c:v>5.21</c:v>
-                </c:pt>
-              </c:numCache>
-            </c:numRef>
-          </c:val>
-        </c:ser>
-        <c:ser>
-          <c:idx val="1"/>
-          <c:order val="1"/>
-          <c:tx>
-            <c:strRef>
-              <c:f>Sheet1!$C$1</c:f>
-              <c:strCache>
-                <c:ptCount val="1"/>
-                <c:pt idx="0">
-                  <c:v>FY26_Q3</c:v>
-                </c:pt>
-              </c:strCache>
-            </c:strRef>
-          </c:tx>
-          <c:spPr>
-            <a:solidFill>
-              <a:srgbClr val="A6A6A6"/>
-            </a:solidFill>
-          </c:spPr>
-          <c:cat>
-            <c:strRef>
-              <c:f>Sheet1!$A$2:$A$8</c:f>
-              <c:strCache>
-                <c:ptCount val="7"/>
-                <c:pt idx="0">
-                  <c:v>NBHI</c:v>
-                </c:pt>
-                <c:pt idx="1">
-                  <c:v>STAR</c:v>
-                </c:pt>
-                <c:pt idx="2">
-                  <c:v>CARE</c:v>
-                </c:pt>
-                <c:pt idx="3">
-                  <c:v>CIGNA</c:v>
-                </c:pt>
-                <c:pt idx="4">
-                  <c:v>ABHI</c:v>
-                </c:pt>
-                <c:pt idx="5">
-                  <c:v>Narayana</c:v>
-                </c:pt>
-                <c:pt idx="6">
-                  <c:v>Galaxy</c:v>
-                </c:pt>
-              </c:strCache>
-            </c:strRef>
-          </c:cat>
-          <c:val>
-            <c:numRef>
-              <c:f>Sheet1!$C$2:$C$8</c:f>
-              <c:numCache>
-                <c:formatCode>General</c:formatCode>
-                <c:ptCount val="7"/>
-                <c:pt idx="0">
-                  <c:v>2.49</c:v>
-                </c:pt>
-                <c:pt idx="1">
-                  <c:v>2.14</c:v>
-                </c:pt>
-                <c:pt idx="2">
-                  <c:v>1.7</c:v>
-                </c:pt>
-                <c:pt idx="3">
-                  <c:v>156</c:v>
-                </c:pt>
-                <c:pt idx="4">
-                  <c:v>1.53</c:v>
-                </c:pt>
-                <c:pt idx="5">
-                  <c:v>1.7</c:v>
-                </c:pt>
-                <c:pt idx="6">
-                  <c:v>3.18</c:v>
-                </c:pt>
-              </c:numCache>
-            </c:numRef>
-          </c:val>
-        </c:ser>
-        <c:dLbls>
-          <c:numFmt formatCode="0.00" sourceLinked="0"/>
-          <c:txPr>
-            <a:bodyPr/>
-            <a:lstStyle/>
-            <a:p>
-              <a:pPr>
-                <a:defRPr sz="800"/>
-              </a:pPr>
-            </a:p>
-          </c:txPr>
-          <c:showLegendKey val="0"/>
-          <c:showVal val="1"/>
-          <c:showCatName val="0"/>
-          <c:showSerName val="0"/>
-          <c:showPercent val="0"/>
-          <c:showBubbleSize val="0"/>
-          <c:showLeaderLines val="1"/>
-        </c:dLbls>
-        <c:axId val="-2068027336"/>
-        <c:axId val="-2113994440"/>
-      </c:barChart>
-      <c:catAx>
-        <c:axId val="-2068027336"/>
-        <c:scaling>
-          <c:orientation val="minMax"/>
-        </c:scaling>
-        <c:delete val="0"/>
-        <c:axPos val="b"/>
-        <c:majorTickMark val="out"/>
-        <c:minorTickMark val="none"/>
-        <c:tickLblPos val="nextTo"/>
-        <c:txPr>
-          <a:bodyPr/>
-          <a:lstStyle/>
-          <a:p>
-            <a:pPr>
-              <a:defRPr sz="800"/>
-            </a:pPr>
-          </a:p>
-        </c:txPr>
-        <c:crossAx val="-2113994440"/>
-        <c:crosses val="autoZero"/>
-        <c:auto val="1"/>
-        <c:lblAlgn val="ctr"/>
-        <c:lblOffset val="100"/>
-        <c:noMultiLvlLbl val="0"/>
-      </c:catAx>
-      <c:valAx>
-        <c:axId val="-2113994440"/>
-        <c:scaling/>
-        <c:delete val="0"/>
-        <c:axPos val="l"/>
-        <c:majorGridlines/>
-        <c:majorTickMark val="out"/>
-        <c:minorTickMark val="none"/>
-        <c:tickLblPos val="nextTo"/>
-        <c:txPr>
-          <a:bodyPr/>
-          <a:lstStyle/>
-          <a:p>
-            <a:pPr>
-              <a:defRPr sz="800"/>
-            </a:pPr>
-          </a:p>
-        </c:txPr>
-        <c:crossAx val="-2068027336"/>
-        <c:crosses val="autoZero"/>
-      </c:valAx>
-    </c:plotArea>
-    <c:legend>
-      <c:legendPos val="b"/>
-      <c:overlay val="0"/>
-      <c:txPr>
-        <a:bodyPr/>
-        <a:lstStyle/>
-        <a:p>
-          <a:pPr>
-            <a:defRPr sz="900"/>
-          </a:pPr>
-        </a:p>
-      </c:txPr>
-    </c:legend>
-    <c:dispBlanksAs val="gap"/>
-  </c:chart>
-  <c:txPr>
-    <a:bodyPr/>
-    <a:lstStyle/>
-    <a:p>
-      <a:pPr>
-        <a:defRPr sz="1800"/>
-      </a:pPr>
-      <a:endParaRPr lang="en-US"/>
-    </a:p>
-  </c:txPr>
-  <c:externalData r:id="rId1">
-    <c:autoUpdate val="0"/>
-  </c:externalData>
-</c:chartSpace>
-</file>
-
-<file path=ppt/charts/chart54.xml><?xml version="1.0" encoding="utf-8"?>
-<c:chartSpace xmlns:c="http://schemas.openxmlformats.org/drawingml/2006/chart" xmlns:a="http://schemas.openxmlformats.org/drawingml/2006/main" xmlns:r="http://schemas.openxmlformats.org/officeDocument/2006/relationships">
-  <c:date1904 val="0"/>
-  <c:chart>
-    <c:autoTitleDeleted val="1"/>
-    <c:plotArea>
-      <c:barChart>
-        <c:barDir val="col"/>
-        <c:grouping val="clustered"/>
-        <c:ser>
-          <c:idx val="0"/>
-          <c:order val="0"/>
-          <c:tx>
-            <c:strRef>
-              <c:f>Sheet1!$B$1</c:f>
-              <c:strCache>
-                <c:ptCount val="1"/>
-                <c:pt idx="0">
-                  <c:v>FY25_Q3</c:v>
-                </c:pt>
-              </c:strCache>
-            </c:strRef>
-          </c:tx>
-          <c:spPr>
-            <a:solidFill>
-              <a:srgbClr val="2E5495"/>
-            </a:solidFill>
-          </c:spPr>
-          <c:cat>
-            <c:strRef>
-              <c:f>Sheet1!$A$2:$A$8</c:f>
-              <c:strCache>
-                <c:ptCount val="7"/>
-                <c:pt idx="0">
-                  <c:v>NBHI</c:v>
-                </c:pt>
-                <c:pt idx="1">
-                  <c:v>STAR</c:v>
-                </c:pt>
-                <c:pt idx="2">
-                  <c:v>CARE</c:v>
-                </c:pt>
-                <c:pt idx="3">
-                  <c:v>CIGNA</c:v>
-                </c:pt>
-                <c:pt idx="4">
-                  <c:v>ABHI</c:v>
-                </c:pt>
-                <c:pt idx="5">
-                  <c:v>Narayana</c:v>
-                </c:pt>
-                <c:pt idx="6">
-                  <c:v>Galaxy</c:v>
-                </c:pt>
-              </c:strCache>
-            </c:strRef>
-          </c:cat>
-          <c:val>
-            <c:numRef>
-              <c:f>Sheet1!$B$2:$B$8</c:f>
-              <c:numCache>
-                <c:formatCode>General</c:formatCode>
-                <c:ptCount val="7"/>
-                <c:pt idx="0">
-                  <c:v>7310.73</c:v>
-                </c:pt>
-                <c:pt idx="1">
-                  <c:v>16666.36</c:v>
-                </c:pt>
-                <c:pt idx="2">
-                  <c:v>7732.79</c:v>
-                </c:pt>
-                <c:pt idx="3">
-                  <c:v>1861.44</c:v>
-                </c:pt>
-                <c:pt idx="4">
-                  <c:v>3889.74</c:v>
-                </c:pt>
-                <c:pt idx="5">
-                  <c:v>86</c:v>
-                </c:pt>
-                <c:pt idx="6">
-                  <c:v>247.02</c:v>
-                </c:pt>
-              </c:numCache>
-            </c:numRef>
-          </c:val>
-        </c:ser>
-        <c:ser>
-          <c:idx val="1"/>
-          <c:order val="1"/>
-          <c:tx>
-            <c:strRef>
-              <c:f>Sheet1!$C$1</c:f>
-              <c:strCache>
-                <c:ptCount val="1"/>
-                <c:pt idx="0">
-                  <c:v>FY26_Q3</c:v>
-                </c:pt>
-              </c:strCache>
-            </c:strRef>
-          </c:tx>
-          <c:spPr>
-            <a:solidFill>
-              <a:srgbClr val="A6A6A6"/>
-            </a:solidFill>
-          </c:spPr>
-          <c:cat>
-            <c:strRef>
-              <c:f>Sheet1!$A$2:$A$8</c:f>
-              <c:strCache>
-                <c:ptCount val="7"/>
-                <c:pt idx="0">
-                  <c:v>NBHI</c:v>
-                </c:pt>
-                <c:pt idx="1">
-                  <c:v>STAR</c:v>
-                </c:pt>
-                <c:pt idx="2">
-                  <c:v>CARE</c:v>
-                </c:pt>
-                <c:pt idx="3">
-                  <c:v>CIGNA</c:v>
-                </c:pt>
-                <c:pt idx="4">
-                  <c:v>ABHI</c:v>
-                </c:pt>
-                <c:pt idx="5">
-                  <c:v>Narayana</c:v>
-                </c:pt>
-                <c:pt idx="6">
-                  <c:v>Galaxy</c:v>
-                </c:pt>
-              </c:strCache>
-            </c:strRef>
-          </c:cat>
-          <c:val>
-            <c:numRef>
-              <c:f>Sheet1!$C$2:$C$8</c:f>
-              <c:numCache>
-                <c:formatCode>General</c:formatCode>
-                <c:ptCount val="7"/>
-                <c:pt idx="0">
-                  <c:v>8927.39</c:v>
-                </c:pt>
-                <c:pt idx="1">
-                  <c:v>19200.06</c:v>
-                </c:pt>
-                <c:pt idx="2">
-                  <c:v>10246.11</c:v>
-                </c:pt>
-                <c:pt idx="3">
-                  <c:v>2865.79</c:v>
-                </c:pt>
-                <c:pt idx="4">
-                  <c:v>5253.4</c:v>
-                </c:pt>
-                <c:pt idx="5">
-                  <c:v>104.07</c:v>
-                </c:pt>
-                <c:pt idx="6">
-                  <c:v>200.33</c:v>
-                </c:pt>
-              </c:numCache>
-            </c:numRef>
-          </c:val>
-        </c:ser>
-        <c:dLbls>
-          <c:numFmt formatCode="#,##0" sourceLinked="0"/>
-          <c:txPr>
-            <a:bodyPr/>
-            <a:lstStyle/>
-            <a:p>
-              <a:pPr>
-                <a:defRPr sz="800"/>
-              </a:pPr>
-            </a:p>
-          </c:txPr>
-          <c:showLegendKey val="0"/>
-          <c:showVal val="1"/>
-          <c:showCatName val="0"/>
-          <c:showSerName val="0"/>
-          <c:showPercent val="0"/>
-          <c:showBubbleSize val="0"/>
-          <c:showLeaderLines val="1"/>
-        </c:dLbls>
-        <c:axId val="-2068027336"/>
-        <c:axId val="-2113994440"/>
-      </c:barChart>
-      <c:catAx>
-        <c:axId val="-2068027336"/>
-        <c:scaling>
-          <c:orientation val="minMax"/>
-        </c:scaling>
-        <c:delete val="0"/>
-        <c:axPos val="b"/>
-        <c:majorTickMark val="out"/>
-        <c:minorTickMark val="none"/>
-        <c:tickLblPos val="nextTo"/>
-        <c:txPr>
-          <a:bodyPr/>
-          <a:lstStyle/>
-          <a:p>
-            <a:pPr>
-              <a:defRPr sz="800"/>
-            </a:pPr>
-          </a:p>
-        </c:txPr>
-        <c:crossAx val="-2113994440"/>
-        <c:crosses val="autoZero"/>
-        <c:auto val="1"/>
-        <c:lblAlgn val="ctr"/>
-        <c:lblOffset val="100"/>
-        <c:noMultiLvlLbl val="0"/>
-      </c:catAx>
-      <c:valAx>
-        <c:axId val="-2113994440"/>
-        <c:scaling/>
-        <c:delete val="0"/>
-        <c:axPos val="l"/>
-        <c:majorGridlines/>
-        <c:majorTickMark val="out"/>
-        <c:minorTickMark val="none"/>
-        <c:tickLblPos val="nextTo"/>
-        <c:txPr>
-          <a:bodyPr/>
-          <a:lstStyle/>
-          <a:p>
-            <a:pPr>
-              <a:defRPr sz="800"/>
-            </a:pPr>
-          </a:p>
-        </c:txPr>
-        <c:crossAx val="-2068027336"/>
-        <c:crosses val="autoZero"/>
-      </c:valAx>
-    </c:plotArea>
-    <c:legend>
-      <c:legendPos val="b"/>
-      <c:overlay val="0"/>
-      <c:txPr>
-        <a:bodyPr/>
-        <a:lstStyle/>
-        <a:p>
-          <a:pPr>
-            <a:defRPr sz="900"/>
-          </a:pPr>
-        </a:p>
-      </c:txPr>
-    </c:legend>
-    <c:dispBlanksAs val="gap"/>
-  </c:chart>
-  <c:txPr>
-    <a:bodyPr/>
-    <a:lstStyle/>
-    <a:p>
-      <a:pPr>
-        <a:defRPr sz="1800"/>
-      </a:pPr>
-      <a:endParaRPr lang="en-US"/>
-    </a:p>
-  </c:txPr>
-  <c:externalData r:id="rId1">
-    <c:autoUpdate val="0"/>
-  </c:externalData>
-</c:chartSpace>
-</file>
-
-<file path=ppt/charts/chart55.xml><?xml version="1.0" encoding="utf-8"?>
-<c:chartSpace xmlns:c="http://schemas.openxmlformats.org/drawingml/2006/chart" xmlns:a="http://schemas.openxmlformats.org/drawingml/2006/main" xmlns:r="http://schemas.openxmlformats.org/officeDocument/2006/relationships">
-  <c:date1904 val="0"/>
-  <c:chart>
-    <c:autoTitleDeleted val="1"/>
-    <c:plotArea>
-      <c:barChart>
-        <c:barDir val="col"/>
-        <c:grouping val="clustered"/>
-        <c:ser>
-          <c:idx val="0"/>
-          <c:order val="0"/>
-          <c:tx>
-            <c:strRef>
-              <c:f>Sheet1!$B$1</c:f>
-              <c:strCache>
-                <c:ptCount val="1"/>
-                <c:pt idx="0">
-                  <c:v>FY25_Q3</c:v>
-                </c:pt>
-              </c:strCache>
-            </c:strRef>
-          </c:tx>
-          <c:spPr>
-            <a:solidFill>
-              <a:srgbClr val="2E5495"/>
-            </a:solidFill>
-          </c:spPr>
-          <c:cat>
-            <c:strRef>
-              <c:f>Sheet1!$A$2:$A$8</c:f>
-              <c:strCache>
-                <c:ptCount val="7"/>
-                <c:pt idx="0">
-                  <c:v>NBHI</c:v>
-                </c:pt>
-                <c:pt idx="1">
-                  <c:v>STAR</c:v>
-                </c:pt>
-                <c:pt idx="2">
-                  <c:v>CARE</c:v>
-                </c:pt>
-                <c:pt idx="3">
-                  <c:v>CIGNA</c:v>
-                </c:pt>
-                <c:pt idx="4">
-                  <c:v>ABHI</c:v>
-                </c:pt>
-                <c:pt idx="5">
-                  <c:v>Narayana</c:v>
-                </c:pt>
-                <c:pt idx="6">
-                  <c:v>Galaxy</c:v>
-                </c:pt>
-              </c:strCache>
-            </c:strRef>
-          </c:cat>
-          <c:val>
-            <c:numRef>
-              <c:f>Sheet1!$B$2:$B$8</c:f>
-              <c:numCache>
-                <c:formatCode>General</c:formatCode>
-                <c:ptCount val="7"/>
-                <c:pt idx="0">
-                  <c:v>0.0555</c:v>
-                </c:pt>
-                <c:pt idx="1">
-                  <c:v>0.0619</c:v>
-                </c:pt>
-                <c:pt idx="2">
-                  <c:v>0.055</c:v>
-                </c:pt>
-                <c:pt idx="3">
-                  <c:v>0.0559</c:v>
-                </c:pt>
-                <c:pt idx="4">
-                  <c:v>0.05690000000000001</c:v>
-                </c:pt>
-                <c:pt idx="5">
-                  <c:v>0.0442</c:v>
-                </c:pt>
-                <c:pt idx="6">
-                  <c:v>0.042</c:v>
-                </c:pt>
-              </c:numCache>
-            </c:numRef>
-          </c:val>
-        </c:ser>
-        <c:ser>
-          <c:idx val="1"/>
-          <c:order val="1"/>
-          <c:tx>
-            <c:strRef>
-              <c:f>Sheet1!$C$1</c:f>
-              <c:strCache>
-                <c:ptCount val="1"/>
-                <c:pt idx="0">
-                  <c:v>FY26_Q3</c:v>
-                </c:pt>
-              </c:strCache>
-            </c:strRef>
-          </c:tx>
-          <c:spPr>
-            <a:solidFill>
-              <a:srgbClr val="A6A6A6"/>
-            </a:solidFill>
-          </c:spPr>
-          <c:cat>
-            <c:strRef>
-              <c:f>Sheet1!$A$2:$A$8</c:f>
-              <c:strCache>
-                <c:ptCount val="7"/>
-                <c:pt idx="0">
-                  <c:v>NBHI</c:v>
-                </c:pt>
-                <c:pt idx="1">
-                  <c:v>STAR</c:v>
-                </c:pt>
-                <c:pt idx="2">
-                  <c:v>CARE</c:v>
-                </c:pt>
-                <c:pt idx="3">
-                  <c:v>CIGNA</c:v>
-                </c:pt>
-                <c:pt idx="4">
-                  <c:v>ABHI</c:v>
-                </c:pt>
-                <c:pt idx="5">
-                  <c:v>Narayana</c:v>
-                </c:pt>
-                <c:pt idx="6">
-                  <c:v>Galaxy</c:v>
-                </c:pt>
-              </c:strCache>
-            </c:strRef>
-          </c:cat>
-          <c:val>
-            <c:numRef>
-              <c:f>Sheet1!$C$2:$C$8</c:f>
-              <c:numCache>
-                <c:formatCode>General</c:formatCode>
-                <c:ptCount val="7"/>
-                <c:pt idx="0">
-                  <c:v>0.0545</c:v>
-                </c:pt>
-                <c:pt idx="1">
-                  <c:v>0.0495</c:v>
-                </c:pt>
-                <c:pt idx="2">
-                  <c:v>0.055</c:v>
-                </c:pt>
-                <c:pt idx="3">
-                  <c:v>0.0579</c:v>
-                </c:pt>
-                <c:pt idx="4">
-                  <c:v>0.0551</c:v>
-                </c:pt>
-                <c:pt idx="5">
-                  <c:v>0.0458</c:v>
-                </c:pt>
-                <c:pt idx="6">
-                  <c:v>0.0602</c:v>
+                  <c:v>0.0485</c:v>
                 </c:pt>
               </c:numCache>
             </c:numRef>
@@ -15140,19 +14761,358 @@
         <c:crosses val="autoZero"/>
       </c:valAx>
     </c:plotArea>
-    <c:legend>
-      <c:legendPos val="b"/>
-      <c:overlay val="0"/>
-      <c:txPr>
-        <a:bodyPr/>
-        <a:lstStyle/>
-        <a:p>
-          <a:pPr>
-            <a:defRPr sz="900"/>
-          </a:pPr>
-        </a:p>
-      </c:txPr>
-    </c:legend>
+    <c:dispBlanksAs val="gap"/>
+  </c:chart>
+  <c:txPr>
+    <a:bodyPr/>
+    <a:lstStyle/>
+    <a:p>
+      <a:pPr>
+        <a:defRPr sz="1800"/>
+      </a:pPr>
+      <a:endParaRPr lang="en-US"/>
+    </a:p>
+  </c:txPr>
+  <c:externalData r:id="rId1">
+    <c:autoUpdate val="0"/>
+  </c:externalData>
+</c:chartSpace>
+</file>
+
+<file path=ppt/charts/chart54.xml><?xml version="1.0" encoding="utf-8"?>
+<c:chartSpace xmlns:c="http://schemas.openxmlformats.org/drawingml/2006/chart" xmlns:a="http://schemas.openxmlformats.org/drawingml/2006/main" xmlns:r="http://schemas.openxmlformats.org/officeDocument/2006/relationships">
+  <c:date1904 val="0"/>
+  <c:chart>
+    <c:autoTitleDeleted val="1"/>
+    <c:plotArea>
+      <c:barChart>
+        <c:barDir val="col"/>
+        <c:grouping val="clustered"/>
+        <c:ser>
+          <c:idx val="0"/>
+          <c:order val="0"/>
+          <c:tx>
+            <c:strRef>
+              <c:f>Sheet1!$B$1</c:f>
+              <c:strCache>
+                <c:ptCount val="1"/>
+                <c:pt idx="0">
+                  <c:v>FY26_Q3</c:v>
+                </c:pt>
+              </c:strCache>
+            </c:strRef>
+          </c:tx>
+          <c:spPr>
+            <a:solidFill>
+              <a:srgbClr val="2E75B6"/>
+            </a:solidFill>
+          </c:spPr>
+          <c:cat>
+            <c:strRef>
+              <c:f>Sheet1!$A$2:$A$8</c:f>
+              <c:strCache>
+                <c:ptCount val="7"/>
+                <c:pt idx="0">
+                  <c:v>NBHI</c:v>
+                </c:pt>
+                <c:pt idx="1">
+                  <c:v>STAR</c:v>
+                </c:pt>
+                <c:pt idx="2">
+                  <c:v>CARE</c:v>
+                </c:pt>
+                <c:pt idx="3">
+                  <c:v>CIGNA</c:v>
+                </c:pt>
+                <c:pt idx="4">
+                  <c:v>ABHI</c:v>
+                </c:pt>
+                <c:pt idx="5">
+                  <c:v>Narayana</c:v>
+                </c:pt>
+                <c:pt idx="6">
+                  <c:v>Galaxy</c:v>
+                </c:pt>
+              </c:strCache>
+            </c:strRef>
+          </c:cat>
+          <c:val>
+            <c:numRef>
+              <c:f>Sheet1!$B$2:$B$8</c:f>
+              <c:numCache>
+                <c:formatCode>General</c:formatCode>
+                <c:ptCount val="7"/>
+                <c:pt idx="0">
+                  <c:v>0.3449</c:v>
+                </c:pt>
+                <c:pt idx="1">
+                  <c:v>0.3916</c:v>
+                </c:pt>
+                <c:pt idx="2">
+                  <c:v>0.2873</c:v>
+                </c:pt>
+                <c:pt idx="3">
+                  <c:v>0.1767</c:v>
+                </c:pt>
+                <c:pt idx="4">
+                  <c:v>0.5897</c:v>
+                </c:pt>
+                <c:pt idx="5">
+                  <c:v>-0.0729</c:v>
+                </c:pt>
+                <c:pt idx="6">
+                  <c:v>0.1467</c:v>
+                </c:pt>
+              </c:numCache>
+            </c:numRef>
+          </c:val>
+        </c:ser>
+        <c:dLbls>
+          <c:numFmt formatCode="0.0%" sourceLinked="0"/>
+          <c:txPr>
+            <a:bodyPr/>
+            <a:lstStyle/>
+            <a:p>
+              <a:pPr>
+                <a:defRPr sz="800"/>
+              </a:pPr>
+            </a:p>
+          </c:txPr>
+          <c:showLegendKey val="0"/>
+          <c:showVal val="1"/>
+          <c:showCatName val="0"/>
+          <c:showSerName val="0"/>
+          <c:showPercent val="0"/>
+          <c:showBubbleSize val="0"/>
+          <c:showLeaderLines val="1"/>
+        </c:dLbls>
+        <c:axId val="-2068027336"/>
+        <c:axId val="-2113994440"/>
+      </c:barChart>
+      <c:catAx>
+        <c:axId val="-2068027336"/>
+        <c:scaling>
+          <c:orientation val="minMax"/>
+        </c:scaling>
+        <c:delete val="0"/>
+        <c:axPos val="b"/>
+        <c:majorTickMark val="out"/>
+        <c:minorTickMark val="none"/>
+        <c:tickLblPos val="nextTo"/>
+        <c:txPr>
+          <a:bodyPr/>
+          <a:lstStyle/>
+          <a:p>
+            <a:pPr>
+              <a:defRPr sz="800"/>
+            </a:pPr>
+          </a:p>
+        </c:txPr>
+        <c:crossAx val="-2113994440"/>
+        <c:crosses val="autoZero"/>
+        <c:auto val="1"/>
+        <c:lblAlgn val="ctr"/>
+        <c:lblOffset val="100"/>
+        <c:noMultiLvlLbl val="0"/>
+      </c:catAx>
+      <c:valAx>
+        <c:axId val="-2113994440"/>
+        <c:scaling/>
+        <c:delete val="0"/>
+        <c:axPos val="l"/>
+        <c:majorGridlines/>
+        <c:majorTickMark val="out"/>
+        <c:minorTickMark val="none"/>
+        <c:tickLblPos val="nextTo"/>
+        <c:txPr>
+          <a:bodyPr/>
+          <a:lstStyle/>
+          <a:p>
+            <a:pPr>
+              <a:defRPr sz="800"/>
+            </a:pPr>
+          </a:p>
+        </c:txPr>
+        <c:crossAx val="-2068027336"/>
+        <c:crosses val="autoZero"/>
+      </c:valAx>
+    </c:plotArea>
+    <c:dispBlanksAs val="gap"/>
+  </c:chart>
+  <c:txPr>
+    <a:bodyPr/>
+    <a:lstStyle/>
+    <a:p>
+      <a:pPr>
+        <a:defRPr sz="1800"/>
+      </a:pPr>
+      <a:endParaRPr lang="en-US"/>
+    </a:p>
+  </c:txPr>
+  <c:externalData r:id="rId1">
+    <c:autoUpdate val="0"/>
+  </c:externalData>
+</c:chartSpace>
+</file>
+
+<file path=ppt/charts/chart55.xml><?xml version="1.0" encoding="utf-8"?>
+<c:chartSpace xmlns:c="http://schemas.openxmlformats.org/drawingml/2006/chart" xmlns:a="http://schemas.openxmlformats.org/drawingml/2006/main" xmlns:r="http://schemas.openxmlformats.org/officeDocument/2006/relationships">
+  <c:date1904 val="0"/>
+  <c:chart>
+    <c:autoTitleDeleted val="1"/>
+    <c:plotArea>
+      <c:barChart>
+        <c:barDir val="col"/>
+        <c:grouping val="clustered"/>
+        <c:ser>
+          <c:idx val="0"/>
+          <c:order val="0"/>
+          <c:tx>
+            <c:strRef>
+              <c:f>Sheet1!$B$1</c:f>
+              <c:strCache>
+                <c:ptCount val="1"/>
+                <c:pt idx="0">
+                  <c:v>FY26_Q3</c:v>
+                </c:pt>
+              </c:strCache>
+            </c:strRef>
+          </c:tx>
+          <c:spPr>
+            <a:solidFill>
+              <a:srgbClr val="2E75B6"/>
+            </a:solidFill>
+          </c:spPr>
+          <c:cat>
+            <c:strRef>
+              <c:f>Sheet1!$A$2:$A$8</c:f>
+              <c:strCache>
+                <c:ptCount val="7"/>
+                <c:pt idx="0">
+                  <c:v>NBHI</c:v>
+                </c:pt>
+                <c:pt idx="1">
+                  <c:v>STAR</c:v>
+                </c:pt>
+                <c:pt idx="2">
+                  <c:v>CARE</c:v>
+                </c:pt>
+                <c:pt idx="3">
+                  <c:v>CIGNA</c:v>
+                </c:pt>
+                <c:pt idx="4">
+                  <c:v>ABHI</c:v>
+                </c:pt>
+                <c:pt idx="5">
+                  <c:v>Narayana</c:v>
+                </c:pt>
+                <c:pt idx="6">
+                  <c:v>Galaxy</c:v>
+                </c:pt>
+              </c:strCache>
+            </c:strRef>
+          </c:cat>
+          <c:val>
+            <c:numRef>
+              <c:f>Sheet1!$B$2:$B$8</c:f>
+              <c:numCache>
+                <c:formatCode>General</c:formatCode>
+                <c:ptCount val="7"/>
+                <c:pt idx="0">
+                  <c:v>-0.0745</c:v>
+                </c:pt>
+                <c:pt idx="1">
+                  <c:v>0.0605</c:v>
+                </c:pt>
+                <c:pt idx="2">
+                  <c:v>-0.0276</c:v>
+                </c:pt>
+                <c:pt idx="3">
+                  <c:v>-0.7766</c:v>
+                </c:pt>
+                <c:pt idx="4">
+                  <c:v>-0.1272</c:v>
+                </c:pt>
+                <c:pt idx="5">
+                  <c:v>-0.1519</c:v>
+                </c:pt>
+                <c:pt idx="6">
+                  <c:v>-0.3506</c:v>
+                </c:pt>
+              </c:numCache>
+            </c:numRef>
+          </c:val>
+        </c:ser>
+        <c:dLbls>
+          <c:numFmt formatCode="0.0%" sourceLinked="0"/>
+          <c:txPr>
+            <a:bodyPr/>
+            <a:lstStyle/>
+            <a:p>
+              <a:pPr>
+                <a:defRPr sz="800"/>
+              </a:pPr>
+            </a:p>
+          </c:txPr>
+          <c:showLegendKey val="0"/>
+          <c:showVal val="1"/>
+          <c:showCatName val="0"/>
+          <c:showSerName val="0"/>
+          <c:showPercent val="0"/>
+          <c:showBubbleSize val="0"/>
+          <c:showLeaderLines val="1"/>
+        </c:dLbls>
+        <c:axId val="-2068027336"/>
+        <c:axId val="-2113994440"/>
+      </c:barChart>
+      <c:catAx>
+        <c:axId val="-2068027336"/>
+        <c:scaling>
+          <c:orientation val="minMax"/>
+        </c:scaling>
+        <c:delete val="0"/>
+        <c:axPos val="b"/>
+        <c:majorTickMark val="out"/>
+        <c:minorTickMark val="none"/>
+        <c:tickLblPos val="nextTo"/>
+        <c:txPr>
+          <a:bodyPr/>
+          <a:lstStyle/>
+          <a:p>
+            <a:pPr>
+              <a:defRPr sz="800"/>
+            </a:pPr>
+          </a:p>
+        </c:txPr>
+        <c:crossAx val="-2113994440"/>
+        <c:crosses val="autoZero"/>
+        <c:auto val="1"/>
+        <c:lblAlgn val="ctr"/>
+        <c:lblOffset val="100"/>
+        <c:noMultiLvlLbl val="0"/>
+      </c:catAx>
+      <c:valAx>
+        <c:axId val="-2113994440"/>
+        <c:scaling/>
+        <c:delete val="0"/>
+        <c:axPos val="l"/>
+        <c:majorGridlines/>
+        <c:majorTickMark val="out"/>
+        <c:minorTickMark val="none"/>
+        <c:tickLblPos val="nextTo"/>
+        <c:txPr>
+          <a:bodyPr/>
+          <a:lstStyle/>
+          <a:p>
+            <a:pPr>
+              <a:defRPr sz="800"/>
+            </a:pPr>
+          </a:p>
+        </c:txPr>
+        <c:crossAx val="-2068027336"/>
+        <c:crosses val="autoZero"/>
+      </c:valAx>
+    </c:plotArea>
     <c:dispBlanksAs val="gap"/>
   </c:chart>
   <c:txPr>
@@ -15235,25 +15195,25 @@
                 <c:formatCode>General</c:formatCode>
                 <c:ptCount val="7"/>
                 <c:pt idx="0">
-                  <c:v>3957.27</c:v>
+                  <c:v>3.03</c:v>
                 </c:pt>
                 <c:pt idx="1">
-                  <c:v>9698.18</c:v>
+                  <c:v>2.22</c:v>
                 </c:pt>
                 <c:pt idx="2">
-                  <c:v>5517.78</c:v>
+                  <c:v>1.56</c:v>
                 </c:pt>
                 <c:pt idx="3">
-                  <c:v>1265.66</c:v>
+                  <c:v>1.57</c:v>
                 </c:pt>
                 <c:pt idx="4">
-                  <c:v>2951.23</c:v>
+                  <c:v>1.64</c:v>
                 </c:pt>
                 <c:pt idx="5">
-                  <c:v>0.58</c:v>
+                  <c:v>1.77</c:v>
                 </c:pt>
                 <c:pt idx="6">
-                  <c:v>1.42</c:v>
+                  <c:v>5.21</c:v>
                 </c:pt>
               </c:numCache>
             </c:numRef>
@@ -15314,32 +15274,32 @@
                 <c:formatCode>General</c:formatCode>
                 <c:ptCount val="7"/>
                 <c:pt idx="0">
-                  <c:v>5535.97</c:v>
+                  <c:v>2.49</c:v>
                 </c:pt>
                 <c:pt idx="1">
-                  <c:v>11658.07</c:v>
+                  <c:v>2.14</c:v>
                 </c:pt>
                 <c:pt idx="2">
-                  <c:v>7650.26</c:v>
+                  <c:v>1.7</c:v>
                 </c:pt>
                 <c:pt idx="3">
-                  <c:v>1965.01</c:v>
+                  <c:v>1.56</c:v>
                 </c:pt>
                 <c:pt idx="4">
-                  <c:v>4244.3</c:v>
+                  <c:v>1.53</c:v>
                 </c:pt>
                 <c:pt idx="5">
-                  <c:v>20.37</c:v>
+                  <c:v>1.7</c:v>
                 </c:pt>
                 <c:pt idx="6">
-                  <c:v>52.46</c:v>
+                  <c:v>3.18</c:v>
                 </c:pt>
               </c:numCache>
             </c:numRef>
           </c:val>
         </c:ser>
         <c:dLbls>
-          <c:numFmt formatCode="#,##0" sourceLinked="0"/>
+          <c:numFmt formatCode="0.00" sourceLinked="0"/>
           <c:txPr>
             <a:bodyPr/>
             <a:lstStyle/>
@@ -15503,25 +15463,25 @@
                 <c:formatCode>General</c:formatCode>
                 <c:ptCount val="7"/>
                 <c:pt idx="0">
-                  <c:v>3353.46</c:v>
+                  <c:v>7310.73</c:v>
                 </c:pt>
                 <c:pt idx="1">
-                  <c:v>6968.18</c:v>
+                  <c:v>16666.36</c:v>
                 </c:pt>
                 <c:pt idx="2">
-                  <c:v>2215.01</c:v>
+                  <c:v>7732.79</c:v>
                 </c:pt>
                 <c:pt idx="3">
-                  <c:v>595.78</c:v>
+                  <c:v>1861.44</c:v>
                 </c:pt>
                 <c:pt idx="4">
-                  <c:v>938.51</c:v>
+                  <c:v>3889.74</c:v>
                 </c:pt>
                 <c:pt idx="5">
-                  <c:v>85.41</c:v>
+                  <c:v>86</c:v>
                 </c:pt>
                 <c:pt idx="6">
-                  <c:v>245.6</c:v>
+                  <c:v>247.02</c:v>
                 </c:pt>
               </c:numCache>
             </c:numRef>
@@ -15582,25 +15542,25 @@
                 <c:formatCode>General</c:formatCode>
                 <c:ptCount val="7"/>
                 <c:pt idx="0">
-                  <c:v>3391.42</c:v>
+                  <c:v>8927.39</c:v>
                 </c:pt>
                 <c:pt idx="1">
-                  <c:v>7541.99</c:v>
+                  <c:v>19200.06</c:v>
                 </c:pt>
                 <c:pt idx="2">
-                  <c:v>2595.85</c:v>
+                  <c:v>10246.11</c:v>
                 </c:pt>
                 <c:pt idx="3">
-                  <c:v>900.78</c:v>
+                  <c:v>2865.79</c:v>
                 </c:pt>
                 <c:pt idx="4">
-                  <c:v>1009.1</c:v>
+                  <c:v>5253.4</c:v>
                 </c:pt>
                 <c:pt idx="5">
-                  <c:v>83.69</c:v>
+                  <c:v>104.07</c:v>
                 </c:pt>
                 <c:pt idx="6">
-                  <c:v>147.87</c:v>
+                  <c:v>200.33</c:v>
                 </c:pt>
               </c:numCache>
             </c:numRef>
@@ -15725,14 +15685,14 @@
               <c:strCache>
                 <c:ptCount val="1"/>
                 <c:pt idx="0">
-                  <c:v>FY26_Q3</c:v>
+                  <c:v>FY25_Q3</c:v>
                 </c:pt>
               </c:strCache>
             </c:strRef>
           </c:tx>
           <c:spPr>
             <a:solidFill>
-              <a:srgbClr val="2E75B6"/>
+              <a:srgbClr val="2E5495"/>
             </a:solidFill>
           </c:spPr>
           <c:cat>
@@ -15771,25 +15731,372 @@
                 <c:formatCode>General</c:formatCode>
                 <c:ptCount val="7"/>
                 <c:pt idx="0">
-                  <c:v>10137</c:v>
+                  <c:v>0.0555</c:v>
                 </c:pt>
                 <c:pt idx="1">
-                  <c:v>18320</c:v>
+                  <c:v>0.0619</c:v>
                 </c:pt>
                 <c:pt idx="2">
-                  <c:v>11489</c:v>
+                  <c:v>0.055</c:v>
                 </c:pt>
                 <c:pt idx="3">
-                  <c:v>3640</c:v>
+                  <c:v>0.0559</c:v>
                 </c:pt>
                 <c:pt idx="4">
-                  <c:v>7126</c:v>
+                  <c:v>0.05690000000000001</c:v>
                 </c:pt>
                 <c:pt idx="5">
-                  <c:v>127</c:v>
+                  <c:v>0.0442</c:v>
                 </c:pt>
                 <c:pt idx="6">
-                  <c:v>1915</c:v>
+                  <c:v>0.042</c:v>
+                </c:pt>
+              </c:numCache>
+            </c:numRef>
+          </c:val>
+        </c:ser>
+        <c:ser>
+          <c:idx val="1"/>
+          <c:order val="1"/>
+          <c:tx>
+            <c:strRef>
+              <c:f>Sheet1!$C$1</c:f>
+              <c:strCache>
+                <c:ptCount val="1"/>
+                <c:pt idx="0">
+                  <c:v>FY26_Q3</c:v>
+                </c:pt>
+              </c:strCache>
+            </c:strRef>
+          </c:tx>
+          <c:spPr>
+            <a:solidFill>
+              <a:srgbClr val="A6A6A6"/>
+            </a:solidFill>
+          </c:spPr>
+          <c:cat>
+            <c:strRef>
+              <c:f>Sheet1!$A$2:$A$8</c:f>
+              <c:strCache>
+                <c:ptCount val="7"/>
+                <c:pt idx="0">
+                  <c:v>NBHI</c:v>
+                </c:pt>
+                <c:pt idx="1">
+                  <c:v>STAR</c:v>
+                </c:pt>
+                <c:pt idx="2">
+                  <c:v>CARE</c:v>
+                </c:pt>
+                <c:pt idx="3">
+                  <c:v>CIGNA</c:v>
+                </c:pt>
+                <c:pt idx="4">
+                  <c:v>ABHI</c:v>
+                </c:pt>
+                <c:pt idx="5">
+                  <c:v>Narayana</c:v>
+                </c:pt>
+                <c:pt idx="6">
+                  <c:v>Galaxy</c:v>
+                </c:pt>
+              </c:strCache>
+            </c:strRef>
+          </c:cat>
+          <c:val>
+            <c:numRef>
+              <c:f>Sheet1!$C$2:$C$8</c:f>
+              <c:numCache>
+                <c:formatCode>General</c:formatCode>
+                <c:ptCount val="7"/>
+                <c:pt idx="0">
+                  <c:v>0.0545</c:v>
+                </c:pt>
+                <c:pt idx="1">
+                  <c:v>0.0495</c:v>
+                </c:pt>
+                <c:pt idx="2">
+                  <c:v>0.055</c:v>
+                </c:pt>
+                <c:pt idx="3">
+                  <c:v>0.0579</c:v>
+                </c:pt>
+                <c:pt idx="4">
+                  <c:v>0.0551</c:v>
+                </c:pt>
+                <c:pt idx="5">
+                  <c:v>0.0458</c:v>
+                </c:pt>
+                <c:pt idx="6">
+                  <c:v>0.0602</c:v>
+                </c:pt>
+              </c:numCache>
+            </c:numRef>
+          </c:val>
+        </c:ser>
+        <c:dLbls>
+          <c:numFmt formatCode="0.0%" sourceLinked="0"/>
+          <c:txPr>
+            <a:bodyPr/>
+            <a:lstStyle/>
+            <a:p>
+              <a:pPr>
+                <a:defRPr sz="800"/>
+              </a:pPr>
+            </a:p>
+          </c:txPr>
+          <c:showLegendKey val="0"/>
+          <c:showVal val="1"/>
+          <c:showCatName val="0"/>
+          <c:showSerName val="0"/>
+          <c:showPercent val="0"/>
+          <c:showBubbleSize val="0"/>
+          <c:showLeaderLines val="1"/>
+        </c:dLbls>
+        <c:axId val="-2068027336"/>
+        <c:axId val="-2113994440"/>
+      </c:barChart>
+      <c:catAx>
+        <c:axId val="-2068027336"/>
+        <c:scaling>
+          <c:orientation val="minMax"/>
+        </c:scaling>
+        <c:delete val="0"/>
+        <c:axPos val="b"/>
+        <c:majorTickMark val="out"/>
+        <c:minorTickMark val="none"/>
+        <c:tickLblPos val="nextTo"/>
+        <c:txPr>
+          <a:bodyPr/>
+          <a:lstStyle/>
+          <a:p>
+            <a:pPr>
+              <a:defRPr sz="800"/>
+            </a:pPr>
+          </a:p>
+        </c:txPr>
+        <c:crossAx val="-2113994440"/>
+        <c:crosses val="autoZero"/>
+        <c:auto val="1"/>
+        <c:lblAlgn val="ctr"/>
+        <c:lblOffset val="100"/>
+        <c:noMultiLvlLbl val="0"/>
+      </c:catAx>
+      <c:valAx>
+        <c:axId val="-2113994440"/>
+        <c:scaling/>
+        <c:delete val="0"/>
+        <c:axPos val="l"/>
+        <c:majorGridlines/>
+        <c:majorTickMark val="out"/>
+        <c:minorTickMark val="none"/>
+        <c:tickLblPos val="nextTo"/>
+        <c:txPr>
+          <a:bodyPr/>
+          <a:lstStyle/>
+          <a:p>
+            <a:pPr>
+              <a:defRPr sz="800"/>
+            </a:pPr>
+          </a:p>
+        </c:txPr>
+        <c:crossAx val="-2068027336"/>
+        <c:crosses val="autoZero"/>
+      </c:valAx>
+    </c:plotArea>
+    <c:legend>
+      <c:legendPos val="b"/>
+      <c:overlay val="0"/>
+      <c:txPr>
+        <a:bodyPr/>
+        <a:lstStyle/>
+        <a:p>
+          <a:pPr>
+            <a:defRPr sz="900"/>
+          </a:pPr>
+        </a:p>
+      </c:txPr>
+    </c:legend>
+    <c:dispBlanksAs val="gap"/>
+  </c:chart>
+  <c:txPr>
+    <a:bodyPr/>
+    <a:lstStyle/>
+    <a:p>
+      <a:pPr>
+        <a:defRPr sz="1800"/>
+      </a:pPr>
+      <a:endParaRPr lang="en-US"/>
+    </a:p>
+  </c:txPr>
+  <c:externalData r:id="rId1">
+    <c:autoUpdate val="0"/>
+  </c:externalData>
+</c:chartSpace>
+</file>
+
+<file path=ppt/charts/chart59.xml><?xml version="1.0" encoding="utf-8"?>
+<c:chartSpace xmlns:c="http://schemas.openxmlformats.org/drawingml/2006/chart" xmlns:a="http://schemas.openxmlformats.org/drawingml/2006/main" xmlns:r="http://schemas.openxmlformats.org/officeDocument/2006/relationships">
+  <c:date1904 val="0"/>
+  <c:chart>
+    <c:autoTitleDeleted val="1"/>
+    <c:plotArea>
+      <c:barChart>
+        <c:barDir val="col"/>
+        <c:grouping val="clustered"/>
+        <c:ser>
+          <c:idx val="0"/>
+          <c:order val="0"/>
+          <c:tx>
+            <c:strRef>
+              <c:f>Sheet1!$B$1</c:f>
+              <c:strCache>
+                <c:ptCount val="1"/>
+                <c:pt idx="0">
+                  <c:v>FY25_Q3</c:v>
+                </c:pt>
+              </c:strCache>
+            </c:strRef>
+          </c:tx>
+          <c:spPr>
+            <a:solidFill>
+              <a:srgbClr val="2E5495"/>
+            </a:solidFill>
+          </c:spPr>
+          <c:cat>
+            <c:strRef>
+              <c:f>Sheet1!$A$2:$A$8</c:f>
+              <c:strCache>
+                <c:ptCount val="7"/>
+                <c:pt idx="0">
+                  <c:v>NBHI</c:v>
+                </c:pt>
+                <c:pt idx="1">
+                  <c:v>STAR</c:v>
+                </c:pt>
+                <c:pt idx="2">
+                  <c:v>CARE</c:v>
+                </c:pt>
+                <c:pt idx="3">
+                  <c:v>CIGNA</c:v>
+                </c:pt>
+                <c:pt idx="4">
+                  <c:v>ABHI</c:v>
+                </c:pt>
+                <c:pt idx="5">
+                  <c:v>Narayana</c:v>
+                </c:pt>
+                <c:pt idx="6">
+                  <c:v>Galaxy</c:v>
+                </c:pt>
+              </c:strCache>
+            </c:strRef>
+          </c:cat>
+          <c:val>
+            <c:numRef>
+              <c:f>Sheet1!$B$2:$B$8</c:f>
+              <c:numCache>
+                <c:formatCode>General</c:formatCode>
+                <c:ptCount val="7"/>
+                <c:pt idx="0">
+                  <c:v>3957.27</c:v>
+                </c:pt>
+                <c:pt idx="1">
+                  <c:v>9698.18</c:v>
+                </c:pt>
+                <c:pt idx="2">
+                  <c:v>5517.78</c:v>
+                </c:pt>
+                <c:pt idx="3">
+                  <c:v>1265.66</c:v>
+                </c:pt>
+                <c:pt idx="4">
+                  <c:v>2951.23</c:v>
+                </c:pt>
+                <c:pt idx="5">
+                  <c:v>0.58</c:v>
+                </c:pt>
+                <c:pt idx="6">
+                  <c:v>1.42</c:v>
+                </c:pt>
+              </c:numCache>
+            </c:numRef>
+          </c:val>
+        </c:ser>
+        <c:ser>
+          <c:idx val="1"/>
+          <c:order val="1"/>
+          <c:tx>
+            <c:strRef>
+              <c:f>Sheet1!$C$1</c:f>
+              <c:strCache>
+                <c:ptCount val="1"/>
+                <c:pt idx="0">
+                  <c:v>FY26_Q3</c:v>
+                </c:pt>
+              </c:strCache>
+            </c:strRef>
+          </c:tx>
+          <c:spPr>
+            <a:solidFill>
+              <a:srgbClr val="A6A6A6"/>
+            </a:solidFill>
+          </c:spPr>
+          <c:cat>
+            <c:strRef>
+              <c:f>Sheet1!$A$2:$A$8</c:f>
+              <c:strCache>
+                <c:ptCount val="7"/>
+                <c:pt idx="0">
+                  <c:v>NBHI</c:v>
+                </c:pt>
+                <c:pt idx="1">
+                  <c:v>STAR</c:v>
+                </c:pt>
+                <c:pt idx="2">
+                  <c:v>CARE</c:v>
+                </c:pt>
+                <c:pt idx="3">
+                  <c:v>CIGNA</c:v>
+                </c:pt>
+                <c:pt idx="4">
+                  <c:v>ABHI</c:v>
+                </c:pt>
+                <c:pt idx="5">
+                  <c:v>Narayana</c:v>
+                </c:pt>
+                <c:pt idx="6">
+                  <c:v>Galaxy</c:v>
+                </c:pt>
+              </c:strCache>
+            </c:strRef>
+          </c:cat>
+          <c:val>
+            <c:numRef>
+              <c:f>Sheet1!$C$2:$C$8</c:f>
+              <c:numCache>
+                <c:formatCode>General</c:formatCode>
+                <c:ptCount val="7"/>
+                <c:pt idx="0">
+                  <c:v>5535.97</c:v>
+                </c:pt>
+                <c:pt idx="1">
+                  <c:v>11658.07</c:v>
+                </c:pt>
+                <c:pt idx="2">
+                  <c:v>7650.26</c:v>
+                </c:pt>
+                <c:pt idx="3">
+                  <c:v>1965.01</c:v>
+                </c:pt>
+                <c:pt idx="4">
+                  <c:v>4244.3</c:v>
+                </c:pt>
+                <c:pt idx="5">
+                  <c:v>20.37</c:v>
+                </c:pt>
+                <c:pt idx="6">
+                  <c:v>52.46</c:v>
                 </c:pt>
               </c:numCache>
             </c:numRef>
@@ -15865,182 +16172,19 @@
         <c:crosses val="autoZero"/>
       </c:valAx>
     </c:plotArea>
-    <c:dispBlanksAs val="gap"/>
-  </c:chart>
-  <c:txPr>
-    <a:bodyPr/>
-    <a:lstStyle/>
-    <a:p>
-      <a:pPr>
-        <a:defRPr sz="1800"/>
-      </a:pPr>
-      <a:endParaRPr lang="en-US"/>
-    </a:p>
-  </c:txPr>
-  <c:externalData r:id="rId1">
-    <c:autoUpdate val="0"/>
-  </c:externalData>
-</c:chartSpace>
-</file>
-
-<file path=ppt/charts/chart59.xml><?xml version="1.0" encoding="utf-8"?>
-<c:chartSpace xmlns:c="http://schemas.openxmlformats.org/drawingml/2006/chart" xmlns:a="http://schemas.openxmlformats.org/drawingml/2006/main" xmlns:r="http://schemas.openxmlformats.org/officeDocument/2006/relationships">
-  <c:date1904 val="0"/>
-  <c:chart>
-    <c:autoTitleDeleted val="1"/>
-    <c:plotArea>
-      <c:barChart>
-        <c:barDir val="col"/>
-        <c:grouping val="clustered"/>
-        <c:ser>
-          <c:idx val="0"/>
-          <c:order val="0"/>
-          <c:tx>
-            <c:strRef>
-              <c:f>Sheet1!$B$1</c:f>
-              <c:strCache>
-                <c:ptCount val="1"/>
-                <c:pt idx="0">
-                  <c:v>FY26_Q3</c:v>
-                </c:pt>
-              </c:strCache>
-            </c:strRef>
-          </c:tx>
-          <c:spPr>
-            <a:solidFill>
-              <a:srgbClr val="2E75B6"/>
-            </a:solidFill>
-          </c:spPr>
-          <c:cat>
-            <c:strRef>
-              <c:f>Sheet1!$A$2:$A$8</c:f>
-              <c:strCache>
-                <c:ptCount val="7"/>
-                <c:pt idx="0">
-                  <c:v>NBHI</c:v>
-                </c:pt>
-                <c:pt idx="1">
-                  <c:v>STAR</c:v>
-                </c:pt>
-                <c:pt idx="2">
-                  <c:v>CARE</c:v>
-                </c:pt>
-                <c:pt idx="3">
-                  <c:v>CIGNA</c:v>
-                </c:pt>
-                <c:pt idx="4">
-                  <c:v>ABHI</c:v>
-                </c:pt>
-                <c:pt idx="5">
-                  <c:v>Narayana</c:v>
-                </c:pt>
-                <c:pt idx="6">
-                  <c:v>Galaxy</c:v>
-                </c:pt>
-              </c:strCache>
-            </c:strRef>
-          </c:cat>
-          <c:val>
-            <c:numRef>
-              <c:f>Sheet1!$B$2:$B$8</c:f>
-              <c:numCache>
-                <c:formatCode>General</c:formatCode>
-                <c:ptCount val="7"/>
-                <c:pt idx="0">
-                  <c:v>224810</c:v>
-                </c:pt>
-                <c:pt idx="1">
-                  <c:v>818649</c:v>
-                </c:pt>
-                <c:pt idx="2">
-                  <c:v>400370</c:v>
-                </c:pt>
-                <c:pt idx="3">
-                  <c:v>100506</c:v>
-                </c:pt>
-                <c:pt idx="4">
-                  <c:v>163606</c:v>
-                </c:pt>
-                <c:pt idx="5">
-                  <c:v>5</c:v>
-                </c:pt>
-                <c:pt idx="6">
-                  <c:v>10680</c:v>
-                </c:pt>
-              </c:numCache>
-            </c:numRef>
-          </c:val>
-        </c:ser>
-        <c:dLbls>
-          <c:numFmt formatCode="#,##0" sourceLinked="0"/>
-          <c:txPr>
-            <a:bodyPr/>
-            <a:lstStyle/>
-            <a:p>
-              <a:pPr>
-                <a:defRPr sz="800"/>
-              </a:pPr>
-            </a:p>
-          </c:txPr>
-          <c:showLegendKey val="0"/>
-          <c:showVal val="1"/>
-          <c:showCatName val="0"/>
-          <c:showSerName val="0"/>
-          <c:showPercent val="0"/>
-          <c:showBubbleSize val="0"/>
-          <c:showLeaderLines val="1"/>
-        </c:dLbls>
-        <c:axId val="-2068027336"/>
-        <c:axId val="-2113994440"/>
-      </c:barChart>
-      <c:catAx>
-        <c:axId val="-2068027336"/>
-        <c:scaling>
-          <c:orientation val="minMax"/>
-        </c:scaling>
-        <c:delete val="0"/>
-        <c:axPos val="b"/>
-        <c:majorTickMark val="out"/>
-        <c:minorTickMark val="none"/>
-        <c:tickLblPos val="nextTo"/>
-        <c:txPr>
-          <a:bodyPr/>
-          <a:lstStyle/>
-          <a:p>
-            <a:pPr>
-              <a:defRPr sz="800"/>
-            </a:pPr>
-          </a:p>
-        </c:txPr>
-        <c:crossAx val="-2113994440"/>
-        <c:crosses val="autoZero"/>
-        <c:auto val="1"/>
-        <c:lblAlgn val="ctr"/>
-        <c:lblOffset val="100"/>
-        <c:noMultiLvlLbl val="0"/>
-      </c:catAx>
-      <c:valAx>
-        <c:axId val="-2113994440"/>
-        <c:scaling/>
-        <c:delete val="0"/>
-        <c:axPos val="l"/>
-        <c:majorGridlines/>
-        <c:majorTickMark val="out"/>
-        <c:minorTickMark val="none"/>
-        <c:tickLblPos val="nextTo"/>
-        <c:txPr>
-          <a:bodyPr/>
-          <a:lstStyle/>
-          <a:p>
-            <a:pPr>
-              <a:defRPr sz="800"/>
-            </a:pPr>
-          </a:p>
-        </c:txPr>
-        <c:crossAx val="-2068027336"/>
-        <c:crosses val="autoZero"/>
-      </c:valAx>
-    </c:plotArea>
+    <c:legend>
+      <c:legendPos val="b"/>
+      <c:overlay val="0"/>
+      <c:txPr>
+        <a:bodyPr/>
+        <a:lstStyle/>
+        <a:p>
+          <a:pPr>
+            <a:defRPr sz="900"/>
+          </a:pPr>
+        </a:p>
+      </c:txPr>
+    </c:legend>
     <c:dispBlanksAs val="gap"/>
   </c:chart>
   <c:txPr>
@@ -16204,14 +16348,14 @@
               <c:strCache>
                 <c:ptCount val="1"/>
                 <c:pt idx="0">
-                  <c:v>FY26_Q3</c:v>
+                  <c:v>FY25_Q3</c:v>
                 </c:pt>
               </c:strCache>
             </c:strRef>
           </c:tx>
           <c:spPr>
             <a:solidFill>
-              <a:srgbClr val="2E75B6"/>
+              <a:srgbClr val="2E5495"/>
             </a:solidFill>
           </c:spPr>
           <c:cat>
@@ -16250,25 +16394,104 @@
                 <c:formatCode>General</c:formatCode>
                 <c:ptCount val="7"/>
                 <c:pt idx="0">
-                  <c:v>210</c:v>
+                  <c:v>3353.46</c:v>
                 </c:pt>
                 <c:pt idx="1">
-                  <c:v>918</c:v>
+                  <c:v>6968.18</c:v>
                 </c:pt>
                 <c:pt idx="2">
-                  <c:v>274</c:v>
+                  <c:v>2215.01</c:v>
                 </c:pt>
                 <c:pt idx="3">
-                  <c:v>120</c:v>
+                  <c:v>595.78</c:v>
                 </c:pt>
                 <c:pt idx="4">
-                  <c:v>229</c:v>
+                  <c:v>938.51</c:v>
                 </c:pt>
                 <c:pt idx="5">
-                  <c:v>4</c:v>
+                  <c:v>85.41</c:v>
                 </c:pt>
                 <c:pt idx="6">
-                  <c:v>72</c:v>
+                  <c:v>245.6</c:v>
+                </c:pt>
+              </c:numCache>
+            </c:numRef>
+          </c:val>
+        </c:ser>
+        <c:ser>
+          <c:idx val="1"/>
+          <c:order val="1"/>
+          <c:tx>
+            <c:strRef>
+              <c:f>Sheet1!$C$1</c:f>
+              <c:strCache>
+                <c:ptCount val="1"/>
+                <c:pt idx="0">
+                  <c:v>FY26_Q3</c:v>
+                </c:pt>
+              </c:strCache>
+            </c:strRef>
+          </c:tx>
+          <c:spPr>
+            <a:solidFill>
+              <a:srgbClr val="A6A6A6"/>
+            </a:solidFill>
+          </c:spPr>
+          <c:cat>
+            <c:strRef>
+              <c:f>Sheet1!$A$2:$A$8</c:f>
+              <c:strCache>
+                <c:ptCount val="7"/>
+                <c:pt idx="0">
+                  <c:v>NBHI</c:v>
+                </c:pt>
+                <c:pt idx="1">
+                  <c:v>STAR</c:v>
+                </c:pt>
+                <c:pt idx="2">
+                  <c:v>CARE</c:v>
+                </c:pt>
+                <c:pt idx="3">
+                  <c:v>CIGNA</c:v>
+                </c:pt>
+                <c:pt idx="4">
+                  <c:v>ABHI</c:v>
+                </c:pt>
+                <c:pt idx="5">
+                  <c:v>Narayana</c:v>
+                </c:pt>
+                <c:pt idx="6">
+                  <c:v>Galaxy</c:v>
+                </c:pt>
+              </c:strCache>
+            </c:strRef>
+          </c:cat>
+          <c:val>
+            <c:numRef>
+              <c:f>Sheet1!$C$2:$C$8</c:f>
+              <c:numCache>
+                <c:formatCode>General</c:formatCode>
+                <c:ptCount val="7"/>
+                <c:pt idx="0">
+                  <c:v>3391.42</c:v>
+                </c:pt>
+                <c:pt idx="1">
+                  <c:v>7541.99</c:v>
+                </c:pt>
+                <c:pt idx="2">
+                  <c:v>2595.85</c:v>
+                </c:pt>
+                <c:pt idx="3">
+                  <c:v>900.78</c:v>
+                </c:pt>
+                <c:pt idx="4">
+                  <c:v>1009.1</c:v>
+                </c:pt>
+                <c:pt idx="5">
+                  <c:v>83.69</c:v>
+                </c:pt>
+                <c:pt idx="6">
+                  <c:v>147.87</c:v>
                 </c:pt>
               </c:numCache>
             </c:numRef>
@@ -16344,6 +16567,19 @@
         <c:crosses val="autoZero"/>
       </c:valAx>
     </c:plotArea>
+    <c:legend>
+      <c:legendPos val="b"/>
+      <c:overlay val="0"/>
+      <c:txPr>
+        <a:bodyPr/>
+        <a:lstStyle/>
+        <a:p>
+          <a:pPr>
+            <a:defRPr sz="900"/>
+          </a:pPr>
+        </a:p>
+      </c:txPr>
+    </c:legend>
     <c:dispBlanksAs val="gap"/>
   </c:chart>
   <c:txPr>
@@ -16363,6 +16599,534 @@
 </file>
 
 <file path=ppt/charts/chart61.xml><?xml version="1.0" encoding="utf-8"?>
+<c:chartSpace xmlns:c="http://schemas.openxmlformats.org/drawingml/2006/chart" xmlns:a="http://schemas.openxmlformats.org/drawingml/2006/main" xmlns:r="http://schemas.openxmlformats.org/officeDocument/2006/relationships">
+  <c:date1904 val="0"/>
+  <c:chart>
+    <c:autoTitleDeleted val="1"/>
+    <c:plotArea>
+      <c:barChart>
+        <c:barDir val="col"/>
+        <c:grouping val="clustered"/>
+        <c:ser>
+          <c:idx val="0"/>
+          <c:order val="0"/>
+          <c:tx>
+            <c:strRef>
+              <c:f>Sheet1!$B$1</c:f>
+              <c:strCache>
+                <c:ptCount val="1"/>
+                <c:pt idx="0">
+                  <c:v>FY26_Q3</c:v>
+                </c:pt>
+              </c:strCache>
+            </c:strRef>
+          </c:tx>
+          <c:spPr>
+            <a:solidFill>
+              <a:srgbClr val="2E75B6"/>
+            </a:solidFill>
+          </c:spPr>
+          <c:cat>
+            <c:strRef>
+              <c:f>Sheet1!$A$2:$A$8</c:f>
+              <c:strCache>
+                <c:ptCount val="7"/>
+                <c:pt idx="0">
+                  <c:v>NBHI</c:v>
+                </c:pt>
+                <c:pt idx="1">
+                  <c:v>STAR</c:v>
+                </c:pt>
+                <c:pt idx="2">
+                  <c:v>CARE</c:v>
+                </c:pt>
+                <c:pt idx="3">
+                  <c:v>CIGNA</c:v>
+                </c:pt>
+                <c:pt idx="4">
+                  <c:v>ABHI</c:v>
+                </c:pt>
+                <c:pt idx="5">
+                  <c:v>Narayana</c:v>
+                </c:pt>
+                <c:pt idx="6">
+                  <c:v>Galaxy</c:v>
+                </c:pt>
+              </c:strCache>
+            </c:strRef>
+          </c:cat>
+          <c:val>
+            <c:numRef>
+              <c:f>Sheet1!$B$2:$B$8</c:f>
+              <c:numCache>
+                <c:formatCode>General</c:formatCode>
+                <c:ptCount val="7"/>
+                <c:pt idx="0">
+                  <c:v>10137</c:v>
+                </c:pt>
+                <c:pt idx="1">
+                  <c:v>18320</c:v>
+                </c:pt>
+                <c:pt idx="2">
+                  <c:v>11489</c:v>
+                </c:pt>
+                <c:pt idx="3">
+                  <c:v>3640</c:v>
+                </c:pt>
+                <c:pt idx="4">
+                  <c:v>7126</c:v>
+                </c:pt>
+                <c:pt idx="5">
+                  <c:v>127</c:v>
+                </c:pt>
+                <c:pt idx="6">
+                  <c:v>1915</c:v>
+                </c:pt>
+              </c:numCache>
+            </c:numRef>
+          </c:val>
+        </c:ser>
+        <c:dLbls>
+          <c:numFmt formatCode="#,##0" sourceLinked="0"/>
+          <c:txPr>
+            <a:bodyPr/>
+            <a:lstStyle/>
+            <a:p>
+              <a:pPr>
+                <a:defRPr sz="800"/>
+              </a:pPr>
+            </a:p>
+          </c:txPr>
+          <c:showLegendKey val="0"/>
+          <c:showVal val="1"/>
+          <c:showCatName val="0"/>
+          <c:showSerName val="0"/>
+          <c:showPercent val="0"/>
+          <c:showBubbleSize val="0"/>
+          <c:showLeaderLines val="1"/>
+        </c:dLbls>
+        <c:axId val="-2068027336"/>
+        <c:axId val="-2113994440"/>
+      </c:barChart>
+      <c:catAx>
+        <c:axId val="-2068027336"/>
+        <c:scaling>
+          <c:orientation val="minMax"/>
+        </c:scaling>
+        <c:delete val="0"/>
+        <c:axPos val="b"/>
+        <c:majorTickMark val="out"/>
+        <c:minorTickMark val="none"/>
+        <c:tickLblPos val="nextTo"/>
+        <c:txPr>
+          <a:bodyPr/>
+          <a:lstStyle/>
+          <a:p>
+            <a:pPr>
+              <a:defRPr sz="800"/>
+            </a:pPr>
+          </a:p>
+        </c:txPr>
+        <c:crossAx val="-2113994440"/>
+        <c:crosses val="autoZero"/>
+        <c:auto val="1"/>
+        <c:lblAlgn val="ctr"/>
+        <c:lblOffset val="100"/>
+        <c:noMultiLvlLbl val="0"/>
+      </c:catAx>
+      <c:valAx>
+        <c:axId val="-2113994440"/>
+        <c:scaling/>
+        <c:delete val="0"/>
+        <c:axPos val="l"/>
+        <c:majorGridlines/>
+        <c:majorTickMark val="out"/>
+        <c:minorTickMark val="none"/>
+        <c:tickLblPos val="nextTo"/>
+        <c:txPr>
+          <a:bodyPr/>
+          <a:lstStyle/>
+          <a:p>
+            <a:pPr>
+              <a:defRPr sz="800"/>
+            </a:pPr>
+          </a:p>
+        </c:txPr>
+        <c:crossAx val="-2068027336"/>
+        <c:crosses val="autoZero"/>
+      </c:valAx>
+    </c:plotArea>
+    <c:dispBlanksAs val="gap"/>
+  </c:chart>
+  <c:txPr>
+    <a:bodyPr/>
+    <a:lstStyle/>
+    <a:p>
+      <a:pPr>
+        <a:defRPr sz="1800"/>
+      </a:pPr>
+      <a:endParaRPr lang="en-US"/>
+    </a:p>
+  </c:txPr>
+  <c:externalData r:id="rId1">
+    <c:autoUpdate val="0"/>
+  </c:externalData>
+</c:chartSpace>
+</file>
+
+<file path=ppt/charts/chart62.xml><?xml version="1.0" encoding="utf-8"?>
+<c:chartSpace xmlns:c="http://schemas.openxmlformats.org/drawingml/2006/chart" xmlns:a="http://schemas.openxmlformats.org/drawingml/2006/main" xmlns:r="http://schemas.openxmlformats.org/officeDocument/2006/relationships">
+  <c:date1904 val="0"/>
+  <c:chart>
+    <c:autoTitleDeleted val="1"/>
+    <c:plotArea>
+      <c:barChart>
+        <c:barDir val="col"/>
+        <c:grouping val="clustered"/>
+        <c:ser>
+          <c:idx val="0"/>
+          <c:order val="0"/>
+          <c:tx>
+            <c:strRef>
+              <c:f>Sheet1!$B$1</c:f>
+              <c:strCache>
+                <c:ptCount val="1"/>
+                <c:pt idx="0">
+                  <c:v>FY26_Q3</c:v>
+                </c:pt>
+              </c:strCache>
+            </c:strRef>
+          </c:tx>
+          <c:spPr>
+            <a:solidFill>
+              <a:srgbClr val="2E75B6"/>
+            </a:solidFill>
+          </c:spPr>
+          <c:cat>
+            <c:strRef>
+              <c:f>Sheet1!$A$2:$A$8</c:f>
+              <c:strCache>
+                <c:ptCount val="7"/>
+                <c:pt idx="0">
+                  <c:v>NBHI</c:v>
+                </c:pt>
+                <c:pt idx="1">
+                  <c:v>STAR</c:v>
+                </c:pt>
+                <c:pt idx="2">
+                  <c:v>CARE</c:v>
+                </c:pt>
+                <c:pt idx="3">
+                  <c:v>CIGNA</c:v>
+                </c:pt>
+                <c:pt idx="4">
+                  <c:v>ABHI</c:v>
+                </c:pt>
+                <c:pt idx="5">
+                  <c:v>Narayana</c:v>
+                </c:pt>
+                <c:pt idx="6">
+                  <c:v>Galaxy</c:v>
+                </c:pt>
+              </c:strCache>
+            </c:strRef>
+          </c:cat>
+          <c:val>
+            <c:numRef>
+              <c:f>Sheet1!$B$2:$B$8</c:f>
+              <c:numCache>
+                <c:formatCode>General</c:formatCode>
+                <c:ptCount val="7"/>
+                <c:pt idx="0">
+                  <c:v>224810</c:v>
+                </c:pt>
+                <c:pt idx="1">
+                  <c:v>818649</c:v>
+                </c:pt>
+                <c:pt idx="2">
+                  <c:v>400370</c:v>
+                </c:pt>
+                <c:pt idx="3">
+                  <c:v>100506</c:v>
+                </c:pt>
+                <c:pt idx="4">
+                  <c:v>163606</c:v>
+                </c:pt>
+                <c:pt idx="5">
+                  <c:v>0</c:v>
+                </c:pt>
+                <c:pt idx="6">
+                  <c:v>10680</c:v>
+                </c:pt>
+              </c:numCache>
+            </c:numRef>
+          </c:val>
+        </c:ser>
+        <c:dLbls>
+          <c:numFmt formatCode="#,##0" sourceLinked="0"/>
+          <c:txPr>
+            <a:bodyPr/>
+            <a:lstStyle/>
+            <a:p>
+              <a:pPr>
+                <a:defRPr sz="800"/>
+              </a:pPr>
+            </a:p>
+          </c:txPr>
+          <c:showLegendKey val="0"/>
+          <c:showVal val="1"/>
+          <c:showCatName val="0"/>
+          <c:showSerName val="0"/>
+          <c:showPercent val="0"/>
+          <c:showBubbleSize val="0"/>
+          <c:showLeaderLines val="1"/>
+        </c:dLbls>
+        <c:axId val="-2068027336"/>
+        <c:axId val="-2113994440"/>
+      </c:barChart>
+      <c:catAx>
+        <c:axId val="-2068027336"/>
+        <c:scaling>
+          <c:orientation val="minMax"/>
+        </c:scaling>
+        <c:delete val="0"/>
+        <c:axPos val="b"/>
+        <c:majorTickMark val="out"/>
+        <c:minorTickMark val="none"/>
+        <c:tickLblPos val="nextTo"/>
+        <c:txPr>
+          <a:bodyPr/>
+          <a:lstStyle/>
+          <a:p>
+            <a:pPr>
+              <a:defRPr sz="800"/>
+            </a:pPr>
+          </a:p>
+        </c:txPr>
+        <c:crossAx val="-2113994440"/>
+        <c:crosses val="autoZero"/>
+        <c:auto val="1"/>
+        <c:lblAlgn val="ctr"/>
+        <c:lblOffset val="100"/>
+        <c:noMultiLvlLbl val="0"/>
+      </c:catAx>
+      <c:valAx>
+        <c:axId val="-2113994440"/>
+        <c:scaling/>
+        <c:delete val="0"/>
+        <c:axPos val="l"/>
+        <c:majorGridlines/>
+        <c:majorTickMark val="out"/>
+        <c:minorTickMark val="none"/>
+        <c:tickLblPos val="nextTo"/>
+        <c:txPr>
+          <a:bodyPr/>
+          <a:lstStyle/>
+          <a:p>
+            <a:pPr>
+              <a:defRPr sz="800"/>
+            </a:pPr>
+          </a:p>
+        </c:txPr>
+        <c:crossAx val="-2068027336"/>
+        <c:crosses val="autoZero"/>
+      </c:valAx>
+    </c:plotArea>
+    <c:dispBlanksAs val="gap"/>
+  </c:chart>
+  <c:txPr>
+    <a:bodyPr/>
+    <a:lstStyle/>
+    <a:p>
+      <a:pPr>
+        <a:defRPr sz="1800"/>
+      </a:pPr>
+      <a:endParaRPr lang="en-US"/>
+    </a:p>
+  </c:txPr>
+  <c:externalData r:id="rId1">
+    <c:autoUpdate val="0"/>
+  </c:externalData>
+</c:chartSpace>
+</file>
+
+<file path=ppt/charts/chart63.xml><?xml version="1.0" encoding="utf-8"?>
+<c:chartSpace xmlns:c="http://schemas.openxmlformats.org/drawingml/2006/chart" xmlns:a="http://schemas.openxmlformats.org/drawingml/2006/main" xmlns:r="http://schemas.openxmlformats.org/officeDocument/2006/relationships">
+  <c:date1904 val="0"/>
+  <c:chart>
+    <c:autoTitleDeleted val="1"/>
+    <c:plotArea>
+      <c:barChart>
+        <c:barDir val="col"/>
+        <c:grouping val="clustered"/>
+        <c:ser>
+          <c:idx val="0"/>
+          <c:order val="0"/>
+          <c:tx>
+            <c:strRef>
+              <c:f>Sheet1!$B$1</c:f>
+              <c:strCache>
+                <c:ptCount val="1"/>
+                <c:pt idx="0">
+                  <c:v>FY26_Q3</c:v>
+                </c:pt>
+              </c:strCache>
+            </c:strRef>
+          </c:tx>
+          <c:spPr>
+            <a:solidFill>
+              <a:srgbClr val="2E75B6"/>
+            </a:solidFill>
+          </c:spPr>
+          <c:cat>
+            <c:strRef>
+              <c:f>Sheet1!$A$2:$A$8</c:f>
+              <c:strCache>
+                <c:ptCount val="7"/>
+                <c:pt idx="0">
+                  <c:v>NBHI</c:v>
+                </c:pt>
+                <c:pt idx="1">
+                  <c:v>STAR</c:v>
+                </c:pt>
+                <c:pt idx="2">
+                  <c:v>CARE</c:v>
+                </c:pt>
+                <c:pt idx="3">
+                  <c:v>CIGNA</c:v>
+                </c:pt>
+                <c:pt idx="4">
+                  <c:v>ABHI</c:v>
+                </c:pt>
+                <c:pt idx="5">
+                  <c:v>Narayana</c:v>
+                </c:pt>
+                <c:pt idx="6">
+                  <c:v>Galaxy</c:v>
+                </c:pt>
+              </c:strCache>
+            </c:strRef>
+          </c:cat>
+          <c:val>
+            <c:numRef>
+              <c:f>Sheet1!$B$2:$B$8</c:f>
+              <c:numCache>
+                <c:formatCode>General</c:formatCode>
+                <c:ptCount val="7"/>
+                <c:pt idx="0">
+                  <c:v>210</c:v>
+                </c:pt>
+                <c:pt idx="1">
+                  <c:v>918</c:v>
+                </c:pt>
+                <c:pt idx="2">
+                  <c:v>274</c:v>
+                </c:pt>
+                <c:pt idx="3">
+                  <c:v>120</c:v>
+                </c:pt>
+                <c:pt idx="4">
+                  <c:v>229</c:v>
+                </c:pt>
+                <c:pt idx="5">
+                  <c:v>4</c:v>
+                </c:pt>
+                <c:pt idx="6">
+                  <c:v>72</c:v>
+                </c:pt>
+              </c:numCache>
+            </c:numRef>
+          </c:val>
+        </c:ser>
+        <c:dLbls>
+          <c:numFmt formatCode="#,##0" sourceLinked="0"/>
+          <c:txPr>
+            <a:bodyPr/>
+            <a:lstStyle/>
+            <a:p>
+              <a:pPr>
+                <a:defRPr sz="800"/>
+              </a:pPr>
+            </a:p>
+          </c:txPr>
+          <c:showLegendKey val="0"/>
+          <c:showVal val="1"/>
+          <c:showCatName val="0"/>
+          <c:showSerName val="0"/>
+          <c:showPercent val="0"/>
+          <c:showBubbleSize val="0"/>
+          <c:showLeaderLines val="1"/>
+        </c:dLbls>
+        <c:axId val="-2068027336"/>
+        <c:axId val="-2113994440"/>
+      </c:barChart>
+      <c:catAx>
+        <c:axId val="-2068027336"/>
+        <c:scaling>
+          <c:orientation val="minMax"/>
+        </c:scaling>
+        <c:delete val="0"/>
+        <c:axPos val="b"/>
+        <c:majorTickMark val="out"/>
+        <c:minorTickMark val="none"/>
+        <c:tickLblPos val="nextTo"/>
+        <c:txPr>
+          <a:bodyPr/>
+          <a:lstStyle/>
+          <a:p>
+            <a:pPr>
+              <a:defRPr sz="800"/>
+            </a:pPr>
+          </a:p>
+        </c:txPr>
+        <c:crossAx val="-2113994440"/>
+        <c:crosses val="autoZero"/>
+        <c:auto val="1"/>
+        <c:lblAlgn val="ctr"/>
+        <c:lblOffset val="100"/>
+        <c:noMultiLvlLbl val="0"/>
+      </c:catAx>
+      <c:valAx>
+        <c:axId val="-2113994440"/>
+        <c:scaling/>
+        <c:delete val="0"/>
+        <c:axPos val="l"/>
+        <c:majorGridlines/>
+        <c:majorTickMark val="out"/>
+        <c:minorTickMark val="none"/>
+        <c:tickLblPos val="nextTo"/>
+        <c:txPr>
+          <a:bodyPr/>
+          <a:lstStyle/>
+          <a:p>
+            <a:pPr>
+              <a:defRPr sz="800"/>
+            </a:pPr>
+          </a:p>
+        </c:txPr>
+        <c:crossAx val="-2068027336"/>
+        <c:crosses val="autoZero"/>
+      </c:valAx>
+    </c:plotArea>
+    <c:dispBlanksAs val="gap"/>
+  </c:chart>
+  <c:txPr>
+    <a:bodyPr/>
+    <a:lstStyle/>
+    <a:p>
+      <a:pPr>
+        <a:defRPr sz="1800"/>
+      </a:pPr>
+      <a:endParaRPr lang="en-US"/>
+    </a:p>
+  </c:txPr>
+  <c:externalData r:id="rId1">
+    <c:autoUpdate val="0"/>
+  </c:externalData>
+</c:chartSpace>
+</file>
+
+<file path=ppt/charts/chart64.xml><?xml version="1.0" encoding="utf-8"?>
 <c:chartSpace xmlns:c="http://schemas.openxmlformats.org/drawingml/2006/chart" xmlns:a="http://schemas.openxmlformats.org/drawingml/2006/main" xmlns:r="http://schemas.openxmlformats.org/officeDocument/2006/relationships">
   <c:date1904 val="0"/>
   <c:chart>
@@ -23495,7 +24259,7 @@
         <p:spPr>
           <a:xfrm>
             <a:off x="274320" y="1417320"/>
-            <a:ext cx="6949440" cy="5486400"/>
+            <a:ext cx="6949440" cy="5120640"/>
           </a:xfrm>
           <a:prstGeom prst="roundRect">
             <a:avLst/>
@@ -23524,24 +24288,67 @@
           </a:fontRef>
         </p:style>
         <p:txBody>
-          <a:bodyPr rtlCol="0" anchor="ctr" wrap="square"/>
+          <a:bodyPr rtlCol="0" anchor="ctr"/>
           <a:lstStyle/>
           <a:p>
             <a:pPr algn="ctr"/>
+          </a:p>
+        </p:txBody>
+      </p:sp>
+      <p:graphicFrame>
+        <p:nvGraphicFramePr>
+          <p:cNvPr id="9" name="Chart 8"/>
+          <p:cNvGraphicFramePr>
+            <a:graphicFrameLocks noGrp="1"/>
+          </p:cNvGraphicFramePr>
+          <p:nvPr/>
+        </p:nvGraphicFramePr>
+        <p:xfrm>
+          <a:off x="457200" y="1691640"/>
+          <a:ext cx="6583680" cy="4572000"/>
+        </p:xfrm>
+        <a:graphic>
+          <a:graphicData uri="http://schemas.openxmlformats.org/drawingml/2006/chart">
+            <c:chart xmlns:c="http://schemas.openxmlformats.org/drawingml/2006/chart" r:id="rId3"/>
+          </a:graphicData>
+        </a:graphic>
+      </p:graphicFrame>
+      <p:sp>
+        <p:nvSpPr>
+          <p:cNvPr id="10" name="TextBox 9"/>
+          <p:cNvSpPr txBox="1"/>
+          <p:nvPr/>
+        </p:nvSpPr>
+        <p:spPr>
+          <a:xfrm>
+            <a:off x="274320" y="6583680"/>
+            <a:ext cx="6949440" cy="411480"/>
+          </a:xfrm>
+          <a:prstGeom prst="rect">
+            <a:avLst/>
+          </a:prstGeom>
+          <a:noFill/>
+        </p:spPr>
+        <p:txBody>
+          <a:bodyPr wrap="square">
+            <a:spAutoFit/>
+          </a:bodyPr>
+          <a:lstStyle/>
+          <a:p>
             <a:r>
-              <a:rPr sz="1200" i="1">
+              <a:rPr sz="1000" i="1">
                 <a:solidFill>
                   <a:srgbClr val="808080"/>
                 </a:solidFill>
               </a:rPr>
-              <a:t>Zone-level (Central/East/North/South/West) GDPI mapping is not derivable from current source disclosures - not available for FY26 Q3.</a:t>
+              <a:t>North/West/South derived from Slide 17's named states (Ministry of Home Affairs zonal convention); East and Central aren't separately broken out by current source disclosures and fall inside 'Others (unclassified)'.</a:t>
             </a:r>
           </a:p>
         </p:txBody>
       </p:sp>
       <p:sp>
         <p:nvSpPr>
-          <p:cNvPr id="9" name="Rounded Rectangle 8"/>
+          <p:cNvPr id="11" name="Rounded Rectangle 10"/>
           <p:cNvSpPr/>
           <p:nvPr/>
         </p:nvSpPr>
@@ -23589,7 +24396,7 @@
                   <a:srgbClr val="333333"/>
                 </a:solidFill>
               </a:rPr>
-              <a:t>➢  This slide requires a state-to-zone mapping not present in current source data.</a:t>
+              <a:t>➢  Zone split is a best-effort estimate from named-state data - East/Central exposure isn't separately identifiable this quarter.</a:t>
             </a:r>
           </a:p>
         </p:txBody>
@@ -28083,7 +28890,7 @@
         </p:nvGraphicFramePr>
         <p:xfrm>
           <a:off x="274320" y="1673352"/>
-          <a:ext cx="6949440" cy="6784848.0"/>
+          <a:ext cx="6949440" cy="1999488.0"/>
         </p:xfrm>
         <a:graphic>
           <a:graphicData uri="http://schemas.openxmlformats.org/drawingml/2006/chart">
@@ -28094,6 +28901,102 @@
       <p:sp>
         <p:nvSpPr>
           <p:cNvPr id="10" name="TextBox 9"/>
+          <p:cNvSpPr txBox="1"/>
+          <p:nvPr/>
+        </p:nvSpPr>
+        <p:spPr>
+          <a:xfrm>
+            <a:off x="274320" y="3810000"/>
+            <a:ext cx="6949440" cy="228600"/>
+          </a:xfrm>
+          <a:prstGeom prst="rect">
+            <a:avLst/>
+          </a:prstGeom>
+          <a:noFill/>
+        </p:spPr>
+        <p:txBody>
+          <a:bodyPr wrap="none">
+            <a:spAutoFit/>
+          </a:bodyPr>
+          <a:lstStyle/>
+          <a:p>
+            <a:pPr algn="ctr"/>
+            <a:r>
+              <a:rPr sz="1100" b="1"/>
+              <a:t>Average Claim Size (Rs.)</a:t>
+            </a:r>
+          </a:p>
+        </p:txBody>
+      </p:sp>
+      <p:graphicFrame>
+        <p:nvGraphicFramePr>
+          <p:cNvPr id="11" name="Chart 10"/>
+          <p:cNvGraphicFramePr>
+            <a:graphicFrameLocks noGrp="1"/>
+          </p:cNvGraphicFramePr>
+          <p:nvPr/>
+        </p:nvGraphicFramePr>
+        <p:xfrm>
+          <a:off x="274320" y="4066032.0"/>
+          <a:ext cx="6949440" cy="1999488.0"/>
+        </p:xfrm>
+        <a:graphic>
+          <a:graphicData uri="http://schemas.openxmlformats.org/drawingml/2006/chart">
+            <c:chart xmlns:c="http://schemas.openxmlformats.org/drawingml/2006/chart" r:id="rId4"/>
+          </a:graphicData>
+        </a:graphic>
+      </p:graphicFrame>
+      <p:sp>
+        <p:nvSpPr>
+          <p:cNvPr id="12" name="TextBox 11"/>
+          <p:cNvSpPr txBox="1"/>
+          <p:nvPr/>
+        </p:nvSpPr>
+        <p:spPr>
+          <a:xfrm>
+            <a:off x="274320" y="6202680"/>
+            <a:ext cx="6949440" cy="228600"/>
+          </a:xfrm>
+          <a:prstGeom prst="rect">
+            <a:avLst/>
+          </a:prstGeom>
+          <a:noFill/>
+        </p:spPr>
+        <p:txBody>
+          <a:bodyPr wrap="none">
+            <a:spAutoFit/>
+          </a:bodyPr>
+          <a:lstStyle/>
+          <a:p>
+            <a:pPr algn="ctr"/>
+            <a:r>
+              <a:rPr sz="1100" b="1"/>
+              <a:t>No. of Claims to No. of Policies</a:t>
+            </a:r>
+          </a:p>
+        </p:txBody>
+      </p:sp>
+      <p:graphicFrame>
+        <p:nvGraphicFramePr>
+          <p:cNvPr id="13" name="Chart 12"/>
+          <p:cNvGraphicFramePr>
+            <a:graphicFrameLocks noGrp="1"/>
+          </p:cNvGraphicFramePr>
+          <p:nvPr/>
+        </p:nvGraphicFramePr>
+        <p:xfrm>
+          <a:off x="274320" y="6458712.0"/>
+          <a:ext cx="6949440" cy="1999488.0"/>
+        </p:xfrm>
+        <a:graphic>
+          <a:graphicData uri="http://schemas.openxmlformats.org/drawingml/2006/chart">
+            <c:chart xmlns:c="http://schemas.openxmlformats.org/drawingml/2006/chart" r:id="rId5"/>
+          </a:graphicData>
+        </a:graphic>
+      </p:graphicFrame>
+      <p:sp>
+        <p:nvSpPr>
+          <p:cNvPr id="14" name="TextBox 13"/>
           <p:cNvSpPr txBox="1"/>
           <p:nvPr/>
         </p:nvSpPr>
@@ -28119,14 +29022,14 @@
                   <a:srgbClr val="808080"/>
                 </a:solidFill>
               </a:rPr>
-              <a:t>Average Claim Size and No. of claims to policies are not derivable from current source data.</a:t>
+              <a:t>Average Claim Size and No. of claims to policies are best-effort estimates (not independently GT-verified) - see Glossary.</a:t>
             </a:r>
           </a:p>
         </p:txBody>
       </p:sp>
       <p:sp>
         <p:nvSpPr>
-          <p:cNvPr id="11" name="Rounded Rectangle 10"/>
+          <p:cNvPr id="15" name="Rounded Rectangle 14"/>
           <p:cNvSpPr/>
           <p:nvPr/>
         </p:nvSpPr>
@@ -28175,6 +29078,26 @@
                 </a:solidFill>
               </a:rPr>
               <a:t>➢  ABHI has the highest Claims Settlement Ratio at 98.4%</a:t>
+            </a:r>
+          </a:p>
+          <a:p>
+            <a:r>
+              <a:rPr sz="1100">
+                <a:solidFill>
+                  <a:srgbClr val="333333"/>
+                </a:solidFill>
+              </a:rPr>
+              <a:t>➢  Narayana has the highest Average Claim Size (Rs.) at 272,861.4</a:t>
+            </a:r>
+          </a:p>
+          <a:p>
+            <a:r>
+              <a:rPr sz="1100">
+                <a:solidFill>
+                  <a:srgbClr val="333333"/>
+                </a:solidFill>
+              </a:rPr>
+              <a:t>➢  Galaxy has the lowest No. of Claims to No. of Policies at 1.1%</a:t>
             </a:r>
           </a:p>
         </p:txBody>
@@ -33560,7 +34483,7 @@
                   <a:srgbClr val="333333"/>
                 </a:solidFill>
               </a:rPr>
-              <a:t>➢  ABHI has the highest RI Ceding to GWP Ratio at 29.0%</a:t>
+              <a:t>➢  ABHI has the highest RI Ceding to GWP Ratio at 28.9%</a:t>
             </a:r>
           </a:p>
           <a:p>
@@ -33570,7 +34493,7 @@
                   <a:srgbClr val="333333"/>
                 </a:solidFill>
               </a:rPr>
-              <a:t>➢  ABHI has the highest RI Commission to RI Ceding at 58.8%</a:t>
+              <a:t>➢  ABHI has the highest RI Commission to RI Ceding at 59.0%</a:t>
             </a:r>
           </a:p>
         </p:txBody>
@@ -34027,7 +34950,7 @@
                   <a:srgbClr val="333333"/>
                 </a:solidFill>
               </a:rPr>
-              <a:t>➢  CIGNA has the highest Solvency Ratio at 156.0x</a:t>
+              <a:t>➢  Galaxy has the highest Solvency Ratio at 3.2x</a:t>
             </a:r>
           </a:p>
           <a:p>
@@ -36093,6 +37016,28 @@
             <a:r>
               <a:rPr sz="1100"/>
               <a:t>➢  “Historical Trends” slides in this FY26 Q3 report show a 2-period (FY25 Q3 vs FY26 Q3) year-on-year comparison, not multi-year history - the underlying data pipeline currently carries only these 2 periods.</a:t>
+            </a:r>
+          </a:p>
+          <a:p>
+            <a:pPr>
+              <a:spcAft>
+                <a:spcPts val="1000"/>
+              </a:spcAft>
+            </a:pPr>
+            <a:r>
+              <a:rPr sz="1100"/>
+              <a:t>➢  Slide 16's zone split (North/West/South) is derived from Slide 17's named-state data using the standard Ministry of Home Affairs zonal convention; East and Central exposure isn't separately identifiable from current source disclosures and is included in “Others (unclassified)”.</a:t>
+            </a:r>
+          </a:p>
+          <a:p>
+            <a:pPr>
+              <a:spcAft>
+                <a:spcPts val="1000"/>
+              </a:spcAft>
+            </a:pPr>
+            <a:r>
+              <a:rPr sz="1100"/>
+              <a:t>➢  Slide 20's Average Claim Size and No. of claims to No. of policies are best-effort estimates, not independently GT-verified - Average Claim Size (Claims Incurred / Claims Settled) has previously landed ~10% off ground truth for at least one company; review before external use.</a:t>
             </a:r>
           </a:p>
           <a:p>
